--- a/Servlets/Servlets.pptx
+++ b/Servlets/Servlets.pptx
@@ -104,40 +104,6 @@
     <p:sldId id="383" r:id="rId98"/>
     <p:sldId id="384" r:id="rId99"/>
     <p:sldId id="385" r:id="rId100"/>
-    <p:sldId id="386" r:id="rId101"/>
-    <p:sldId id="387" r:id="rId102"/>
-    <p:sldId id="388" r:id="rId103"/>
-    <p:sldId id="389" r:id="rId104"/>
-    <p:sldId id="390" r:id="rId105"/>
-    <p:sldId id="391" r:id="rId106"/>
-    <p:sldId id="392" r:id="rId107"/>
-    <p:sldId id="393" r:id="rId108"/>
-    <p:sldId id="394" r:id="rId109"/>
-    <p:sldId id="395" r:id="rId110"/>
-    <p:sldId id="396" r:id="rId111"/>
-    <p:sldId id="397" r:id="rId112"/>
-    <p:sldId id="398" r:id="rId113"/>
-    <p:sldId id="399" r:id="rId114"/>
-    <p:sldId id="400" r:id="rId115"/>
-    <p:sldId id="401" r:id="rId116"/>
-    <p:sldId id="402" r:id="rId117"/>
-    <p:sldId id="403" r:id="rId118"/>
-    <p:sldId id="404" r:id="rId119"/>
-    <p:sldId id="405" r:id="rId120"/>
-    <p:sldId id="406" r:id="rId121"/>
-    <p:sldId id="407" r:id="rId122"/>
-    <p:sldId id="408" r:id="rId123"/>
-    <p:sldId id="409" r:id="rId124"/>
-    <p:sldId id="410" r:id="rId125"/>
-    <p:sldId id="411" r:id="rId126"/>
-    <p:sldId id="412" r:id="rId127"/>
-    <p:sldId id="413" r:id="rId128"/>
-    <p:sldId id="414" r:id="rId129"/>
-    <p:sldId id="415" r:id="rId130"/>
-    <p:sldId id="416" r:id="rId131"/>
-    <p:sldId id="417" r:id="rId132"/>
-    <p:sldId id="418" r:id="rId133"/>
-    <p:sldId id="419" r:id="rId134"/>
   </p:sldIdLst>
   <p:sldSz cx="9144000" cy="6858000" type="screen4x3"/>
   <p:notesSz cx="6858000" cy="9144000"/>
@@ -238,7 +204,7 @@
   </p:defaultTextStyle>
   <p:extLst>
     <p:ext uri="{EFAFB233-063F-42B5-8137-9DF3F51BA10A}">
-      <p15:sldGuideLst xmlns="" xmlns:p15="http://schemas.microsoft.com/office/powerpoint/2012/main">
+      <p15:sldGuideLst xmlns:p15="http://schemas.microsoft.com/office/powerpoint/2012/main">
         <p15:guide id="1" orient="horz" pos="2160">
           <p15:clr>
             <a:srgbClr val="A4A3A4"/>
@@ -253,6 +219,705 @@
     </p:ext>
   </p:extLst>
 </p:presentation>
+</file>
+
+<file path=ppt/ink/ink1.xml><?xml version="1.0" encoding="utf-8"?>
+<inkml:ink xmlns:inkml="http://www.w3.org/2003/InkML">
+  <inkml:definitions>
+    <inkml:context xml:id="ctx0">
+      <inkml:inkSource xml:id="inkSrc0">
+        <inkml:traceFormat>
+          <inkml:channel name="X" type="integer" max="1366" units="cm"/>
+          <inkml:channel name="Y" type="integer" max="768" units="cm"/>
+        </inkml:traceFormat>
+        <inkml:channelProperties>
+          <inkml:channelProperty channel="X" name="resolution" value="46.62116" units="1/cm"/>
+          <inkml:channelProperty channel="Y" name="resolution" value="46.54546" units="1/cm"/>
+        </inkml:channelProperties>
+      </inkml:inkSource>
+      <inkml:timestamp xml:id="ts0" timeString="2022-09-29T01:56:58.550"/>
+    </inkml:context>
+    <inkml:brush xml:id="br0">
+      <inkml:brushProperty name="width" value="0.05292" units="cm"/>
+      <inkml:brushProperty name="height" value="0.05292" units="cm"/>
+      <inkml:brushProperty name="color" value="#FF0000"/>
+      <inkml:brushProperty name="fitToCurve" value="1"/>
+    </inkml:brush>
+  </inkml:definitions>
+  <inkml:trace contextRef="#ctx0" brushRef="#br0">998 1736,'0'-25,"-49"25,24 0,-49 25,24-25,-24 0,49 0,-50 25,26 0,24-25,0 0,0 0,0 24,-24-24,24 25,-49 0,49-25,0 25,-25-25,50 25,-24-25,-1 24,0 1,25 0,-25 0,25 0,-25-1,1 1,-1-25,25 25,0 0,-25 0,25-1,0 1,-25 0,25 0,0 0,0-1,0 1,0 0,0 0,0 0,0-1,0 1,0 0,0 0,0 0,0-1,25 1,-25 25,25-25,-25-1,25 1,-25 0,24 25,1-50,0 24,0 1,-25 0,25-25,-1 25,1-25,-25 25,25 0,0-1,0 1,-1 0,1-25,0 25,0 0,0-1,-1-24,1 0,-25 25,25-25,0 0,25 25,-1 0,1 0,24-1,-49 1,25 0,-26-25,1 25,0-25,0 25,24-25,-24 0,25 0,-25 0,24 0,-24 0,49 0,-24 0,-25 0,0 0,49 0,0 0,-24-25,0 25,-26-25,51 25,-1-50,1 26,-26-1,1-25,0 25,-1-24,1 24,-1 0,-24 0,0 1,49-1,-49 0,25 0,-25 0,-1 0,1 1,0-1,-25 0,25-25,0 1,-1-1,-24 25,25-24,-25-1,25 25,-25-24,0-1,0 25,0 1,0-1,0 0,0-25,0 26,0-1,0 0,0 0,0 0,0 1,0-1,0 0,-50 0,50 0,-24 25,-1-49,0 49,0-25,0 0,-24 0,-1 1,25 24,1-25,-26 0,25 25,0 0,-24-25,-1 0,-24 25,24-25,-49-24,-25 24,25 0,-50 25,25 0,49-25,1 25,24-24,26 24,-1 0,0 0,0 0,-24 0,24 0,0 0,0 0,0 0,1 0,-1 0,-25 0,25 0,1 0,-1 24,0-24,0 0,0 0,1 0,24 25,-25-25,25 25,-25-25,0 25,25 0,-25-25,25 24,-25-24,25 25,-24-25,24 25,0 0,-25-25,25 25,0 0,-25-25,25 24,-25-24,25 25,-25-25</inkml:trace>
+  <inkml:trace contextRef="#ctx0" brushRef="#br0" timeOffset="3649">304 1885,'25'0,"24"0,-24-25,49 0,-49 0,0 1,50 24,-51 0,1 0,25-25,-1 0,-24 25,0 0,0 0,0-25,24 0,-24 25,25 0,-26 0,-24-25,25 25,0 0,0 0,0 0,24-24,-24 24,0-25,0 25,-1 0,1 0,0 0,0 0,0 0,-1 0,-48 0,-1 0,0 0,-25 0,1 0,-1 0,-24 0,49 0,0 0,-24 0,-1 0,25 0,-24 0,24 0,-74 0,24 25,26-1,24-24,0 0,-25 0,50 25,-25-25,1 0,-1 0,25 25,-25-25,0 0,25 25,50-25,-25 0,24 0,1 0,-25 0,24-25,-24 25,25 0,-25 0,24 0,-24-25,0 25,0 0,-1 0,1 0,-50 25,1 0,-1 0,-50 24,51-24,-1-25,-25 0,50 25,-25-25,1 0,-1 0,0 0,50-50,0 26,24-1,1 0,24-25,-49 25,0 1,24-1,-24 25,0 0,0-25,0 25,24-25,-24 0,25 25,-50-24,24 24,1-25,0 25,0 0,0 0,-1 0,1 0,0 0,0 0,0 0,-1 0,-48 0,-1 0,0 0,0 0,0 0,-24 0,24 25,0-25,-24 0,-1 0,25 0,-24 0,-1 0,0 0,-24 24,49-24,0 0,1 0,-26 0,25 0,0 25,1-25,-1 0,0 0,0 25,0-25,0 0,1 0,-1 0</inkml:trace>
+  <inkml:trace contextRef="#ctx0" brushRef="#br0" timeOffset="7483">1718 1463,'25'0,"-25"50,24-1,-24-24,25 25,-25-26,25 51,0-50,0 24,-1 1,-24-25,0 0,25-25,-25 24,0 1,0 0,0 0,25-25,0 0,0 0,-1 0,26-25,74-25,99-123,0-1,100-99,24 0,100-124,-224 174,25 74,-99 50,0 25,-75 24,0 1,-24 49</inkml:trace>
+</inkml:ink>
+</file>
+
+<file path=ppt/ink/ink10.xml><?xml version="1.0" encoding="utf-8"?>
+<inkml:ink xmlns:inkml="http://www.w3.org/2003/InkML">
+  <inkml:definitions>
+    <inkml:context xml:id="ctx0">
+      <inkml:inkSource xml:id="inkSrc0">
+        <inkml:traceFormat>
+          <inkml:channel name="X" type="integer" max="1366" units="cm"/>
+          <inkml:channel name="Y" type="integer" max="768" units="cm"/>
+        </inkml:traceFormat>
+        <inkml:channelProperties>
+          <inkml:channelProperty channel="X" name="resolution" value="46.62116" units="1/cm"/>
+          <inkml:channelProperty channel="Y" name="resolution" value="46.54546" units="1/cm"/>
+        </inkml:channelProperties>
+      </inkml:inkSource>
+      <inkml:timestamp xml:id="ts0" timeString="2022-09-29T02:04:49.808"/>
+    </inkml:context>
+    <inkml:brush xml:id="br0">
+      <inkml:brushProperty name="width" value="0.05292" units="cm"/>
+      <inkml:brushProperty name="height" value="0.05292" units="cm"/>
+      <inkml:brushProperty name="color" value="#FF0000"/>
+      <inkml:brushProperty name="fitToCurve" value="1"/>
+    </inkml:brush>
+  </inkml:definitions>
+  <inkml:trace contextRef="#ctx0" brushRef="#br0">124 669,'0'25,"0"0,25 0,-1 0,1-25,0 24,25 26,-26-25,-24 0,25-25,0 24,-25 1,25-25,-25 25,25-25,-1 0,1 0,25-25,-25-49,74 49,25-99,0 0,25 0,-25 25,0-25,-25 49,0 1,-24 24,-51 25,1 25,0-24</inkml:trace>
+  <inkml:trace contextRef="#ctx0" brushRef="#br0" timeOffset="1706">0 446,'0'25,"24"0,1-1,-25 1,25-25,-25 25,25-25,-25 25,25-25,-25 25,0-1,25-24,-25 25,24-25,-24 25,25-25,0 25,-25 0,25-25,-25 25,25-25,-25 24,0 1,24-25,1 25,-25 0,25-25,-25 25,25-1,-25 1,0 0,25-25,-1 0,1 0,25 0,-1-25,1 0,-25-24,99-1,-50-24,50-26,-25 51,1-26,-51 26,26 24,-26-25,-24 26,0-1,0 25,0-25,-1 25,1-25,-25 0,25 25,-25-24,25 24,0 0,-1 0,1-25,0 25,0-25,0 0,-1 0,-24 1,0-1,-24 25,-1 0,-25 0,25 49,1-49,-26 25,25 0,25 0,-25-25,1 25,-1-25,0 24,0-24,25 25,-25-25,1 0,24 25,-25-25,0 25,0 0,0-25,25 24,-24-24,-1 0,25 25,-25 0,0-25,0 25,0 0,25-1,-24-24,24 25,-25-25,0 25,25 0,-25-25,25 25,0-1</inkml:trace>
+</inkml:ink>
+</file>
+
+<file path=ppt/ink/ink11.xml><?xml version="1.0" encoding="utf-8"?>
+<inkml:ink xmlns:inkml="http://www.w3.org/2003/InkML">
+  <inkml:definitions>
+    <inkml:context xml:id="ctx0">
+      <inkml:inkSource xml:id="inkSrc0">
+        <inkml:traceFormat>
+          <inkml:channel name="X" type="integer" max="1366" units="cm"/>
+          <inkml:channel name="Y" type="integer" max="768" units="cm"/>
+        </inkml:traceFormat>
+        <inkml:channelProperties>
+          <inkml:channelProperty channel="X" name="resolution" value="46.62116" units="1/cm"/>
+          <inkml:channelProperty channel="Y" name="resolution" value="46.54546" units="1/cm"/>
+        </inkml:channelProperties>
+      </inkml:inkSource>
+      <inkml:timestamp xml:id="ts0" timeString="2022-09-30T09:03:34.217"/>
+    </inkml:context>
+    <inkml:brush xml:id="br0">
+      <inkml:brushProperty name="width" value="0.05292" units="cm"/>
+      <inkml:brushProperty name="height" value="0.05292" units="cm"/>
+      <inkml:brushProperty name="color" value="#FF0000"/>
+      <inkml:brushProperty name="fitToCurve" value="1"/>
+    </inkml:brush>
+  </inkml:definitions>
+  <inkml:trace contextRef="#ctx0" brushRef="#br0">1340 744,'0'25,"0"0,0-1,25 26,-1 24,26-24,-25 0,0-26,-25 26,25-25,-25 0,24 24,-24-24,0 0,0 0,25-25,0 0,0 0,74-25,50-99,49-50,50-49,-25 49,1 1,-75 49,-25 0,0 49,-75 50,-24-24,0 49,0 0</inkml:trace>
+  <inkml:trace contextRef="#ctx0" brushRef="#br0" timeOffset="1417">0 2133,'25'0,"0"0,-25 25,0 0,25-1,0-24,-25 25,24 0,-24 0,25 0,-25-1,50-24,-25 0,24 0,1 0,-1-24,26-1,49-25,0 1,25-51,0 26,74-25,0-50,-24 50,-1 0,-49 24,-75 25,1 26</inkml:trace>
+</inkml:ink>
+</file>
+
+<file path=ppt/ink/ink12.xml><?xml version="1.0" encoding="utf-8"?>
+<inkml:ink xmlns:inkml="http://www.w3.org/2003/InkML">
+  <inkml:definitions>
+    <inkml:context xml:id="ctx0">
+      <inkml:inkSource xml:id="inkSrc0">
+        <inkml:traceFormat>
+          <inkml:channel name="X" type="integer" max="1366" units="cm"/>
+          <inkml:channel name="Y" type="integer" max="768" units="cm"/>
+        </inkml:traceFormat>
+        <inkml:channelProperties>
+          <inkml:channelProperty channel="X" name="resolution" value="46.62116" units="1/cm"/>
+          <inkml:channelProperty channel="Y" name="resolution" value="46.54546" units="1/cm"/>
+        </inkml:channelProperties>
+      </inkml:inkSource>
+      <inkml:timestamp xml:id="ts0" timeString="2022-09-30T09:03:37.187"/>
+    </inkml:context>
+    <inkml:brush xml:id="br0">
+      <inkml:brushProperty name="width" value="0.05292" units="cm"/>
+      <inkml:brushProperty name="height" value="0.05292" units="cm"/>
+      <inkml:brushProperty name="color" value="#FF0000"/>
+      <inkml:brushProperty name="fitToCurve" value="1"/>
+    </inkml:brush>
+  </inkml:definitions>
+  <inkml:trace contextRef="#ctx0" brushRef="#br0">149 918,'25'-25,"49"0,75-25,24-49,75 50,0-26,-49 26,-50-1,-25 0,25 1,-75 49,-24-25,-1 25,-24-25,0 25</inkml:trace>
+  <inkml:trace contextRef="#ctx0" brushRef="#br0" timeOffset="976">446 521,'0'25,"-24"-1,-26 51,0-1,26-24,-1-25,0-1,0 1,25 0,-25-25,1 25,-1-25,25 25,-25-1,25 1,-25-25,25 25,-25-25,25 25,-25-25,25 25,-24-25,-1 24,25 1,25-25,24 0,75 0,-24 0,-1-25,-25 1,1 24,-1 0,-24 0,-26 0,1 0,0 0,0 0</inkml:trace>
+  <inkml:trace contextRef="#ctx0" brushRef="#br0" timeOffset="2673">2356 372,'25'0,"0"25,25 0,-26-1,1 1,-25 0,25 0,0-25,-25 25,0-1,0 1,0 0,0 0,-25 24,0 1,-24-25,49 0,-50-1,25 1,0-25,1 25,-1-25,0 25,-25-25,25 0,1 0,24-25,0-25,0 1,0-1,49 1,1-1,24-24,1 24,-50 25,24 0,-24 1,0-1,0 25,-1 0,26-25,-25-25,74 26,-25-26,-49 25,25 0,-25 25,-1-24,1 24</inkml:trace>
+  <inkml:trace contextRef="#ctx0" brushRef="#br0" timeOffset="3904">3076 471,'24'0,"1"-25,0 25,25 0,-26-24,1 24,0-25,0 25,-25-25,25 25,-25-25,25 25,-25-25,0 1,0-1,0 0,-25 25,-25 0,25 0,-24 25,-1 24,0-24,1 50,-26-26,51-24,-1 0,0 0,0-1,0 1,25 0,0 0,0 0,0-1,0 1,0 0,25 0,-25 0,25-25,0 24,0-24,-1 25,26-25,-25 0,24 0,1 0,-25 0,24 0,1 0,0 0,-25-25,-1 1,26 24,-25-50,0 50,-1-25</inkml:trace>
+  <inkml:trace contextRef="#ctx0" brushRef="#br0" timeOffset="5217">3696 397,'0'25,"0"-1,0 1,0 0,0 25,0-1,0-24,0 0,0 0,0-50,0 0,25-25,-25 1,24 49,1-50,0 25,-25 1,50-1,-1 0,-24 25,25 0,-26 0,-24 25,25 0,0-1,-25 1,0 0,0 0,0 0,0-1,0 1,0 0,25-25,-25-25,25 0,-1-24,1 24,0 0,0-24,0 49,-1-25,1 0,0 25,0 0,0 0,0 0,-1 0,1 0,0 0,-25 25,25 0,-25 24,0 1,0-25,0-1,0 1,0 0,0 0,0 0</inkml:trace>
+  <inkml:trace contextRef="#ctx0" brushRef="#br0" timeOffset="6664">4787 347,'-25'0,"1"50,-1-25,25 24,-25 1,0-1,25 1,0 0,0-1,0-24,0 0,0 0,0-1,25-24,0 0,0 25,-1-25,26 0,0 0,-1 0,1-25,-1 1,-49-1,50 0,-50 0,0 0,0-24,0-1,0 25,0-24,-25-1,0 1,-24 24,49 0,-25 0,0 0,0 25,1 0,-26 0,25 0,-24 0,24 0,0 0,0 0,25 25</inkml:trace>
+  <inkml:trace contextRef="#ctx0" brushRef="#br0" timeOffset="7899">5209 322,'25'0,"-1"25,-24 50,75 24,-26-25,1-24,-25-1,0 1,-25-25,25-25,-25 25,24-25,26-25,-25-50,24 26,-49-26,25 1,-25 24,25 1,0-1,-25 1,0-1,0 25,0 0,0 1,0-1,0 0,0 0</inkml:trace>
+  <inkml:trace contextRef="#ctx0" brushRef="#br0" timeOffset="9052">6027 422,'25'0,"0"0,0 0,24 0,-24 0,0 0,0 0,24-25,-24 0,0 0,0 0,0 25,-1-24,-24-1,25 0,0-25,-25 26,25-1,-25-25,0 25,0 0,0 1,0-1,-25 25,-25 0,-24 25,-50 74,50-49,-1 49,26-50,-1 1,25 0,25-26,-25 26,25-25,0 0,0-1,0 1,0 0,50 0,-50 24,50-49,-26 50,26-25,-50 0,25-25,0 24,-1 1,1-25,0 50,0-50,24 49,-24-49,0 0,25 0,24 0,1 0,-51-24,1-1,25 25,-25-25,-1 25,1 0,0-25,-25 0,25 1,0 24,-25-25</inkml:trace>
+</inkml:ink>
+</file>
+
+<file path=ppt/ink/ink13.xml><?xml version="1.0" encoding="utf-8"?>
+<inkml:ink xmlns:inkml="http://www.w3.org/2003/InkML">
+  <inkml:definitions>
+    <inkml:context xml:id="ctx0">
+      <inkml:inkSource xml:id="inkSrc0">
+        <inkml:traceFormat>
+          <inkml:channel name="X" type="integer" max="1366" units="cm"/>
+          <inkml:channel name="Y" type="integer" max="768" units="cm"/>
+        </inkml:traceFormat>
+        <inkml:channelProperties>
+          <inkml:channelProperty channel="X" name="resolution" value="46.62116" units="1/cm"/>
+          <inkml:channelProperty channel="Y" name="resolution" value="46.54546" units="1/cm"/>
+        </inkml:channelProperties>
+      </inkml:inkSource>
+      <inkml:timestamp xml:id="ts0" timeString="2022-09-30T09:03:48.934"/>
+    </inkml:context>
+    <inkml:brush xml:id="br0">
+      <inkml:brushProperty name="width" value="0.05292" units="cm"/>
+      <inkml:brushProperty name="height" value="0.05292" units="cm"/>
+      <inkml:brushProperty name="color" value="#FF0000"/>
+      <inkml:brushProperty name="fitToCurve" value="1"/>
+    </inkml:brush>
+  </inkml:definitions>
+  <inkml:trace contextRef="#ctx0" brushRef="#br0">0 645,'25'50,"0"-1,0 26,24-26,-49 1,50 25,-25-26,-1 26,1-51,-25 1,0 25,25-50,0 25,-25-1,0 1,0 0,25-25,0 0,24-25,100-49,49-100,50-24,50-26,-50 26,0 74,-74 25,-50 24,0 26,0-1,-25 50,-49-25,-25 25,-1 0,1 0</inkml:trace>
+</inkml:ink>
+</file>
+
+<file path=ppt/ink/ink14.xml><?xml version="1.0" encoding="utf-8"?>
+<inkml:ink xmlns:inkml="http://www.w3.org/2003/InkML">
+  <inkml:definitions>
+    <inkml:context xml:id="ctx0">
+      <inkml:inkSource xml:id="inkSrc0">
+        <inkml:traceFormat>
+          <inkml:channel name="X" type="integer" max="1366" units="cm"/>
+          <inkml:channel name="Y" type="integer" max="768" units="cm"/>
+        </inkml:traceFormat>
+        <inkml:channelProperties>
+          <inkml:channelProperty channel="X" name="resolution" value="46.62116" units="1/cm"/>
+          <inkml:channelProperty channel="Y" name="resolution" value="46.54546" units="1/cm"/>
+        </inkml:channelProperties>
+      </inkml:inkSource>
+      <inkml:timestamp xml:id="ts0" timeString="2022-09-30T09:12:31.338"/>
+    </inkml:context>
+    <inkml:brush xml:id="br0">
+      <inkml:brushProperty name="width" value="0.05292" units="cm"/>
+      <inkml:brushProperty name="height" value="0.05292" units="cm"/>
+      <inkml:brushProperty name="color" value="#FF0000"/>
+      <inkml:brushProperty name="fitToCurve" value="1"/>
+    </inkml:brush>
+  </inkml:definitions>
+  <inkml:trace contextRef="#ctx0" brushRef="#br0">0 1042,'25'24,"-1"1,1-25,0 25,0 0,0 0,-1-1,1-24,0 0,-25 25,25 0,0-25,-1 0,26-50,49-24,75-100,74 1,-25-26,0 51,-74-1,-25 99,25-49,-74 49,-26 25,1 1,-25 24,-25-25</inkml:trace>
+</inkml:ink>
+</file>
+
+<file path=ppt/ink/ink15.xml><?xml version="1.0" encoding="utf-8"?>
+<inkml:ink xmlns:inkml="http://www.w3.org/2003/InkML">
+  <inkml:definitions>
+    <inkml:context xml:id="ctx0">
+      <inkml:inkSource xml:id="inkSrc0">
+        <inkml:traceFormat>
+          <inkml:channel name="X" type="integer" max="1366" units="cm"/>
+          <inkml:channel name="Y" type="integer" max="768" units="cm"/>
+        </inkml:traceFormat>
+        <inkml:channelProperties>
+          <inkml:channelProperty channel="X" name="resolution" value="46.62116" units="1/cm"/>
+          <inkml:channelProperty channel="Y" name="resolution" value="46.54546" units="1/cm"/>
+        </inkml:channelProperties>
+      </inkml:inkSource>
+      <inkml:timestamp xml:id="ts0" timeString="2022-09-30T09:12:36.532"/>
+    </inkml:context>
+    <inkml:brush xml:id="br0">
+      <inkml:brushProperty name="width" value="0.05292" units="cm"/>
+      <inkml:brushProperty name="height" value="0.05292" units="cm"/>
+      <inkml:brushProperty name="color" value="#FF0000"/>
+      <inkml:brushProperty name="fitToCurve" value="1"/>
+    </inkml:brush>
+  </inkml:definitions>
+  <inkml:trace contextRef="#ctx0" brushRef="#br0">0 670,'0'25,"0"0,0-1,24 1,1 25,0-25,0-1,24 1,-24 25,-25-25,25-25,0 49,-25-24,25-25,-25 25,24-25,-24 25,0-1,25-24,0 0,-25 25,25-25,24 0,1-25,24 1,150-125,-26 0,25 0,-24 25,-1 0,-49 0,0-25,-99 100,-1 24,-24 0,-25 0</inkml:trace>
+</inkml:ink>
+</file>
+
+<file path=ppt/ink/ink16.xml><?xml version="1.0" encoding="utf-8"?>
+<inkml:ink xmlns:inkml="http://www.w3.org/2003/InkML">
+  <inkml:definitions>
+    <inkml:context xml:id="ctx0">
+      <inkml:inkSource xml:id="inkSrc0">
+        <inkml:traceFormat>
+          <inkml:channel name="X" type="integer" max="1366" units="cm"/>
+          <inkml:channel name="Y" type="integer" max="768" units="cm"/>
+        </inkml:traceFormat>
+        <inkml:channelProperties>
+          <inkml:channelProperty channel="X" name="resolution" value="46.62116" units="1/cm"/>
+          <inkml:channelProperty channel="Y" name="resolution" value="46.54546" units="1/cm"/>
+        </inkml:channelProperties>
+      </inkml:inkSource>
+      <inkml:timestamp xml:id="ts0" timeString="2022-09-30T09:12:39.700"/>
+    </inkml:context>
+    <inkml:brush xml:id="br0">
+      <inkml:brushProperty name="width" value="0.05292" units="cm"/>
+      <inkml:brushProperty name="height" value="0.05292" units="cm"/>
+      <inkml:brushProperty name="color" value="#FF0000"/>
+      <inkml:brushProperty name="fitToCurve" value="1"/>
+    </inkml:brush>
+  </inkml:definitions>
+  <inkml:trace contextRef="#ctx0" brushRef="#br0">0 174,'99'-24,"100"24,148-50,-74 0,-25 26,0 24,-50-25,-74 25,-24 0,-51 0,26 0,-51 0,1 0,0 0</inkml:trace>
+</inkml:ink>
+</file>
+
+<file path=ppt/ink/ink17.xml><?xml version="1.0" encoding="utf-8"?>
+<inkml:ink xmlns:inkml="http://www.w3.org/2003/InkML">
+  <inkml:definitions>
+    <inkml:context xml:id="ctx0">
+      <inkml:inkSource xml:id="inkSrc0">
+        <inkml:traceFormat>
+          <inkml:channel name="X" type="integer" max="1366" units="cm"/>
+          <inkml:channel name="Y" type="integer" max="768" units="cm"/>
+        </inkml:traceFormat>
+        <inkml:channelProperties>
+          <inkml:channelProperty channel="X" name="resolution" value="46.62116" units="1/cm"/>
+          <inkml:channelProperty channel="Y" name="resolution" value="46.54546" units="1/cm"/>
+        </inkml:channelProperties>
+      </inkml:inkSource>
+      <inkml:timestamp xml:id="ts0" timeString="2022-09-30T09:12:40.710"/>
+    </inkml:context>
+    <inkml:brush xml:id="br0">
+      <inkml:brushProperty name="width" value="0.05292" units="cm"/>
+      <inkml:brushProperty name="height" value="0.05292" units="cm"/>
+      <inkml:brushProperty name="color" value="#FF0000"/>
+      <inkml:brushProperty name="fitToCurve" value="1"/>
+    </inkml:brush>
+  </inkml:definitions>
+  <inkml:trace contextRef="#ctx0" brushRef="#br0">670 0,'-25'0,"-24"0,24 25,-25-25,1 49,24-49,0 0,-25 25,50 0,-24-25,-1 0,0 0,25 25,-25-25,0 0,1 49,-1-49,0 50,0-50,25 25,-25-25,1 0,-1 25,0-25,0 0,25 24,0 1,-25-25,25 25,25 0,0-25,25 25,98 24,-48 1,24-25,-25 24,0-49,-24 0,-26 25,26-25,-51 0,1 0,0 0,0 0</inkml:trace>
+</inkml:ink>
+</file>
+
+<file path=ppt/ink/ink18.xml><?xml version="1.0" encoding="utf-8"?>
+<inkml:ink xmlns:inkml="http://www.w3.org/2003/InkML">
+  <inkml:definitions>
+    <inkml:context xml:id="ctx0">
+      <inkml:inkSource xml:id="inkSrc0">
+        <inkml:traceFormat>
+          <inkml:channel name="X" type="integer" max="1366" units="cm"/>
+          <inkml:channel name="Y" type="integer" max="768" units="cm"/>
+        </inkml:traceFormat>
+        <inkml:channelProperties>
+          <inkml:channelProperty channel="X" name="resolution" value="46.62116" units="1/cm"/>
+          <inkml:channelProperty channel="Y" name="resolution" value="46.54546" units="1/cm"/>
+        </inkml:channelProperties>
+      </inkml:inkSource>
+      <inkml:timestamp xml:id="ts0" timeString="2022-09-30T09:30:26.838"/>
+    </inkml:context>
+    <inkml:brush xml:id="br0">
+      <inkml:brushProperty name="width" value="0.05292" units="cm"/>
+      <inkml:brushProperty name="height" value="0.05292" units="cm"/>
+      <inkml:brushProperty name="color" value="#FF0000"/>
+      <inkml:brushProperty name="fitToCurve" value="1"/>
+    </inkml:brush>
+  </inkml:definitions>
+  <inkml:trace contextRef="#ctx0" brushRef="#br0">25 299,'24'0,"1"0,-25 25,0-1,25 1,0 25,-25 24,25-24,-25-25,0-1,0 26,0-25,0 24,0-24,0 0,0 0,24 0,-24-1,0 1,0 0,0 0,25 0,-25-1,25-24,0 0,49 0,1-74,123-25,-49 0,0-1,-25 26,25 24,-75 1,25-1,-49 25,-1 1,26-1,-26 0,1 0,0 25,-26-25,26 25,0 0,-50-24,25 24,-1-25,1 25,0 0,0 0,0 0</inkml:trace>
+  <inkml:trace contextRef="#ctx0" brushRef="#br0" timeOffset="3775">0 51,'0'49,"0"-24,25 0,-25 25,0-26,0 1,24 50,1-26,0 1,-25-25,0-1,25 1,-25 0,0 25,0-26,0 1,0 0,0 0,0 0,0-1,0 1,25 0,-25 0,24 0,-24-1,0 1,25-25,-25 25,25-25,-25 25,0 0,0-1,0 1,25-25,0 0,-1 0,1 0,0 0,25 0,24-49,25 49,25-75,-24 26,24-1,-50 0,0 26,26-26,-26 25,0 0,50-24,-49-1,-1 50,-24-49,-1 24,-24 25,0-25,50-25,-51 50,26-24,0-1,24 0,-49 0,24 0,1 25,0-24,-26-1,1 25,0 0,0 0,-25-25,49 25,-24-25,0 25,0-25,24 25,1 0,-50-24,25 24,0-25,-1 25,1 0,0 0,-25-25,25 25,0 0,-1 0,1-25,0 25,0 0,0 0,0 0</inkml:trace>
+  <inkml:trace contextRef="#ctx0" brushRef="#br0" timeOffset="6353">471 919,'50'0,"24"0,1 0,-26 0,26 0,-51-50,26 50,0-25,-1 1,-24-1,25 25,49-50,25-24,-25 24,50 1,0-1,-25-24,-25 24,-25 0,1 26,-26-26,26 25,-26 0,1 1,-25 24,24-25,-24 25,25-25,-25 25,24 0,1-25,-25 0,-1 25,1 0,0 0,-25-24,25 24,0 0,-1 0</inkml:trace>
+</inkml:ink>
+</file>
+
+<file path=ppt/ink/ink19.xml><?xml version="1.0" encoding="utf-8"?>
+<inkml:ink xmlns:inkml="http://www.w3.org/2003/InkML">
+  <inkml:definitions>
+    <inkml:context xml:id="ctx0">
+      <inkml:inkSource xml:id="inkSrc0">
+        <inkml:traceFormat>
+          <inkml:channel name="X" type="integer" max="1366" units="cm"/>
+          <inkml:channel name="Y" type="integer" max="768" units="cm"/>
+        </inkml:traceFormat>
+        <inkml:channelProperties>
+          <inkml:channelProperty channel="X" name="resolution" value="46.62116" units="1/cm"/>
+          <inkml:channelProperty channel="Y" name="resolution" value="46.54546" units="1/cm"/>
+        </inkml:channelProperties>
+      </inkml:inkSource>
+      <inkml:timestamp xml:id="ts0" timeString="2022-09-30T09:56:53.022"/>
+    </inkml:context>
+    <inkml:brush xml:id="br0">
+      <inkml:brushProperty name="width" value="0.05292" units="cm"/>
+      <inkml:brushProperty name="height" value="0.05292" units="cm"/>
+      <inkml:brushProperty name="color" value="#FF0000"/>
+      <inkml:brushProperty name="fitToCurve" value="1"/>
+    </inkml:brush>
+  </inkml:definitions>
+  <inkml:trace contextRef="#ctx0" brushRef="#br0">0 1439,'25'74,"0"-24,0 0,24 49,1 25,-1-50,-24-24,0 24,25-49,-50 0,0 24,24-49,-24 25,0 0,50-25,24-25,1-49,148-75,-49 0,123-99,1-25,-50 50,50-75,-75 75,25 49,-74 26,-50 73,0 1,-75 24,-24 50,0 0,0 0</inkml:trace>
+</inkml:ink>
+</file>
+
+<file path=ppt/ink/ink2.xml><?xml version="1.0" encoding="utf-8"?>
+<inkml:ink xmlns:inkml="http://www.w3.org/2003/InkML">
+  <inkml:definitions>
+    <inkml:context xml:id="ctx0">
+      <inkml:inkSource xml:id="inkSrc0">
+        <inkml:traceFormat>
+          <inkml:channel name="X" type="integer" max="1366" units="cm"/>
+          <inkml:channel name="Y" type="integer" max="768" units="cm"/>
+        </inkml:traceFormat>
+        <inkml:channelProperties>
+          <inkml:channelProperty channel="X" name="resolution" value="46.62116" units="1/cm"/>
+          <inkml:channelProperty channel="Y" name="resolution" value="46.54546" units="1/cm"/>
+        </inkml:channelProperties>
+      </inkml:inkSource>
+      <inkml:timestamp xml:id="ts0" timeString="2022-09-29T01:58:17.542"/>
+    </inkml:context>
+    <inkml:brush xml:id="br0">
+      <inkml:brushProperty name="width" value="0.05292" units="cm"/>
+      <inkml:brushProperty name="height" value="0.05292" units="cm"/>
+      <inkml:brushProperty name="color" value="#FF0000"/>
+      <inkml:brushProperty name="fitToCurve" value="1"/>
+    </inkml:brush>
+  </inkml:definitions>
+  <inkml:trace contextRef="#ctx0" brushRef="#br0">0 967,'0'25,"0"0,0-1,25-24,-25 25,0 0,24 0,1-25,-25 25,25-1,-25 1,25-25,-25 25,25 0,0-25,-25 25,24-25,-24 24,0 1,0 0,25-25,0 0,0 0,0-25,49-24,50-75,74-50,-49-24,99-26,-49 51,-50 73,24 1,-74 50,1-1,-51 25,1 0,-25 25,-1 0,-24-24</inkml:trace>
+</inkml:ink>
+</file>
+
+<file path=ppt/ink/ink20.xml><?xml version="1.0" encoding="utf-8"?>
+<inkml:ink xmlns:inkml="http://www.w3.org/2003/InkML">
+  <inkml:definitions>
+    <inkml:context xml:id="ctx0">
+      <inkml:inkSource xml:id="inkSrc0">
+        <inkml:traceFormat>
+          <inkml:channel name="X" type="integer" max="1366" units="cm"/>
+          <inkml:channel name="Y" type="integer" max="768" units="cm"/>
+        </inkml:traceFormat>
+        <inkml:channelProperties>
+          <inkml:channelProperty channel="X" name="resolution" value="46.62116" units="1/cm"/>
+          <inkml:channelProperty channel="Y" name="resolution" value="46.54546" units="1/cm"/>
+        </inkml:channelProperties>
+      </inkml:inkSource>
+      <inkml:timestamp xml:id="ts0" timeString="2022-09-30T09:58:03.529"/>
+    </inkml:context>
+    <inkml:brush xml:id="br0">
+      <inkml:brushProperty name="width" value="0.05292" units="cm"/>
+      <inkml:brushProperty name="height" value="0.05292" units="cm"/>
+      <inkml:brushProperty name="color" value="#FF0000"/>
+      <inkml:brushProperty name="fitToCurve" value="1"/>
+    </inkml:brush>
+  </inkml:definitions>
+  <inkml:trace contextRef="#ctx0" brushRef="#br0">651 921,'-25'0,"0"0,1 0,-26 0,25 0,-24 0,24 0,0 0,0 0,0 0,-24 0,-1 49,25-49,-24 25,24 0,0-25,0 25,1-25,24 49,-25-49,25 25,-25 0,25 0,0-1,-25 26,25-25,0 24,0-24,0 0,0 0,0 0,0-1,0 26,0-25,0 0,0-1,0 1,0 0,0 0,0 0,0 24,0-24,0 0,25 0,0 0,-25 24,0-24,49 0,1 0,-25-1,0 1,-1 0,1 0,25 0,-50-1,49-24,-49 25,25-25,50 0,-51 0,1 25,25 0,-1-25,-24 0,0 0,25 0,24 0,0 0,-24 0,-25 0,25 0,-26 0,51 0,-50 0,-1 0,1 0,50 0,-51 0,26 0,24-25,-49 25,0 0,25-25,-1 25,-24-25,0 25,0 0,-1 0,-24-24,25 24,0-25,0 25,24 0,-24-25,0 25,0-25,0 0,-25 1,24 24,1-25,-25 0,25 0,-25 0,0-24,0 24,0-25,0 26,0-1,0 0,0 0,0 0,0-24,-25 49,25-25,-25 0,1-25,-51 1,50 24,1 0,-26 25,25-25,0 1,-74-26,25 25,24 0,25 25,-24-49,-1 49,25-25,1 25,-1 0,0-25,0 25,0 0,1 0,-51 0,26 0,-1 0,25 0,0-25,-24 25,-1 0,25 0,0 0,1-24,-1 24,0 0,0 0,0 0,1 0,-1 0,-25 0,1 0,24 0,0 0,-25 0,1 0,24 0,0 0,0 0,1 0,-1 0,0 0,25-25</inkml:trace>
+  <inkml:trace contextRef="#ctx0" brushRef="#br0" timeOffset="2895">800 449,'25'25,"24"0,-24 24,25 26,24-25,-49-1,25 1,-26-25,1-1,0-24,-25 25,0 0,25-25,24 0,26-25,-26 0,75-99,-24 25,24 49,-25-49,-25 25,75-25,-50 24,-49 26,0 24,-26 0,1 0,0 25,-25-25,25 25,0-24,-1 24,-24-25,25 25</inkml:trace>
+</inkml:ink>
+</file>
+
+<file path=ppt/ink/ink21.xml><?xml version="1.0" encoding="utf-8"?>
+<inkml:ink xmlns:inkml="http://www.w3.org/2003/InkML">
+  <inkml:definitions>
+    <inkml:context xml:id="ctx0">
+      <inkml:inkSource xml:id="inkSrc0">
+        <inkml:traceFormat>
+          <inkml:channel name="X" type="integer" max="1366" units="cm"/>
+          <inkml:channel name="Y" type="integer" max="768" units="cm"/>
+        </inkml:traceFormat>
+        <inkml:channelProperties>
+          <inkml:channelProperty channel="X" name="resolution" value="46.62116" units="1/cm"/>
+          <inkml:channelProperty channel="Y" name="resolution" value="46.54546" units="1/cm"/>
+        </inkml:channelProperties>
+      </inkml:inkSource>
+      <inkml:timestamp xml:id="ts0" timeString="2022-09-30T09:59:05.453"/>
+    </inkml:context>
+    <inkml:brush xml:id="br0">
+      <inkml:brushProperty name="width" value="0.05292" units="cm"/>
+      <inkml:brushProperty name="height" value="0.05292" units="cm"/>
+      <inkml:brushProperty name="color" value="#FF0000"/>
+      <inkml:brushProperty name="fitToCurve" value="1"/>
+    </inkml:brush>
+  </inkml:definitions>
+  <inkml:trace contextRef="#ctx0" brushRef="#br0">0 446,'0'25,"0"0,25 0,-25-1,25 1,0 0,-25 0,0 0,24-25,-24 25,25-1,-25 1,25-25,-25 25,25-25,-25 25,25 0,-25-1,0 1,25-25,-1 0,-24 25,25-25,-25 25,0 0,25-25,-25 24,25-24,-25 25,0 0,25-25,-1 0,26 0,24-74,26 24,123-99,25 25,-50-25,1 25,-26 50,-24-25,-74 24,24 50,-25 1,-49-1,0 25,0 0</inkml:trace>
+</inkml:ink>
+</file>
+
+<file path=ppt/ink/ink22.xml><?xml version="1.0" encoding="utf-8"?>
+<inkml:ink xmlns:inkml="http://www.w3.org/2003/InkML">
+  <inkml:definitions>
+    <inkml:context xml:id="ctx0">
+      <inkml:inkSource xml:id="inkSrc0">
+        <inkml:traceFormat>
+          <inkml:channel name="X" type="integer" max="1366" units="cm"/>
+          <inkml:channel name="Y" type="integer" max="768" units="cm"/>
+        </inkml:traceFormat>
+        <inkml:channelProperties>
+          <inkml:channelProperty channel="X" name="resolution" value="46.62116" units="1/cm"/>
+          <inkml:channelProperty channel="Y" name="resolution" value="46.54546" units="1/cm"/>
+        </inkml:channelProperties>
+      </inkml:inkSource>
+      <inkml:timestamp xml:id="ts0" timeString="2022-09-30T10:00:26.766"/>
+    </inkml:context>
+    <inkml:brush xml:id="br0">
+      <inkml:brushProperty name="width" value="0.05292" units="cm"/>
+      <inkml:brushProperty name="height" value="0.05292" units="cm"/>
+      <inkml:brushProperty name="color" value="#FF0000"/>
+      <inkml:brushProperty name="fitToCurve" value="1"/>
+    </inkml:brush>
+  </inkml:definitions>
+  <inkml:trace contextRef="#ctx0" brushRef="#br0">198 374,'0'25,"25"-25,74 0,0 0,25 0,50 0,74 0,-49 0,-26-25,-24 25,99-49,-49 24,-1-25,75 1,-75-1,25 25,-98-24,48 24,-98 25,-26-25,1 25,-25-25,-1 25</inkml:trace>
+  <inkml:trace contextRef="#ctx0" brushRef="#br0" timeOffset="1134">843 77,'0'-25,"-49"50,-1-25,-25 24,1 1,24-25,-24 25,49-25,-24 0,-1 25,0-25,26 25,-1-25,0 0,0 24,0-24,1 0,-1 0,0 25,0 0,0-25,1 0,-1 0,25 25,0 0,25-1,-1 1,26-25,0 50,-26-25,26-25,0 24,-26 1,1-25,25 0,-25 25,-1-25,1 25,0-25,25 0,-26 25,1-1,0 1,0-25,0 0,-1 0,-24 25,50 0,-25-25,0 0,0 25,-1-25,1 0,0 24,0 1,24-25,1 25,-25-25,-25 25,25-25,-1 0,1 0,0 0,0 0</inkml:trace>
+</inkml:ink>
+</file>
+
+<file path=ppt/ink/ink23.xml><?xml version="1.0" encoding="utf-8"?>
+<inkml:ink xmlns:inkml="http://www.w3.org/2003/InkML">
+  <inkml:definitions>
+    <inkml:context xml:id="ctx0">
+      <inkml:inkSource xml:id="inkSrc0">
+        <inkml:traceFormat>
+          <inkml:channel name="X" type="integer" max="1366" units="cm"/>
+          <inkml:channel name="Y" type="integer" max="768" units="cm"/>
+        </inkml:traceFormat>
+        <inkml:channelProperties>
+          <inkml:channelProperty channel="X" name="resolution" value="46.62116" units="1/cm"/>
+          <inkml:channelProperty channel="Y" name="resolution" value="46.54546" units="1/cm"/>
+        </inkml:channelProperties>
+      </inkml:inkSource>
+      <inkml:timestamp xml:id="ts0" timeString="2022-09-30T10:02:29.216"/>
+    </inkml:context>
+    <inkml:brush xml:id="br0">
+      <inkml:brushProperty name="width" value="0.05292" units="cm"/>
+      <inkml:brushProperty name="height" value="0.05292" units="cm"/>
+      <inkml:brushProperty name="color" value="#FF0000"/>
+      <inkml:brushProperty name="fitToCurve" value="1"/>
+    </inkml:brush>
+  </inkml:definitions>
+  <inkml:trace contextRef="#ctx0" brushRef="#br0">0 1216,'0'24,"0"26,25 0,0-1,0-24,0 0,0 24,-1-24,1 0,0 25,-25-26,25 1,-25 0,25-25,-25 25,24-25,26 0,24-50,75-74,149-74,-50-50,25 25,99-75,-124 99,0 75,-50 50,-24 0,-25 24,-50 50,0 0,-24-25,-26 25,-24 0</inkml:trace>
+</inkml:ink>
+</file>
+
+<file path=ppt/ink/ink24.xml><?xml version="1.0" encoding="utf-8"?>
+<inkml:ink xmlns:inkml="http://www.w3.org/2003/InkML">
+  <inkml:definitions>
+    <inkml:context xml:id="ctx0">
+      <inkml:inkSource xml:id="inkSrc0">
+        <inkml:traceFormat>
+          <inkml:channel name="X" type="integer" max="1366" units="cm"/>
+          <inkml:channel name="Y" type="integer" max="768" units="cm"/>
+        </inkml:traceFormat>
+        <inkml:channelProperties>
+          <inkml:channelProperty channel="X" name="resolution" value="46.62116" units="1/cm"/>
+          <inkml:channelProperty channel="Y" name="resolution" value="46.54546" units="1/cm"/>
+        </inkml:channelProperties>
+      </inkml:inkSource>
+      <inkml:timestamp xml:id="ts0" timeString="2022-10-11T11:15:19.140"/>
+    </inkml:context>
+    <inkml:brush xml:id="br0">
+      <inkml:brushProperty name="width" value="0.05292" units="cm"/>
+      <inkml:brushProperty name="height" value="0.05292" units="cm"/>
+      <inkml:brushProperty name="color" value="#FF0000"/>
+      <inkml:brushProperty name="fitToCurve" value="1"/>
+    </inkml:brush>
+  </inkml:definitions>
+  <inkml:trace contextRef="#ctx0" brushRef="#br0">0 446,'0'50,"50"24,-1-24,-24-25,0 24,0-24,0-25,-25 25,0 0,24-25,1 0,25 0,49-25,0-49,1-1,-26 26,25-26,50 1,-50-50,-24 74,-1-24,-24 49,-26 0,1-24,0 49,0-25,0 0,0 25</inkml:trace>
+</inkml:ink>
+</file>
+
+<file path=ppt/ink/ink25.xml><?xml version="1.0" encoding="utf-8"?>
+<inkml:ink xmlns:inkml="http://www.w3.org/2003/InkML">
+  <inkml:definitions>
+    <inkml:context xml:id="ctx0">
+      <inkml:inkSource xml:id="inkSrc0">
+        <inkml:traceFormat>
+          <inkml:channel name="X" type="integer" max="1366" units="cm"/>
+          <inkml:channel name="Y" type="integer" max="768" units="cm"/>
+        </inkml:traceFormat>
+        <inkml:channelProperties>
+          <inkml:channelProperty channel="X" name="resolution" value="46.62116" units="1/cm"/>
+          <inkml:channelProperty channel="Y" name="resolution" value="46.54546" units="1/cm"/>
+        </inkml:channelProperties>
+      </inkml:inkSource>
+      <inkml:timestamp xml:id="ts0" timeString="2022-10-12T04:41:25.507"/>
+    </inkml:context>
+    <inkml:brush xml:id="br0">
+      <inkml:brushProperty name="width" value="0.05292" units="cm"/>
+      <inkml:brushProperty name="height" value="0.05292" units="cm"/>
+      <inkml:brushProperty name="color" value="#FF0000"/>
+      <inkml:brushProperty name="fitToCurve" value="1"/>
+    </inkml:brush>
+  </inkml:definitions>
+  <inkml:trace contextRef="#ctx0" brushRef="#br0">918 282,'0'-24,"0"-1,0 0,0 0,0 0,50-24,99-26,-25 51,49 24,26 0,-75 0,-50 0,-24 0,-25 0,-1 24,-24 1,0 25,0 24,0-24,0 24,0 1,0 24,0-49,0-1,0 26,-24-26,-1 1,25-1,0-24,-25 25,0-50,25 74,0-24,-25 24,0-24,25-1,0 1,0 0,0-26,0 1,0 0,0 25,25-50,0 0,25 24,-25-24,-1 0,26 0,-25 0,24 0,-24 0,25-24,-1-1,-49 0,25 0,-25 0,0 1,0-1,0 0,-25 25,1 0,-1 0,25 25,-25 0,0-1,0 51,25-50,0 49,0 1,0 49,0-25,50 50,0-25,24 74,-49-49,24 24,1-73,0 24,-50-50,24 1,-24-1,25-24,-25-26,0 51,0-1,0 50,0 0,0-25,-25 1,25-26,0-24,-24-1,24 1,-25-25,0 24,25 1,0 24,-50 26,1-1,49-50,-50 1,25-25,1 0,-1-1,0 1,-49 0,-1 25,-74 24,-24 0,24-24,0-25,25 0,-74 0,74-25,-25 0,49 0,1 0,50 0,-26-25,26 0,24 25,0 0,-25 0,1-25,-1 0,1 0,24 1,0 24,0-25,25 0,-25 25,25-25</inkml:trace>
+  <inkml:trace contextRef="#ctx0" brushRef="#br0" timeOffset="2350">2853 2416,'0'-25,"0"50,25 24,24-49,-49 50,25-25,-25-1,0 1,25-25,0 0,0 0,24-25,26 1,-51-1,51-74,74-50,-50 25,0 0,-25 25,26 24,48-24,1 25,-49 24,24 0,-50 50</inkml:trace>
+</inkml:ink>
+</file>
+
+<file path=ppt/ink/ink3.xml><?xml version="1.0" encoding="utf-8"?>
+<inkml:ink xmlns:inkml="http://www.w3.org/2003/InkML">
+  <inkml:definitions>
+    <inkml:context xml:id="ctx0">
+      <inkml:inkSource xml:id="inkSrc0">
+        <inkml:traceFormat>
+          <inkml:channel name="X" type="integer" max="1366" units="cm"/>
+          <inkml:channel name="Y" type="integer" max="768" units="cm"/>
+        </inkml:traceFormat>
+        <inkml:channelProperties>
+          <inkml:channelProperty channel="X" name="resolution" value="46.62116" units="1/cm"/>
+          <inkml:channelProperty channel="Y" name="resolution" value="46.54546" units="1/cm"/>
+        </inkml:channelProperties>
+      </inkml:inkSource>
+      <inkml:timestamp xml:id="ts0" timeString="2022-09-29T01:59:30.337"/>
+    </inkml:context>
+    <inkml:brush xml:id="br0">
+      <inkml:brushProperty name="width" value="0.05292" units="cm"/>
+      <inkml:brushProperty name="height" value="0.05292" units="cm"/>
+      <inkml:brushProperty name="color" value="#FF0000"/>
+      <inkml:brushProperty name="fitToCurve" value="1"/>
+    </inkml:brush>
+  </inkml:definitions>
+  <inkml:trace contextRef="#ctx0" brushRef="#br0">0 1438,'49'50,"26"24,-51-49,51 25,-75-25,49-1,-49 1,0 0,25-25,-25 25,25-25,-25 25,25-25,0 0,-25 24,24-24,-24 25,25-25,-25 25,0 0,0 0,25-25,0 0,0-25,49-50,75-73,49-100,100-50,99-99,25 99,-174 125,-100 49,-48 49,-51 50,-24 25,0-24</inkml:trace>
+</inkml:ink>
+</file>
+
+<file path=ppt/ink/ink4.xml><?xml version="1.0" encoding="utf-8"?>
+<inkml:ink xmlns:inkml="http://www.w3.org/2003/InkML">
+  <inkml:definitions>
+    <inkml:context xml:id="ctx0">
+      <inkml:inkSource xml:id="inkSrc0">
+        <inkml:traceFormat>
+          <inkml:channel name="X" type="integer" max="1366" units="cm"/>
+          <inkml:channel name="Y" type="integer" max="768" units="cm"/>
+        </inkml:traceFormat>
+        <inkml:channelProperties>
+          <inkml:channelProperty channel="X" name="resolution" value="46.62116" units="1/cm"/>
+          <inkml:channelProperty channel="Y" name="resolution" value="46.54546" units="1/cm"/>
+        </inkml:channelProperties>
+      </inkml:inkSource>
+      <inkml:timestamp xml:id="ts0" timeString="2022-09-29T02:00:55.534"/>
+    </inkml:context>
+    <inkml:brush xml:id="br0">
+      <inkml:brushProperty name="width" value="0.05292" units="cm"/>
+      <inkml:brushProperty name="height" value="0.05292" units="cm"/>
+      <inkml:brushProperty name="color" value="#FF0000"/>
+      <inkml:brushProperty name="fitToCurve" value="1"/>
+    </inkml:brush>
+  </inkml:definitions>
+  <inkml:trace contextRef="#ctx0" brushRef="#br0">0 0,'25'25,"25"25,-26-1,26 1,49 24,-24 26,-1-51,0 26,-49-51,25 26,-1-25,-49 0,50-1,-25 1,24 25,1-25,-25 24,0-49,-1 25,1 0,0 0,0-25,0 25,-25-1,24 1,-24 0,25-25,-25 25,25-25,0 25,0-25,-25 24,25-24,-25 25,24-25,1 0,-25 25,0 0,25-25</inkml:trace>
+  <inkml:trace contextRef="#ctx0" brushRef="#br0" timeOffset="1286">868 521,'0'25,"0"0,25 0,0-1,0 1,-1 0,1 0,0 0,-25-1,50 1,-50 0,0 25,25-25,-25-1,24 1,-24 0,25 0,0 0,-25-1,0 1,25-25,-25 25,0 0,0 0,25-1,-25 1,24 0,1-25,-25 25,0 0,25-1,-25 1,0 0,-50-25,26 0,-1 0,0 0,0 0,0 0,-24 0,24 0,-25 0,25 0,1 0,-1 0,0 0,-25-25,26 25,-1-25,-25 25,25 0,1 0,-1 0</inkml:trace>
+  <inkml:trace contextRef="#ctx0" brushRef="#br0" timeOffset="3965">75 422,'0'25,"49"24,1 1,49 24,-25 1,-24-26,0-24,-26 25,1-25,0 0,0-25,-25 24,25-24,-25 25,24-25,-24 25,25-25,0 0,0 0,-25 25,25-25,-1 0,-24 25,25-25,0 0,-25 24,25 1,0-25,-25 25,24-25,1 0,-25 25,25-25,0 0,0 0,-25 25,24-1,1-24,0 0,0 0,-25 25,25-25,-25 25,25-25,-1 0,1 0,0 25</inkml:trace>
+</inkml:ink>
+</file>
+
+<file path=ppt/ink/ink5.xml><?xml version="1.0" encoding="utf-8"?>
+<inkml:ink xmlns:inkml="http://www.w3.org/2003/InkML">
+  <inkml:definitions>
+    <inkml:context xml:id="ctx0">
+      <inkml:inkSource xml:id="inkSrc0">
+        <inkml:traceFormat>
+          <inkml:channel name="X" type="integer" max="1366" units="cm"/>
+          <inkml:channel name="Y" type="integer" max="768" units="cm"/>
+        </inkml:traceFormat>
+        <inkml:channelProperties>
+          <inkml:channelProperty channel="X" name="resolution" value="46.62116" units="1/cm"/>
+          <inkml:channelProperty channel="Y" name="resolution" value="46.54546" units="1/cm"/>
+        </inkml:channelProperties>
+      </inkml:inkSource>
+      <inkml:timestamp xml:id="ts0" timeString="2022-09-29T02:01:01.865"/>
+    </inkml:context>
+    <inkml:brush xml:id="br0">
+      <inkml:brushProperty name="width" value="0.05292" units="cm"/>
+      <inkml:brushProperty name="height" value="0.05292" units="cm"/>
+      <inkml:brushProperty name="color" value="#FF0000"/>
+      <inkml:brushProperty name="fitToCurve" value="1"/>
+    </inkml:brush>
+  </inkml:definitions>
+  <inkml:trace contextRef="#ctx0" brushRef="#br0">0 645,'0'24,"0"26,25-25,0 24,0 1,0-25,-1 0,1-1,-25 1,25 0,-25 0,25 0,0-25,-25 24,0 1,25 0,-25 0,24-25,-24 25,25-25,-25 24,25-24,0 0,49 0,-24-24,49-76,25-24,99-49,-49 24,74 25,-99 25,49 0,-74 24,25 25,-75 26,26-26,-51 50,-24-25,25 0,-25 25,-25-24</inkml:trace>
+</inkml:ink>
+</file>
+
+<file path=ppt/ink/ink6.xml><?xml version="1.0" encoding="utf-8"?>
+<inkml:ink xmlns:inkml="http://www.w3.org/2003/InkML">
+  <inkml:definitions>
+    <inkml:context xml:id="ctx0">
+      <inkml:inkSource xml:id="inkSrc0">
+        <inkml:traceFormat>
+          <inkml:channel name="X" type="integer" max="1366" units="cm"/>
+          <inkml:channel name="Y" type="integer" max="768" units="cm"/>
+        </inkml:traceFormat>
+        <inkml:channelProperties>
+          <inkml:channelProperty channel="X" name="resolution" value="46.62116" units="1/cm"/>
+          <inkml:channelProperty channel="Y" name="resolution" value="46.54546" units="1/cm"/>
+        </inkml:channelProperties>
+      </inkml:inkSource>
+      <inkml:timestamp xml:id="ts0" timeString="2022-09-29T02:01:04.426"/>
+    </inkml:context>
+    <inkml:brush xml:id="br0">
+      <inkml:brushProperty name="width" value="0.05292" units="cm"/>
+      <inkml:brushProperty name="height" value="0.05292" units="cm"/>
+      <inkml:brushProperty name="color" value="#FF0000"/>
+      <inkml:brushProperty name="fitToCurve" value="1"/>
+    </inkml:brush>
+  </inkml:definitions>
+  <inkml:trace contextRef="#ctx0" brushRef="#br0">0 1116,'0'25,"0"0,25 0,-25 24,74 26,-49-1,24 0,-24-49,0 25,0-1,0-49,-1 25,-24 0,0 0,25-25,-25 25,25-25,0 0,-25 24,25-24,49 0,50-74,124-75,0-49,0-1,0 26,124-100,-148 124,-51 75,-24-26,-75 26,-24 49,0 25,-26 0</inkml:trace>
+  <inkml:trace contextRef="#ctx0" brushRef="#br0" timeOffset="1821">99 1116,'0'25,"25"0,0 24,-25 1,49-25,-24 49,0 1,0-26,-25-24,24 0,1 49,0-24,0-25,0-1,-25 1,0 0,24-25,-24 25,25 0,-25 0,25-25,-25 24,25-24,-25 25,25-25,-25 25,24-25,26 0,0-50,49-24,25-1,-25-49,25 0,0 0,25-99,-25 124,-25-25,25 50,-49-26,24 51,-25-26,50 1,-49 49,-1 0,-24-24,49 24,-25-25,-24 25,-25 25,24-24,-49-1,25 25,0-25,0 25,-25-25,25-24,-1 49,-24-25,25 25,-25-50,25 50,-25-25,25 25,0 0,-25-24,24 24,1 0,0-25,0 25,-25-25,25 25,-1 0,1 0</inkml:trace>
+</inkml:ink>
+</file>
+
+<file path=ppt/ink/ink7.xml><?xml version="1.0" encoding="utf-8"?>
+<inkml:ink xmlns:inkml="http://www.w3.org/2003/InkML">
+  <inkml:definitions>
+    <inkml:context xml:id="ctx0">
+      <inkml:inkSource xml:id="inkSrc0">
+        <inkml:traceFormat>
+          <inkml:channel name="X" type="integer" max="1366" units="cm"/>
+          <inkml:channel name="Y" type="integer" max="768" units="cm"/>
+        </inkml:traceFormat>
+        <inkml:channelProperties>
+          <inkml:channelProperty channel="X" name="resolution" value="46.62116" units="1/cm"/>
+          <inkml:channelProperty channel="Y" name="resolution" value="46.54546" units="1/cm"/>
+        </inkml:channelProperties>
+      </inkml:inkSource>
+      <inkml:timestamp xml:id="ts0" timeString="2022-09-29T02:01:10.384"/>
+    </inkml:context>
+    <inkml:brush xml:id="br0">
+      <inkml:brushProperty name="width" value="0.05292" units="cm"/>
+      <inkml:brushProperty name="height" value="0.05292" units="cm"/>
+      <inkml:brushProperty name="color" value="#FF0000"/>
+      <inkml:brushProperty name="fitToCurve" value="1"/>
+    </inkml:brush>
+  </inkml:definitions>
+  <inkml:trace contextRef="#ctx0" brushRef="#br0">50 695,'0'-25,"0"50,0 0,25-25,0 49,-1 1,26 0,-25-1,24-24,-24 0,-25 0,25-1,-25 1,50 25,-50-25,25-1,-25 1,24 0,1 0,0-25,-25 25,25-1,-25 1,0 0,0 0,25-25,-25 25,24-25,1 0,0 0,0-25,49-25,25-24,-24-1,24-24,25 0,50 25,-25-26,24 1,-24 0,0 25,0-1,-25-24,-50 49,25 1,-49 24,-25 0,49-25,-49 50,0-24,24-1,-49 0,25 25,-25-25,25 25,0-25,0 25</inkml:trace>
+  <inkml:trace contextRef="#ctx0" brushRef="#br0" timeOffset="2125">0 695,'25'0,"25"50,-50-26,49 1,-49 25,25-50,-25 49,25-24,0 0,-25 0,25 0,-1-1,1 1,-25 0,25 0,-25 0,0-1,25-24,0 0,-25 25,25 0,-1-25,-24 25,25-25,-25 25,0-50,-25 0,25 0,-24 25,24-25,0 50,24 0,-24 0,25-25,0 49,0-49,-25 25,25-25,-25 25,24-25,-24 25,0 0,25-25,0 0,0-25,24-25,1 1,49-26,0 50,-49-49,24 24,1-24,24 49,-49-49,-1 24,26 1,-50 49,24-50,26 25,-26 0,-24 1,25-1,-1-25,1 25,-25 1,-1-1,1 25,0-25,0 0,0 0,-25 0,49 25,-24-24,0 24,0 0,-25-25,49 0,-24 25,0 0,-25-25,49 25,-24 0,0 0,0 0,0 0,-1 0,1 0,0 0,0 0,0 0,24-25,1 1,-25 24,-25-25,25 25,-1 0,-24-25,25 25,0 0</inkml:trace>
+</inkml:ink>
+</file>
+
+<file path=ppt/ink/ink8.xml><?xml version="1.0" encoding="utf-8"?>
+<inkml:ink xmlns:inkml="http://www.w3.org/2003/InkML">
+  <inkml:definitions>
+    <inkml:context xml:id="ctx0">
+      <inkml:inkSource xml:id="inkSrc0">
+        <inkml:traceFormat>
+          <inkml:channel name="X" type="integer" max="1366" units="cm"/>
+          <inkml:channel name="Y" type="integer" max="768" units="cm"/>
+        </inkml:traceFormat>
+        <inkml:channelProperties>
+          <inkml:channelProperty channel="X" name="resolution" value="46.62116" units="1/cm"/>
+          <inkml:channelProperty channel="Y" name="resolution" value="46.54546" units="1/cm"/>
+        </inkml:channelProperties>
+      </inkml:inkSource>
+      <inkml:timestamp xml:id="ts0" timeString="2022-09-29T02:02:41.553"/>
+    </inkml:context>
+    <inkml:brush xml:id="br0">
+      <inkml:brushProperty name="width" value="0.05292" units="cm"/>
+      <inkml:brushProperty name="height" value="0.05292" units="cm"/>
+      <inkml:brushProperty name="color" value="#FF0000"/>
+      <inkml:brushProperty name="fitToCurve" value="1"/>
+    </inkml:brush>
+  </inkml:definitions>
+  <inkml:trace contextRef="#ctx0" brushRef="#br0">0 595,'0'50,"49"-1,-24-24,25 74,-50-74,49 25,-49-1,25-24,0-25,-25 25,0 0,25-25,-25 25,0-1,0 1,24-25,-24 25,25 0,-25 0,25-25,-25 24,0 1,25 0,-25 0,25-25,-1 0,26 0,74-99,25-50,74-25,-24 25,-26 1,-24 48,0 1,-50 25,0 24,-49 25,0-24,-26 49,1-25</inkml:trace>
+  <inkml:trace contextRef="#ctx0" brushRef="#br0" timeOffset="1946">0 620,'0'25,"0"0,24-1,1 26,-25-25,25 24,0-24,-25 0,25 25,-1-26,-24 1,0 0,25-25,-25 25,25 24,-25-24,25-25,0 0,-25 25,0 0,24-25,-24 25,0-1,25-24,-25 25,0 0,25 0,0-25,-25 25,0-1,25 1,-25 0,0 0,49-25,26-50,24-24,-25-25,150-100,-100 50,99-74,-74 99,-25 25,0 24,-75 26,1 24,-1-25,-24 50,0-24,0 24</inkml:trace>
+  <inkml:trace contextRef="#ctx0" brushRef="#br0" timeOffset="3909">99 546,'25'0,"-1"0,-24 24,25 1,-25 25,25-25,25 24,-50 1,0-1,24-24,-24 0,25 0,-25 0,25 24,-25-24,25-25,0 25,-25 0,24-1,-24 26,0-25,25 0,0-1,-25 1,0 25,25-50,-25 25,0-1,0 1,0 0,0 0,25-25,-1 0,1 0,50-50,-1-24,75-50,25-75,-26 26,76-50,-76 74,26 25,-50 24,-25 1,-49 74,0 1,-50-1</inkml:trace>
+</inkml:ink>
+</file>
+
+<file path=ppt/ink/ink9.xml><?xml version="1.0" encoding="utf-8"?>
+<inkml:ink xmlns:inkml="http://www.w3.org/2003/InkML">
+  <inkml:definitions>
+    <inkml:context xml:id="ctx0">
+      <inkml:inkSource xml:id="inkSrc0">
+        <inkml:traceFormat>
+          <inkml:channel name="X" type="integer" max="1366" units="cm"/>
+          <inkml:channel name="Y" type="integer" max="768" units="cm"/>
+        </inkml:traceFormat>
+        <inkml:channelProperties>
+          <inkml:channelProperty channel="X" name="resolution" value="46.62116" units="1/cm"/>
+          <inkml:channelProperty channel="Y" name="resolution" value="46.54546" units="1/cm"/>
+        </inkml:channelProperties>
+      </inkml:inkSource>
+      <inkml:timestamp xml:id="ts0" timeString="2022-09-29T02:02:48.654"/>
+    </inkml:context>
+    <inkml:brush xml:id="br0">
+      <inkml:brushProperty name="width" value="0.05292" units="cm"/>
+      <inkml:brushProperty name="height" value="0.05292" units="cm"/>
+      <inkml:brushProperty name="color" value="#FF0000"/>
+      <inkml:brushProperty name="fitToCurve" value="1"/>
+    </inkml:brush>
+  </inkml:definitions>
+  <inkml:trace contextRef="#ctx0" brushRef="#br0">0 1042,'0'25,"0"24,25-24,0 0,-25 0,24-25,1 25,-25-1,0 1,25-25,-25 25,0 0,25-25,-25 25,25-1,-1-24,-24 25,25-25,-25 25,25-25,25 0,-26 0,26-50,74-24,124-75,0-49,25 49,-124 25,74-25,-74 50,-25 0,-50 49,-24 25,-1 0,1 1,-25-1</inkml:trace>
+  <inkml:trace contextRef="#ctx0" brushRef="#br0" timeOffset="2301">25 868,'0'25,"0"0,0 0,25-1,-25 1,24 0,-24 0,25 0,0 24,-25-24,25 0,0 0,-25 0,24-1,-24 1,25 0,-25 0,25 0,0-25,-25 24,0 1,25-25,-25 25,24-25,1 0,25 0,74-74,49-26,1-49,-25 50,49 0,-74 25,25-1,0-24,74 0,-74 24,-50 1,1 24,-51 26,-24 24,0-25,0 25</inkml:trace>
+  <inkml:trace contextRef="#ctx0" brushRef="#br0" timeOffset="4404">50 992,'0'25,"49"25,-49-1,50-24,-25 0,-25 0,24 24,-24-24,0 0,25 0,0 0,-25-1,25-24,-25 25,0-50,-25 1,0-26,0 0,1 26,-1-26,0 25,0 0,25 50,25 25,-25-1,25-24,-25 0,25 25,-1-26,-24 1,0 0,0-50,0-24,-49-26,49 26,-50 24,25-25,1 25,24 0,0 1,0 48,24-24,1 25,0-25,-25 25,0-50,0-24,-25 49,25-25,-25 0,25 50,25-25,-25 25,0-1,25-24,-25 25,0 0,25-25,-25 25,0 0,0 0,25-25,-25 24,24-24,-24 25,0 0,25 0,-25 0,0-1,0 1,25-25,0 0,0 0,-1 0,26 0,0-25,-26 25,26-24,49-26,-49 25,49-24,0-1,-49 25,24-25,-24 26,-1-1,-24 0,25 25,-50-25,50 0,-1 1,1-1,-25 0,24 0,1 0,-25-24,24 24,-49 0,25 25,0-25,0 25,-1-24,1-1,0 0,25 0,-1 0,-24 1,0-1,0 0,-1 25,1 0,0 0,-25-25,25 0,0 25,-25-24,-25 24,-25 24,-24 26,-25 24,24 1,1-26,-1-24,51 25,-1-50,0 0,0 0,0 0,25 25,-24-25,24 24,0 1,49-74,1 24,-25 0,74-49,25-1,49-74,1 75,25-25,-100 24,0 26,-49 24,24 0,-24-25,-26 50,1-24,0 24,-25-25,25 0,0 25,-1 0</inkml:trace>
+</inkml:ink>
 </file>
 
 <file path=ppt/slideLayouts/slideLayout1.xml><?xml version="1.0" encoding="utf-8"?>
@@ -435,7 +1100,7 @@
             <a:fld id="{1D8BD707-D9CF-40AE-B4C6-C98DA3205C09}" type="datetimeFigureOut">
               <a:rPr lang="en-US" smtClean="0"/>
               <a:pPr/>
-              <a:t>10/13/2022</a:t>
+              <a:t>6/15/2025</a:t>
             </a:fld>
             <a:endParaRPr lang="en-US"/>
           </a:p>
@@ -600,7 +1265,7 @@
             <a:fld id="{1D8BD707-D9CF-40AE-B4C6-C98DA3205C09}" type="datetimeFigureOut">
               <a:rPr lang="en-US" smtClean="0"/>
               <a:pPr/>
-              <a:t>10/13/2022</a:t>
+              <a:t>6/15/2025</a:t>
             </a:fld>
             <a:endParaRPr lang="en-US"/>
           </a:p>
@@ -775,7 +1440,7 @@
             <a:fld id="{1D8BD707-D9CF-40AE-B4C6-C98DA3205C09}" type="datetimeFigureOut">
               <a:rPr lang="en-US" smtClean="0"/>
               <a:pPr/>
-              <a:t>10/13/2022</a:t>
+              <a:t>6/15/2025</a:t>
             </a:fld>
             <a:endParaRPr lang="en-US"/>
           </a:p>
@@ -940,7 +1605,7 @@
             <a:fld id="{1D8BD707-D9CF-40AE-B4C6-C98DA3205C09}" type="datetimeFigureOut">
               <a:rPr lang="en-US" smtClean="0"/>
               <a:pPr/>
-              <a:t>10/13/2022</a:t>
+              <a:t>6/15/2025</a:t>
             </a:fld>
             <a:endParaRPr lang="en-US"/>
           </a:p>
@@ -1182,7 +1847,7 @@
             <a:fld id="{1D8BD707-D9CF-40AE-B4C6-C98DA3205C09}" type="datetimeFigureOut">
               <a:rPr lang="en-US" smtClean="0"/>
               <a:pPr/>
-              <a:t>10/13/2022</a:t>
+              <a:t>6/15/2025</a:t>
             </a:fld>
             <a:endParaRPr lang="en-US"/>
           </a:p>
@@ -1464,7 +2129,7 @@
             <a:fld id="{1D8BD707-D9CF-40AE-B4C6-C98DA3205C09}" type="datetimeFigureOut">
               <a:rPr lang="en-US" smtClean="0"/>
               <a:pPr/>
-              <a:t>10/13/2022</a:t>
+              <a:t>6/15/2025</a:t>
             </a:fld>
             <a:endParaRPr lang="en-US"/>
           </a:p>
@@ -1880,7 +2545,7 @@
             <a:fld id="{1D8BD707-D9CF-40AE-B4C6-C98DA3205C09}" type="datetimeFigureOut">
               <a:rPr lang="en-US" smtClean="0"/>
               <a:pPr/>
-              <a:t>10/13/2022</a:t>
+              <a:t>6/15/2025</a:t>
             </a:fld>
             <a:endParaRPr lang="en-US"/>
           </a:p>
@@ -1994,7 +2659,7 @@
             <a:fld id="{1D8BD707-D9CF-40AE-B4C6-C98DA3205C09}" type="datetimeFigureOut">
               <a:rPr lang="en-US" smtClean="0"/>
               <a:pPr/>
-              <a:t>10/13/2022</a:t>
+              <a:t>6/15/2025</a:t>
             </a:fld>
             <a:endParaRPr lang="en-US"/>
           </a:p>
@@ -2086,7 +2751,7 @@
             <a:fld id="{1D8BD707-D9CF-40AE-B4C6-C98DA3205C09}" type="datetimeFigureOut">
               <a:rPr lang="en-US" smtClean="0"/>
               <a:pPr/>
-              <a:t>10/13/2022</a:t>
+              <a:t>6/15/2025</a:t>
             </a:fld>
             <a:endParaRPr lang="en-US"/>
           </a:p>
@@ -2358,7 +3023,7 @@
             <a:fld id="{1D8BD707-D9CF-40AE-B4C6-C98DA3205C09}" type="datetimeFigureOut">
               <a:rPr lang="en-US" smtClean="0"/>
               <a:pPr/>
-              <a:t>10/13/2022</a:t>
+              <a:t>6/15/2025</a:t>
             </a:fld>
             <a:endParaRPr lang="en-US"/>
           </a:p>
@@ -2607,7 +3272,7 @@
             <a:fld id="{1D8BD707-D9CF-40AE-B4C6-C98DA3205C09}" type="datetimeFigureOut">
               <a:rPr lang="en-US" smtClean="0"/>
               <a:pPr/>
-              <a:t>10/13/2022</a:t>
+              <a:t>6/15/2025</a:t>
             </a:fld>
             <a:endParaRPr lang="en-US"/>
           </a:p>
@@ -2815,7 +3480,7 @@
             <a:fld id="{1D8BD707-D9CF-40AE-B4C6-C98DA3205C09}" type="datetimeFigureOut">
               <a:rPr lang="en-US" smtClean="0"/>
               <a:pPr/>
-              <a:t>10/13/2022</a:t>
+              <a:t>6/15/2025</a:t>
             </a:fld>
             <a:endParaRPr lang="en-US"/>
           </a:p>
@@ -3282,263 +3947,6 @@
   <p:clrMapOvr>
     <a:masterClrMapping/>
   </p:clrMapOvr>
-  <p:timing>
-    <p:tnLst>
-      <p:par>
-        <p:cTn id="1" dur="indefinite" restart="never" nodeType="tmRoot"/>
-      </p:par>
-    </p:tnLst>
-  </p:timing>
-</p:sld>
-</file>
-
-<file path=ppt/slides/slide100.xml><?xml version="1.0" encoding="utf-8"?>
-<p:sld xmlns:a="http://schemas.openxmlformats.org/drawingml/2006/main" xmlns:r="http://schemas.openxmlformats.org/officeDocument/2006/relationships" xmlns:p="http://schemas.openxmlformats.org/presentationml/2006/main">
-  <p:cSld>
-    <p:spTree>
-      <p:nvGrpSpPr>
-        <p:cNvPr id="1" name=""/>
-        <p:cNvGrpSpPr/>
-        <p:nvPr/>
-      </p:nvGrpSpPr>
-      <p:grpSpPr>
-        <a:xfrm>
-          <a:off x="0" y="0"/>
-          <a:ext cx="0" cy="0"/>
-          <a:chOff x="0" y="0"/>
-          <a:chExt cx="0" cy="0"/>
-        </a:xfrm>
-      </p:grpSpPr>
-    </p:spTree>
-  </p:cSld>
-  <p:clrMapOvr>
-    <a:masterClrMapping/>
-  </p:clrMapOvr>
-</p:sld>
-</file>
-
-<file path=ppt/slides/slide101.xml><?xml version="1.0" encoding="utf-8"?>
-<p:sld xmlns:a="http://schemas.openxmlformats.org/drawingml/2006/main" xmlns:r="http://schemas.openxmlformats.org/officeDocument/2006/relationships" xmlns:p="http://schemas.openxmlformats.org/presentationml/2006/main">
-  <p:cSld>
-    <p:spTree>
-      <p:nvGrpSpPr>
-        <p:cNvPr id="1" name=""/>
-        <p:cNvGrpSpPr/>
-        <p:nvPr/>
-      </p:nvGrpSpPr>
-      <p:grpSpPr>
-        <a:xfrm>
-          <a:off x="0" y="0"/>
-          <a:ext cx="0" cy="0"/>
-          <a:chOff x="0" y="0"/>
-          <a:chExt cx="0" cy="0"/>
-        </a:xfrm>
-      </p:grpSpPr>
-    </p:spTree>
-  </p:cSld>
-  <p:clrMapOvr>
-    <a:masterClrMapping/>
-  </p:clrMapOvr>
-</p:sld>
-</file>
-
-<file path=ppt/slides/slide102.xml><?xml version="1.0" encoding="utf-8"?>
-<p:sld xmlns:a="http://schemas.openxmlformats.org/drawingml/2006/main" xmlns:r="http://schemas.openxmlformats.org/officeDocument/2006/relationships" xmlns:p="http://schemas.openxmlformats.org/presentationml/2006/main">
-  <p:cSld>
-    <p:spTree>
-      <p:nvGrpSpPr>
-        <p:cNvPr id="1" name=""/>
-        <p:cNvGrpSpPr/>
-        <p:nvPr/>
-      </p:nvGrpSpPr>
-      <p:grpSpPr>
-        <a:xfrm>
-          <a:off x="0" y="0"/>
-          <a:ext cx="0" cy="0"/>
-          <a:chOff x="0" y="0"/>
-          <a:chExt cx="0" cy="0"/>
-        </a:xfrm>
-      </p:grpSpPr>
-    </p:spTree>
-  </p:cSld>
-  <p:clrMapOvr>
-    <a:masterClrMapping/>
-  </p:clrMapOvr>
-</p:sld>
-</file>
-
-<file path=ppt/slides/slide103.xml><?xml version="1.0" encoding="utf-8"?>
-<p:sld xmlns:a="http://schemas.openxmlformats.org/drawingml/2006/main" xmlns:r="http://schemas.openxmlformats.org/officeDocument/2006/relationships" xmlns:p="http://schemas.openxmlformats.org/presentationml/2006/main">
-  <p:cSld>
-    <p:spTree>
-      <p:nvGrpSpPr>
-        <p:cNvPr id="1" name=""/>
-        <p:cNvGrpSpPr/>
-        <p:nvPr/>
-      </p:nvGrpSpPr>
-      <p:grpSpPr>
-        <a:xfrm>
-          <a:off x="0" y="0"/>
-          <a:ext cx="0" cy="0"/>
-          <a:chOff x="0" y="0"/>
-          <a:chExt cx="0" cy="0"/>
-        </a:xfrm>
-      </p:grpSpPr>
-    </p:spTree>
-  </p:cSld>
-  <p:clrMapOvr>
-    <a:masterClrMapping/>
-  </p:clrMapOvr>
-</p:sld>
-</file>
-
-<file path=ppt/slides/slide104.xml><?xml version="1.0" encoding="utf-8"?>
-<p:sld xmlns:a="http://schemas.openxmlformats.org/drawingml/2006/main" xmlns:r="http://schemas.openxmlformats.org/officeDocument/2006/relationships" xmlns:p="http://schemas.openxmlformats.org/presentationml/2006/main">
-  <p:cSld>
-    <p:spTree>
-      <p:nvGrpSpPr>
-        <p:cNvPr id="1" name=""/>
-        <p:cNvGrpSpPr/>
-        <p:nvPr/>
-      </p:nvGrpSpPr>
-      <p:grpSpPr>
-        <a:xfrm>
-          <a:off x="0" y="0"/>
-          <a:ext cx="0" cy="0"/>
-          <a:chOff x="0" y="0"/>
-          <a:chExt cx="0" cy="0"/>
-        </a:xfrm>
-      </p:grpSpPr>
-    </p:spTree>
-  </p:cSld>
-  <p:clrMapOvr>
-    <a:masterClrMapping/>
-  </p:clrMapOvr>
-</p:sld>
-</file>
-
-<file path=ppt/slides/slide105.xml><?xml version="1.0" encoding="utf-8"?>
-<p:sld xmlns:a="http://schemas.openxmlformats.org/drawingml/2006/main" xmlns:r="http://schemas.openxmlformats.org/officeDocument/2006/relationships" xmlns:p="http://schemas.openxmlformats.org/presentationml/2006/main">
-  <p:cSld>
-    <p:spTree>
-      <p:nvGrpSpPr>
-        <p:cNvPr id="1" name=""/>
-        <p:cNvGrpSpPr/>
-        <p:nvPr/>
-      </p:nvGrpSpPr>
-      <p:grpSpPr>
-        <a:xfrm>
-          <a:off x="0" y="0"/>
-          <a:ext cx="0" cy="0"/>
-          <a:chOff x="0" y="0"/>
-          <a:chExt cx="0" cy="0"/>
-        </a:xfrm>
-      </p:grpSpPr>
-    </p:spTree>
-  </p:cSld>
-  <p:clrMapOvr>
-    <a:masterClrMapping/>
-  </p:clrMapOvr>
-</p:sld>
-</file>
-
-<file path=ppt/slides/slide106.xml><?xml version="1.0" encoding="utf-8"?>
-<p:sld xmlns:a="http://schemas.openxmlformats.org/drawingml/2006/main" xmlns:r="http://schemas.openxmlformats.org/officeDocument/2006/relationships" xmlns:p="http://schemas.openxmlformats.org/presentationml/2006/main">
-  <p:cSld>
-    <p:spTree>
-      <p:nvGrpSpPr>
-        <p:cNvPr id="1" name=""/>
-        <p:cNvGrpSpPr/>
-        <p:nvPr/>
-      </p:nvGrpSpPr>
-      <p:grpSpPr>
-        <a:xfrm>
-          <a:off x="0" y="0"/>
-          <a:ext cx="0" cy="0"/>
-          <a:chOff x="0" y="0"/>
-          <a:chExt cx="0" cy="0"/>
-        </a:xfrm>
-      </p:grpSpPr>
-    </p:spTree>
-  </p:cSld>
-  <p:clrMapOvr>
-    <a:masterClrMapping/>
-  </p:clrMapOvr>
-</p:sld>
-</file>
-
-<file path=ppt/slides/slide107.xml><?xml version="1.0" encoding="utf-8"?>
-<p:sld xmlns:a="http://schemas.openxmlformats.org/drawingml/2006/main" xmlns:r="http://schemas.openxmlformats.org/officeDocument/2006/relationships" xmlns:p="http://schemas.openxmlformats.org/presentationml/2006/main">
-  <p:cSld>
-    <p:spTree>
-      <p:nvGrpSpPr>
-        <p:cNvPr id="1" name=""/>
-        <p:cNvGrpSpPr/>
-        <p:nvPr/>
-      </p:nvGrpSpPr>
-      <p:grpSpPr>
-        <a:xfrm>
-          <a:off x="0" y="0"/>
-          <a:ext cx="0" cy="0"/>
-          <a:chOff x="0" y="0"/>
-          <a:chExt cx="0" cy="0"/>
-        </a:xfrm>
-      </p:grpSpPr>
-    </p:spTree>
-  </p:cSld>
-  <p:clrMapOvr>
-    <a:masterClrMapping/>
-  </p:clrMapOvr>
-</p:sld>
-</file>
-
-<file path=ppt/slides/slide108.xml><?xml version="1.0" encoding="utf-8"?>
-<p:sld xmlns:a="http://schemas.openxmlformats.org/drawingml/2006/main" xmlns:r="http://schemas.openxmlformats.org/officeDocument/2006/relationships" xmlns:p="http://schemas.openxmlformats.org/presentationml/2006/main">
-  <p:cSld>
-    <p:spTree>
-      <p:nvGrpSpPr>
-        <p:cNvPr id="1" name=""/>
-        <p:cNvGrpSpPr/>
-        <p:nvPr/>
-      </p:nvGrpSpPr>
-      <p:grpSpPr>
-        <a:xfrm>
-          <a:off x="0" y="0"/>
-          <a:ext cx="0" cy="0"/>
-          <a:chOff x="0" y="0"/>
-          <a:chExt cx="0" cy="0"/>
-        </a:xfrm>
-      </p:grpSpPr>
-    </p:spTree>
-  </p:cSld>
-  <p:clrMapOvr>
-    <a:masterClrMapping/>
-  </p:clrMapOvr>
-</p:sld>
-</file>
-
-<file path=ppt/slides/slide109.xml><?xml version="1.0" encoding="utf-8"?>
-<p:sld xmlns:a="http://schemas.openxmlformats.org/drawingml/2006/main" xmlns:r="http://schemas.openxmlformats.org/officeDocument/2006/relationships" xmlns:p="http://schemas.openxmlformats.org/presentationml/2006/main">
-  <p:cSld>
-    <p:spTree>
-      <p:nvGrpSpPr>
-        <p:cNvPr id="1" name=""/>
-        <p:cNvGrpSpPr/>
-        <p:nvPr/>
-      </p:nvGrpSpPr>
-      <p:grpSpPr>
-        <a:xfrm>
-          <a:off x="0" y="0"/>
-          <a:ext cx="0" cy="0"/>
-          <a:chOff x="0" y="0"/>
-          <a:chExt cx="0" cy="0"/>
-        </a:xfrm>
-      </p:grpSpPr>
-    </p:spTree>
-  </p:cSld>
-  <p:clrMapOvr>
-    <a:masterClrMapping/>
-  </p:clrMapOvr>
 </p:sld>
 </file>
 
@@ -3597,263 +4005,6 @@
   <p:clrMapOvr>
     <a:masterClrMapping/>
   </p:clrMapOvr>
-  <p:timing>
-    <p:tnLst>
-      <p:par>
-        <p:cTn id="1" dur="indefinite" restart="never" nodeType="tmRoot"/>
-      </p:par>
-    </p:tnLst>
-  </p:timing>
-</p:sld>
-</file>
-
-<file path=ppt/slides/slide110.xml><?xml version="1.0" encoding="utf-8"?>
-<p:sld xmlns:a="http://schemas.openxmlformats.org/drawingml/2006/main" xmlns:r="http://schemas.openxmlformats.org/officeDocument/2006/relationships" xmlns:p="http://schemas.openxmlformats.org/presentationml/2006/main">
-  <p:cSld>
-    <p:spTree>
-      <p:nvGrpSpPr>
-        <p:cNvPr id="1" name=""/>
-        <p:cNvGrpSpPr/>
-        <p:nvPr/>
-      </p:nvGrpSpPr>
-      <p:grpSpPr>
-        <a:xfrm>
-          <a:off x="0" y="0"/>
-          <a:ext cx="0" cy="0"/>
-          <a:chOff x="0" y="0"/>
-          <a:chExt cx="0" cy="0"/>
-        </a:xfrm>
-      </p:grpSpPr>
-    </p:spTree>
-  </p:cSld>
-  <p:clrMapOvr>
-    <a:masterClrMapping/>
-  </p:clrMapOvr>
-</p:sld>
-</file>
-
-<file path=ppt/slides/slide111.xml><?xml version="1.0" encoding="utf-8"?>
-<p:sld xmlns:a="http://schemas.openxmlformats.org/drawingml/2006/main" xmlns:r="http://schemas.openxmlformats.org/officeDocument/2006/relationships" xmlns:p="http://schemas.openxmlformats.org/presentationml/2006/main">
-  <p:cSld>
-    <p:spTree>
-      <p:nvGrpSpPr>
-        <p:cNvPr id="1" name=""/>
-        <p:cNvGrpSpPr/>
-        <p:nvPr/>
-      </p:nvGrpSpPr>
-      <p:grpSpPr>
-        <a:xfrm>
-          <a:off x="0" y="0"/>
-          <a:ext cx="0" cy="0"/>
-          <a:chOff x="0" y="0"/>
-          <a:chExt cx="0" cy="0"/>
-        </a:xfrm>
-      </p:grpSpPr>
-    </p:spTree>
-  </p:cSld>
-  <p:clrMapOvr>
-    <a:masterClrMapping/>
-  </p:clrMapOvr>
-</p:sld>
-</file>
-
-<file path=ppt/slides/slide112.xml><?xml version="1.0" encoding="utf-8"?>
-<p:sld xmlns:a="http://schemas.openxmlformats.org/drawingml/2006/main" xmlns:r="http://schemas.openxmlformats.org/officeDocument/2006/relationships" xmlns:p="http://schemas.openxmlformats.org/presentationml/2006/main">
-  <p:cSld>
-    <p:spTree>
-      <p:nvGrpSpPr>
-        <p:cNvPr id="1" name=""/>
-        <p:cNvGrpSpPr/>
-        <p:nvPr/>
-      </p:nvGrpSpPr>
-      <p:grpSpPr>
-        <a:xfrm>
-          <a:off x="0" y="0"/>
-          <a:ext cx="0" cy="0"/>
-          <a:chOff x="0" y="0"/>
-          <a:chExt cx="0" cy="0"/>
-        </a:xfrm>
-      </p:grpSpPr>
-    </p:spTree>
-  </p:cSld>
-  <p:clrMapOvr>
-    <a:masterClrMapping/>
-  </p:clrMapOvr>
-</p:sld>
-</file>
-
-<file path=ppt/slides/slide113.xml><?xml version="1.0" encoding="utf-8"?>
-<p:sld xmlns:a="http://schemas.openxmlformats.org/drawingml/2006/main" xmlns:r="http://schemas.openxmlformats.org/officeDocument/2006/relationships" xmlns:p="http://schemas.openxmlformats.org/presentationml/2006/main">
-  <p:cSld>
-    <p:spTree>
-      <p:nvGrpSpPr>
-        <p:cNvPr id="1" name=""/>
-        <p:cNvGrpSpPr/>
-        <p:nvPr/>
-      </p:nvGrpSpPr>
-      <p:grpSpPr>
-        <a:xfrm>
-          <a:off x="0" y="0"/>
-          <a:ext cx="0" cy="0"/>
-          <a:chOff x="0" y="0"/>
-          <a:chExt cx="0" cy="0"/>
-        </a:xfrm>
-      </p:grpSpPr>
-    </p:spTree>
-  </p:cSld>
-  <p:clrMapOvr>
-    <a:masterClrMapping/>
-  </p:clrMapOvr>
-</p:sld>
-</file>
-
-<file path=ppt/slides/slide114.xml><?xml version="1.0" encoding="utf-8"?>
-<p:sld xmlns:a="http://schemas.openxmlformats.org/drawingml/2006/main" xmlns:r="http://schemas.openxmlformats.org/officeDocument/2006/relationships" xmlns:p="http://schemas.openxmlformats.org/presentationml/2006/main">
-  <p:cSld>
-    <p:spTree>
-      <p:nvGrpSpPr>
-        <p:cNvPr id="1" name=""/>
-        <p:cNvGrpSpPr/>
-        <p:nvPr/>
-      </p:nvGrpSpPr>
-      <p:grpSpPr>
-        <a:xfrm>
-          <a:off x="0" y="0"/>
-          <a:ext cx="0" cy="0"/>
-          <a:chOff x="0" y="0"/>
-          <a:chExt cx="0" cy="0"/>
-        </a:xfrm>
-      </p:grpSpPr>
-    </p:spTree>
-  </p:cSld>
-  <p:clrMapOvr>
-    <a:masterClrMapping/>
-  </p:clrMapOvr>
-</p:sld>
-</file>
-
-<file path=ppt/slides/slide115.xml><?xml version="1.0" encoding="utf-8"?>
-<p:sld xmlns:a="http://schemas.openxmlformats.org/drawingml/2006/main" xmlns:r="http://schemas.openxmlformats.org/officeDocument/2006/relationships" xmlns:p="http://schemas.openxmlformats.org/presentationml/2006/main">
-  <p:cSld>
-    <p:spTree>
-      <p:nvGrpSpPr>
-        <p:cNvPr id="1" name=""/>
-        <p:cNvGrpSpPr/>
-        <p:nvPr/>
-      </p:nvGrpSpPr>
-      <p:grpSpPr>
-        <a:xfrm>
-          <a:off x="0" y="0"/>
-          <a:ext cx="0" cy="0"/>
-          <a:chOff x="0" y="0"/>
-          <a:chExt cx="0" cy="0"/>
-        </a:xfrm>
-      </p:grpSpPr>
-    </p:spTree>
-  </p:cSld>
-  <p:clrMapOvr>
-    <a:masterClrMapping/>
-  </p:clrMapOvr>
-</p:sld>
-</file>
-
-<file path=ppt/slides/slide116.xml><?xml version="1.0" encoding="utf-8"?>
-<p:sld xmlns:a="http://schemas.openxmlformats.org/drawingml/2006/main" xmlns:r="http://schemas.openxmlformats.org/officeDocument/2006/relationships" xmlns:p="http://schemas.openxmlformats.org/presentationml/2006/main">
-  <p:cSld>
-    <p:spTree>
-      <p:nvGrpSpPr>
-        <p:cNvPr id="1" name=""/>
-        <p:cNvGrpSpPr/>
-        <p:nvPr/>
-      </p:nvGrpSpPr>
-      <p:grpSpPr>
-        <a:xfrm>
-          <a:off x="0" y="0"/>
-          <a:ext cx="0" cy="0"/>
-          <a:chOff x="0" y="0"/>
-          <a:chExt cx="0" cy="0"/>
-        </a:xfrm>
-      </p:grpSpPr>
-    </p:spTree>
-  </p:cSld>
-  <p:clrMapOvr>
-    <a:masterClrMapping/>
-  </p:clrMapOvr>
-</p:sld>
-</file>
-
-<file path=ppt/slides/slide117.xml><?xml version="1.0" encoding="utf-8"?>
-<p:sld xmlns:a="http://schemas.openxmlformats.org/drawingml/2006/main" xmlns:r="http://schemas.openxmlformats.org/officeDocument/2006/relationships" xmlns:p="http://schemas.openxmlformats.org/presentationml/2006/main">
-  <p:cSld>
-    <p:spTree>
-      <p:nvGrpSpPr>
-        <p:cNvPr id="1" name=""/>
-        <p:cNvGrpSpPr/>
-        <p:nvPr/>
-      </p:nvGrpSpPr>
-      <p:grpSpPr>
-        <a:xfrm>
-          <a:off x="0" y="0"/>
-          <a:ext cx="0" cy="0"/>
-          <a:chOff x="0" y="0"/>
-          <a:chExt cx="0" cy="0"/>
-        </a:xfrm>
-      </p:grpSpPr>
-    </p:spTree>
-  </p:cSld>
-  <p:clrMapOvr>
-    <a:masterClrMapping/>
-  </p:clrMapOvr>
-</p:sld>
-</file>
-
-<file path=ppt/slides/slide118.xml><?xml version="1.0" encoding="utf-8"?>
-<p:sld xmlns:a="http://schemas.openxmlformats.org/drawingml/2006/main" xmlns:r="http://schemas.openxmlformats.org/officeDocument/2006/relationships" xmlns:p="http://schemas.openxmlformats.org/presentationml/2006/main">
-  <p:cSld>
-    <p:spTree>
-      <p:nvGrpSpPr>
-        <p:cNvPr id="1" name=""/>
-        <p:cNvGrpSpPr/>
-        <p:nvPr/>
-      </p:nvGrpSpPr>
-      <p:grpSpPr>
-        <a:xfrm>
-          <a:off x="0" y="0"/>
-          <a:ext cx="0" cy="0"/>
-          <a:chOff x="0" y="0"/>
-          <a:chExt cx="0" cy="0"/>
-        </a:xfrm>
-      </p:grpSpPr>
-    </p:spTree>
-  </p:cSld>
-  <p:clrMapOvr>
-    <a:masterClrMapping/>
-  </p:clrMapOvr>
-</p:sld>
-</file>
-
-<file path=ppt/slides/slide119.xml><?xml version="1.0" encoding="utf-8"?>
-<p:sld xmlns:a="http://schemas.openxmlformats.org/drawingml/2006/main" xmlns:r="http://schemas.openxmlformats.org/officeDocument/2006/relationships" xmlns:p="http://schemas.openxmlformats.org/presentationml/2006/main">
-  <p:cSld>
-    <p:spTree>
-      <p:nvGrpSpPr>
-        <p:cNvPr id="1" name=""/>
-        <p:cNvGrpSpPr/>
-        <p:nvPr/>
-      </p:nvGrpSpPr>
-      <p:grpSpPr>
-        <a:xfrm>
-          <a:off x="0" y="0"/>
-          <a:ext cx="0" cy="0"/>
-          <a:chOff x="0" y="0"/>
-          <a:chExt cx="0" cy="0"/>
-        </a:xfrm>
-      </p:grpSpPr>
-    </p:spTree>
-  </p:cSld>
-  <p:clrMapOvr>
-    <a:masterClrMapping/>
-  </p:clrMapOvr>
 </p:sld>
 </file>
 
@@ -3915,256 +4066,6 @@
 </p:sld>
 </file>
 
-<file path=ppt/slides/slide120.xml><?xml version="1.0" encoding="utf-8"?>
-<p:sld xmlns:a="http://schemas.openxmlformats.org/drawingml/2006/main" xmlns:r="http://schemas.openxmlformats.org/officeDocument/2006/relationships" xmlns:p="http://schemas.openxmlformats.org/presentationml/2006/main">
-  <p:cSld>
-    <p:spTree>
-      <p:nvGrpSpPr>
-        <p:cNvPr id="1" name=""/>
-        <p:cNvGrpSpPr/>
-        <p:nvPr/>
-      </p:nvGrpSpPr>
-      <p:grpSpPr>
-        <a:xfrm>
-          <a:off x="0" y="0"/>
-          <a:ext cx="0" cy="0"/>
-          <a:chOff x="0" y="0"/>
-          <a:chExt cx="0" cy="0"/>
-        </a:xfrm>
-      </p:grpSpPr>
-    </p:spTree>
-  </p:cSld>
-  <p:clrMapOvr>
-    <a:masterClrMapping/>
-  </p:clrMapOvr>
-</p:sld>
-</file>
-
-<file path=ppt/slides/slide121.xml><?xml version="1.0" encoding="utf-8"?>
-<p:sld xmlns:a="http://schemas.openxmlformats.org/drawingml/2006/main" xmlns:r="http://schemas.openxmlformats.org/officeDocument/2006/relationships" xmlns:p="http://schemas.openxmlformats.org/presentationml/2006/main">
-  <p:cSld>
-    <p:spTree>
-      <p:nvGrpSpPr>
-        <p:cNvPr id="1" name=""/>
-        <p:cNvGrpSpPr/>
-        <p:nvPr/>
-      </p:nvGrpSpPr>
-      <p:grpSpPr>
-        <a:xfrm>
-          <a:off x="0" y="0"/>
-          <a:ext cx="0" cy="0"/>
-          <a:chOff x="0" y="0"/>
-          <a:chExt cx="0" cy="0"/>
-        </a:xfrm>
-      </p:grpSpPr>
-    </p:spTree>
-  </p:cSld>
-  <p:clrMapOvr>
-    <a:masterClrMapping/>
-  </p:clrMapOvr>
-</p:sld>
-</file>
-
-<file path=ppt/slides/slide122.xml><?xml version="1.0" encoding="utf-8"?>
-<p:sld xmlns:a="http://schemas.openxmlformats.org/drawingml/2006/main" xmlns:r="http://schemas.openxmlformats.org/officeDocument/2006/relationships" xmlns:p="http://schemas.openxmlformats.org/presentationml/2006/main">
-  <p:cSld>
-    <p:spTree>
-      <p:nvGrpSpPr>
-        <p:cNvPr id="1" name=""/>
-        <p:cNvGrpSpPr/>
-        <p:nvPr/>
-      </p:nvGrpSpPr>
-      <p:grpSpPr>
-        <a:xfrm>
-          <a:off x="0" y="0"/>
-          <a:ext cx="0" cy="0"/>
-          <a:chOff x="0" y="0"/>
-          <a:chExt cx="0" cy="0"/>
-        </a:xfrm>
-      </p:grpSpPr>
-    </p:spTree>
-  </p:cSld>
-  <p:clrMapOvr>
-    <a:masterClrMapping/>
-  </p:clrMapOvr>
-</p:sld>
-</file>
-
-<file path=ppt/slides/slide123.xml><?xml version="1.0" encoding="utf-8"?>
-<p:sld xmlns:a="http://schemas.openxmlformats.org/drawingml/2006/main" xmlns:r="http://schemas.openxmlformats.org/officeDocument/2006/relationships" xmlns:p="http://schemas.openxmlformats.org/presentationml/2006/main">
-  <p:cSld>
-    <p:spTree>
-      <p:nvGrpSpPr>
-        <p:cNvPr id="1" name=""/>
-        <p:cNvGrpSpPr/>
-        <p:nvPr/>
-      </p:nvGrpSpPr>
-      <p:grpSpPr>
-        <a:xfrm>
-          <a:off x="0" y="0"/>
-          <a:ext cx="0" cy="0"/>
-          <a:chOff x="0" y="0"/>
-          <a:chExt cx="0" cy="0"/>
-        </a:xfrm>
-      </p:grpSpPr>
-    </p:spTree>
-  </p:cSld>
-  <p:clrMapOvr>
-    <a:masterClrMapping/>
-  </p:clrMapOvr>
-</p:sld>
-</file>
-
-<file path=ppt/slides/slide124.xml><?xml version="1.0" encoding="utf-8"?>
-<p:sld xmlns:a="http://schemas.openxmlformats.org/drawingml/2006/main" xmlns:r="http://schemas.openxmlformats.org/officeDocument/2006/relationships" xmlns:p="http://schemas.openxmlformats.org/presentationml/2006/main">
-  <p:cSld>
-    <p:spTree>
-      <p:nvGrpSpPr>
-        <p:cNvPr id="1" name=""/>
-        <p:cNvGrpSpPr/>
-        <p:nvPr/>
-      </p:nvGrpSpPr>
-      <p:grpSpPr>
-        <a:xfrm>
-          <a:off x="0" y="0"/>
-          <a:ext cx="0" cy="0"/>
-          <a:chOff x="0" y="0"/>
-          <a:chExt cx="0" cy="0"/>
-        </a:xfrm>
-      </p:grpSpPr>
-    </p:spTree>
-  </p:cSld>
-  <p:clrMapOvr>
-    <a:masterClrMapping/>
-  </p:clrMapOvr>
-</p:sld>
-</file>
-
-<file path=ppt/slides/slide125.xml><?xml version="1.0" encoding="utf-8"?>
-<p:sld xmlns:a="http://schemas.openxmlformats.org/drawingml/2006/main" xmlns:r="http://schemas.openxmlformats.org/officeDocument/2006/relationships" xmlns:p="http://schemas.openxmlformats.org/presentationml/2006/main">
-  <p:cSld>
-    <p:spTree>
-      <p:nvGrpSpPr>
-        <p:cNvPr id="1" name=""/>
-        <p:cNvGrpSpPr/>
-        <p:nvPr/>
-      </p:nvGrpSpPr>
-      <p:grpSpPr>
-        <a:xfrm>
-          <a:off x="0" y="0"/>
-          <a:ext cx="0" cy="0"/>
-          <a:chOff x="0" y="0"/>
-          <a:chExt cx="0" cy="0"/>
-        </a:xfrm>
-      </p:grpSpPr>
-    </p:spTree>
-  </p:cSld>
-  <p:clrMapOvr>
-    <a:masterClrMapping/>
-  </p:clrMapOvr>
-</p:sld>
-</file>
-
-<file path=ppt/slides/slide126.xml><?xml version="1.0" encoding="utf-8"?>
-<p:sld xmlns:a="http://schemas.openxmlformats.org/drawingml/2006/main" xmlns:r="http://schemas.openxmlformats.org/officeDocument/2006/relationships" xmlns:p="http://schemas.openxmlformats.org/presentationml/2006/main">
-  <p:cSld>
-    <p:spTree>
-      <p:nvGrpSpPr>
-        <p:cNvPr id="1" name=""/>
-        <p:cNvGrpSpPr/>
-        <p:nvPr/>
-      </p:nvGrpSpPr>
-      <p:grpSpPr>
-        <a:xfrm>
-          <a:off x="0" y="0"/>
-          <a:ext cx="0" cy="0"/>
-          <a:chOff x="0" y="0"/>
-          <a:chExt cx="0" cy="0"/>
-        </a:xfrm>
-      </p:grpSpPr>
-    </p:spTree>
-  </p:cSld>
-  <p:clrMapOvr>
-    <a:masterClrMapping/>
-  </p:clrMapOvr>
-</p:sld>
-</file>
-
-<file path=ppt/slides/slide127.xml><?xml version="1.0" encoding="utf-8"?>
-<p:sld xmlns:a="http://schemas.openxmlformats.org/drawingml/2006/main" xmlns:r="http://schemas.openxmlformats.org/officeDocument/2006/relationships" xmlns:p="http://schemas.openxmlformats.org/presentationml/2006/main">
-  <p:cSld>
-    <p:spTree>
-      <p:nvGrpSpPr>
-        <p:cNvPr id="1" name=""/>
-        <p:cNvGrpSpPr/>
-        <p:nvPr/>
-      </p:nvGrpSpPr>
-      <p:grpSpPr>
-        <a:xfrm>
-          <a:off x="0" y="0"/>
-          <a:ext cx="0" cy="0"/>
-          <a:chOff x="0" y="0"/>
-          <a:chExt cx="0" cy="0"/>
-        </a:xfrm>
-      </p:grpSpPr>
-    </p:spTree>
-  </p:cSld>
-  <p:clrMapOvr>
-    <a:masterClrMapping/>
-  </p:clrMapOvr>
-</p:sld>
-</file>
-
-<file path=ppt/slides/slide128.xml><?xml version="1.0" encoding="utf-8"?>
-<p:sld xmlns:a="http://schemas.openxmlformats.org/drawingml/2006/main" xmlns:r="http://schemas.openxmlformats.org/officeDocument/2006/relationships" xmlns:p="http://schemas.openxmlformats.org/presentationml/2006/main">
-  <p:cSld>
-    <p:spTree>
-      <p:nvGrpSpPr>
-        <p:cNvPr id="1" name=""/>
-        <p:cNvGrpSpPr/>
-        <p:nvPr/>
-      </p:nvGrpSpPr>
-      <p:grpSpPr>
-        <a:xfrm>
-          <a:off x="0" y="0"/>
-          <a:ext cx="0" cy="0"/>
-          <a:chOff x="0" y="0"/>
-          <a:chExt cx="0" cy="0"/>
-        </a:xfrm>
-      </p:grpSpPr>
-    </p:spTree>
-  </p:cSld>
-  <p:clrMapOvr>
-    <a:masterClrMapping/>
-  </p:clrMapOvr>
-</p:sld>
-</file>
-
-<file path=ppt/slides/slide129.xml><?xml version="1.0" encoding="utf-8"?>
-<p:sld xmlns:a="http://schemas.openxmlformats.org/drawingml/2006/main" xmlns:r="http://schemas.openxmlformats.org/officeDocument/2006/relationships" xmlns:p="http://schemas.openxmlformats.org/presentationml/2006/main">
-  <p:cSld>
-    <p:spTree>
-      <p:nvGrpSpPr>
-        <p:cNvPr id="1" name=""/>
-        <p:cNvGrpSpPr/>
-        <p:nvPr/>
-      </p:nvGrpSpPr>
-      <p:grpSpPr>
-        <a:xfrm>
-          <a:off x="0" y="0"/>
-          <a:ext cx="0" cy="0"/>
-          <a:chOff x="0" y="0"/>
-          <a:chExt cx="0" cy="0"/>
-        </a:xfrm>
-      </p:grpSpPr>
-    </p:spTree>
-  </p:cSld>
-  <p:clrMapOvr>
-    <a:masterClrMapping/>
-  </p:clrMapOvr>
-</p:sld>
-</file>
-
 <file path=ppt/slides/slide13.xml><?xml version="1.0" encoding="utf-8"?>
 <p:sld xmlns:a="http://schemas.openxmlformats.org/drawingml/2006/main" xmlns:r="http://schemas.openxmlformats.org/officeDocument/2006/relationships" xmlns:p="http://schemas.openxmlformats.org/presentationml/2006/main">
   <p:cSld>
@@ -4223,106 +4124,6 @@
 </p:sld>
 </file>
 
-<file path=ppt/slides/slide130.xml><?xml version="1.0" encoding="utf-8"?>
-<p:sld xmlns:a="http://schemas.openxmlformats.org/drawingml/2006/main" xmlns:r="http://schemas.openxmlformats.org/officeDocument/2006/relationships" xmlns:p="http://schemas.openxmlformats.org/presentationml/2006/main">
-  <p:cSld>
-    <p:spTree>
-      <p:nvGrpSpPr>
-        <p:cNvPr id="1" name=""/>
-        <p:cNvGrpSpPr/>
-        <p:nvPr/>
-      </p:nvGrpSpPr>
-      <p:grpSpPr>
-        <a:xfrm>
-          <a:off x="0" y="0"/>
-          <a:ext cx="0" cy="0"/>
-          <a:chOff x="0" y="0"/>
-          <a:chExt cx="0" cy="0"/>
-        </a:xfrm>
-      </p:grpSpPr>
-    </p:spTree>
-  </p:cSld>
-  <p:clrMapOvr>
-    <a:masterClrMapping/>
-  </p:clrMapOvr>
-</p:sld>
-</file>
-
-<file path=ppt/slides/slide131.xml><?xml version="1.0" encoding="utf-8"?>
-<p:sld xmlns:a="http://schemas.openxmlformats.org/drawingml/2006/main" xmlns:r="http://schemas.openxmlformats.org/officeDocument/2006/relationships" xmlns:p="http://schemas.openxmlformats.org/presentationml/2006/main">
-  <p:cSld>
-    <p:spTree>
-      <p:nvGrpSpPr>
-        <p:cNvPr id="1" name=""/>
-        <p:cNvGrpSpPr/>
-        <p:nvPr/>
-      </p:nvGrpSpPr>
-      <p:grpSpPr>
-        <a:xfrm>
-          <a:off x="0" y="0"/>
-          <a:ext cx="0" cy="0"/>
-          <a:chOff x="0" y="0"/>
-          <a:chExt cx="0" cy="0"/>
-        </a:xfrm>
-      </p:grpSpPr>
-    </p:spTree>
-  </p:cSld>
-  <p:clrMapOvr>
-    <a:masterClrMapping/>
-  </p:clrMapOvr>
-</p:sld>
-</file>
-
-<file path=ppt/slides/slide132.xml><?xml version="1.0" encoding="utf-8"?>
-<p:sld xmlns:a="http://schemas.openxmlformats.org/drawingml/2006/main" xmlns:r="http://schemas.openxmlformats.org/officeDocument/2006/relationships" xmlns:p="http://schemas.openxmlformats.org/presentationml/2006/main">
-  <p:cSld>
-    <p:spTree>
-      <p:nvGrpSpPr>
-        <p:cNvPr id="1" name=""/>
-        <p:cNvGrpSpPr/>
-        <p:nvPr/>
-      </p:nvGrpSpPr>
-      <p:grpSpPr>
-        <a:xfrm>
-          <a:off x="0" y="0"/>
-          <a:ext cx="0" cy="0"/>
-          <a:chOff x="0" y="0"/>
-          <a:chExt cx="0" cy="0"/>
-        </a:xfrm>
-      </p:grpSpPr>
-    </p:spTree>
-  </p:cSld>
-  <p:clrMapOvr>
-    <a:masterClrMapping/>
-  </p:clrMapOvr>
-</p:sld>
-</file>
-
-<file path=ppt/slides/slide133.xml><?xml version="1.0" encoding="utf-8"?>
-<p:sld xmlns:a="http://schemas.openxmlformats.org/drawingml/2006/main" xmlns:r="http://schemas.openxmlformats.org/officeDocument/2006/relationships" xmlns:p="http://schemas.openxmlformats.org/presentationml/2006/main">
-  <p:cSld>
-    <p:spTree>
-      <p:nvGrpSpPr>
-        <p:cNvPr id="1" name=""/>
-        <p:cNvGrpSpPr/>
-        <p:nvPr/>
-      </p:nvGrpSpPr>
-      <p:grpSpPr>
-        <a:xfrm>
-          <a:off x="0" y="0"/>
-          <a:ext cx="0" cy="0"/>
-          <a:chOff x="0" y="0"/>
-          <a:chExt cx="0" cy="0"/>
-        </a:xfrm>
-      </p:grpSpPr>
-    </p:spTree>
-  </p:cSld>
-  <p:clrMapOvr>
-    <a:masterClrMapping/>
-  </p:clrMapOvr>
-</p:sld>
-</file>
-
 <file path=ppt/slides/slide14.xml><?xml version="1.0" encoding="utf-8"?>
 <p:sld xmlns:a="http://schemas.openxmlformats.org/drawingml/2006/main" xmlns:r="http://schemas.openxmlformats.org/officeDocument/2006/relationships" xmlns:p="http://schemas.openxmlformats.org/presentationml/2006/main">
   <p:cSld>
@@ -4702,13 +4503,6 @@
   <p:clrMapOvr>
     <a:masterClrMapping/>
   </p:clrMapOvr>
-  <p:timing>
-    <p:tnLst>
-      <p:par>
-        <p:cTn id="1" dur="indefinite" restart="never" nodeType="tmRoot"/>
-      </p:par>
-    </p:tnLst>
-  </p:timing>
 </p:sld>
 </file>
 
@@ -4885,31 +4679,31 @@
           <a:lstStyle/>
           <a:p>
             <a:r>
-              <a:rPr lang="en-IN" dirty="0" smtClean="0"/>
+              <a:rPr lang="en-IN" dirty="0"/>
               <a:t>(under the </a:t>
             </a:r>
             <a:r>
-              <a:rPr lang="en-IN" b="1" dirty="0" smtClean="0"/>
+              <a:rPr lang="en-IN" b="1" dirty="0"/>
               <a:t>project folder </a:t>
             </a:r>
             <a:r>
-              <a:rPr lang="en-IN" dirty="0" smtClean="0"/>
+              <a:rPr lang="en-IN" dirty="0"/>
               <a:t>directly we can place .html , .</a:t>
             </a:r>
             <a:r>
-              <a:rPr lang="en-IN" dirty="0" err="1" smtClean="0"/>
+              <a:rPr lang="en-IN" dirty="0" err="1"/>
               <a:t>js</a:t>
             </a:r>
             <a:r>
-              <a:rPr lang="en-IN" dirty="0" smtClean="0"/>
+              <a:rPr lang="en-IN" dirty="0"/>
               <a:t> , .</a:t>
             </a:r>
             <a:r>
-              <a:rPr lang="en-IN" dirty="0" err="1" smtClean="0"/>
+              <a:rPr lang="en-IN" dirty="0" err="1"/>
               <a:t>jsp</a:t>
             </a:r>
             <a:r>
-              <a:rPr lang="en-IN" dirty="0" smtClean="0"/>
+              <a:rPr lang="en-IN" dirty="0"/>
               <a:t> files , generally we call this area as public area)</a:t>
             </a:r>
             <a:endParaRPr lang="en-US" dirty="0"/>
@@ -4939,7 +4733,7 @@
           <a:lstStyle/>
           <a:p>
             <a:r>
-              <a:rPr lang="en-IN" dirty="0" smtClean="0"/>
+              <a:rPr lang="en-IN" dirty="0"/>
               <a:t>(Web.xml)</a:t>
             </a:r>
             <a:endParaRPr lang="en-US" dirty="0"/>
@@ -4984,13 +4778,6 @@
   <p:clrMapOvr>
     <a:masterClrMapping/>
   </p:clrMapOvr>
-  <p:timing>
-    <p:tnLst>
-      <p:par>
-        <p:cTn id="1" dur="indefinite" restart="never" nodeType="tmRoot"/>
-      </p:par>
-    </p:tnLst>
-  </p:timing>
 </p:sld>
 </file>
 
@@ -5034,7 +4821,7 @@
           <a:lstStyle/>
           <a:p>
             <a:r>
-              <a:rPr lang="en-IN" sz="3300" dirty="0" smtClean="0"/>
+              <a:rPr lang="en-IN" sz="3300" dirty="0"/>
               <a:t>Above is standard directory structure , Eclipse IDE follows different directory structure.</a:t>
             </a:r>
             <a:endParaRPr lang="en-US" sz="3300" dirty="0"/>
@@ -5046,13 +4833,6 @@
   <p:clrMapOvr>
     <a:masterClrMapping/>
   </p:clrMapOvr>
-  <p:timing>
-    <p:tnLst>
-      <p:par>
-        <p:cTn id="1" dur="indefinite" restart="never" nodeType="tmRoot"/>
-      </p:par>
-    </p:tnLst>
-  </p:timing>
 </p:sld>
 </file>
 
@@ -5096,7 +4876,7 @@
           <a:lstStyle/>
           <a:p>
             <a:r>
-              <a:rPr lang="en-IN" sz="3300" dirty="0" smtClean="0"/>
+              <a:rPr lang="en-IN" sz="3300" dirty="0"/>
               <a:t>First create a new folder , and double click on Eclipse icon and select this newly created folder as workspace ,After opening Eclipse , click on the “+” symbol (open perspective) in the top right corner</a:t>
             </a:r>
             <a:endParaRPr lang="en-US" sz="3300" dirty="0"/>
@@ -5112,7 +4892,7 @@
           <p:nvPr/>
         </p:nvPicPr>
         <p:blipFill>
-          <a:blip r:embed="rId3"/>
+          <a:blip r:embed="rId2"/>
           <a:srcRect/>
           <a:stretch>
             <a:fillRect/>
@@ -5136,18 +4916,54 @@
           <a:effectLst/>
         </p:spPr>
       </p:pic>
+      <mc:AlternateContent xmlns:mc="http://schemas.openxmlformats.org/markup-compatibility/2006">
+        <mc:Choice xmlns:p14="http://schemas.microsoft.com/office/powerpoint/2010/main" Requires="p14">
+          <p:contentPart p14:bwMode="auto" r:id="rId3">
+            <p14:nvContentPartPr>
+              <p14:cNvPr id="2051" name="Ink 3"/>
+              <p14:cNvContentPartPr>
+                <a14:cpLocks xmlns:a14="http://schemas.microsoft.com/office/drawing/2010/main" noRot="1" noChangeAspect="1" noEditPoints="1" noChangeArrowheads="1" noChangeShapeType="1"/>
+              </p14:cNvContentPartPr>
+              <p14:nvPr/>
+            </p14:nvContentPartPr>
+            <p14:xfrm>
+              <a:off x="6072188" y="3357563"/>
+              <a:ext cx="1697037" cy="1187450"/>
+            </p14:xfrm>
+          </p:contentPart>
+        </mc:Choice>
+        <mc:Fallback>
+          <p:pic>
+            <p:nvPicPr>
+              <p:cNvPr id="2051" name="Ink 3"/>
+              <p:cNvPicPr>
+                <a:picLocks noRot="1" noChangeAspect="1" noEditPoints="1" noChangeArrowheads="1" noChangeShapeType="1"/>
+              </p:cNvPicPr>
+              <p:nvPr/>
+            </p:nvPicPr>
+            <p:blipFill>
+              <a:blip r:embed="rId4"/>
+              <a:stretch>
+                <a:fillRect/>
+              </a:stretch>
+            </p:blipFill>
+            <p:spPr>
+              <a:xfrm>
+                <a:off x="6062840" y="3348219"/>
+                <a:ext cx="1715733" cy="1206139"/>
+              </a:xfrm>
+              <a:prstGeom prst="rect">
+                <a:avLst/>
+              </a:prstGeom>
+            </p:spPr>
+          </p:pic>
+        </mc:Fallback>
+      </mc:AlternateContent>
     </p:spTree>
   </p:cSld>
   <p:clrMapOvr>
     <a:masterClrMapping/>
   </p:clrMapOvr>
-  <p:timing>
-    <p:tnLst>
-      <p:par>
-        <p:cTn id="1" dur="indefinite" restart="never" nodeType="tmRoot"/>
-      </p:par>
-    </p:tnLst>
-  </p:timing>
 </p:sld>
 </file>
 
@@ -5177,7 +4993,7 @@
           <p:nvPr/>
         </p:nvPicPr>
         <p:blipFill>
-          <a:blip r:embed="rId3"/>
+          <a:blip r:embed="rId2"/>
           <a:srcRect/>
           <a:stretch>
             <a:fillRect/>
@@ -5201,18 +5017,97 @@
           <a:effectLst/>
         </p:spPr>
       </p:pic>
+      <mc:AlternateContent xmlns:mc="http://schemas.openxmlformats.org/markup-compatibility/2006">
+        <mc:Choice xmlns:p14="http://schemas.microsoft.com/office/powerpoint/2010/main" Requires="p14">
+          <p:contentPart p14:bwMode="auto" r:id="rId3">
+            <p14:nvContentPartPr>
+              <p14:cNvPr id="3075" name="Ink 3"/>
+              <p14:cNvContentPartPr>
+                <a14:cpLocks xmlns:a14="http://schemas.microsoft.com/office/drawing/2010/main" noRot="1" noChangeAspect="1" noEditPoints="1" noChangeArrowheads="1" noChangeShapeType="1"/>
+              </p14:cNvContentPartPr>
+              <p14:nvPr/>
+            </p14:nvContentPartPr>
+            <p14:xfrm>
+              <a:off x="3779838" y="2276475"/>
+              <a:ext cx="706437" cy="482600"/>
+            </p14:xfrm>
+          </p:contentPart>
+        </mc:Choice>
+        <mc:Fallback>
+          <p:pic>
+            <p:nvPicPr>
+              <p:cNvPr id="3075" name="Ink 3"/>
+              <p:cNvPicPr>
+                <a:picLocks noRot="1" noChangeAspect="1" noEditPoints="1" noChangeArrowheads="1" noChangeShapeType="1"/>
+              </p:cNvPicPr>
+              <p:nvPr/>
+            </p:nvPicPr>
+            <p:blipFill>
+              <a:blip r:embed="rId4"/>
+              <a:stretch>
+                <a:fillRect/>
+              </a:stretch>
+            </p:blipFill>
+            <p:spPr>
+              <a:xfrm>
+                <a:off x="3770481" y="2267111"/>
+                <a:ext cx="725151" cy="501328"/>
+              </a:xfrm>
+              <a:prstGeom prst="rect">
+                <a:avLst/>
+              </a:prstGeom>
+            </p:spPr>
+          </p:pic>
+        </mc:Fallback>
+      </mc:AlternateContent>
+      <mc:AlternateContent xmlns:mc="http://schemas.openxmlformats.org/markup-compatibility/2006">
+        <mc:Choice xmlns:p14="http://schemas.microsoft.com/office/powerpoint/2010/main" Requires="p14">
+          <p:contentPart p14:bwMode="auto" r:id="rId5">
+            <p14:nvContentPartPr>
+              <p14:cNvPr id="3077" name="Ink 5"/>
+              <p14:cNvContentPartPr>
+                <a14:cpLocks xmlns:a14="http://schemas.microsoft.com/office/drawing/2010/main" noRot="1" noChangeAspect="1" noEditPoints="1" noChangeArrowheads="1" noChangeShapeType="1"/>
+              </p14:cNvContentPartPr>
+              <p14:nvPr/>
+            </p14:nvContentPartPr>
+            <p14:xfrm>
+              <a:off x="4224338" y="5411788"/>
+              <a:ext cx="946150" cy="687387"/>
+            </p14:xfrm>
+          </p:contentPart>
+        </mc:Choice>
+        <mc:Fallback>
+          <p:pic>
+            <p:nvPicPr>
+              <p:cNvPr id="3077" name="Ink 5"/>
+              <p:cNvPicPr>
+                <a:picLocks noRot="1" noChangeAspect="1" noEditPoints="1" noChangeArrowheads="1" noChangeShapeType="1"/>
+              </p:cNvPicPr>
+              <p:nvPr/>
+            </p:nvPicPr>
+            <p:blipFill>
+              <a:blip r:embed="rId6"/>
+              <a:stretch>
+                <a:fillRect/>
+              </a:stretch>
+            </p:blipFill>
+            <p:spPr>
+              <a:xfrm>
+                <a:off x="4214984" y="5402436"/>
+                <a:ext cx="964857" cy="706091"/>
+              </a:xfrm>
+              <a:prstGeom prst="rect">
+                <a:avLst/>
+              </a:prstGeom>
+            </p:spPr>
+          </p:pic>
+        </mc:Fallback>
+      </mc:AlternateContent>
     </p:spTree>
   </p:cSld>
   <p:clrMapOvr>
     <a:masterClrMapping/>
   </p:clrMapOvr>
-  <p:timing>
-    <p:tnLst>
-      <p:par>
-        <p:cTn id="1" dur="indefinite" restart="never" nodeType="tmRoot"/>
-      </p:par>
-    </p:tnLst>
-  </p:timing>
 </p:sld>
 </file>
 
@@ -5242,7 +5137,7 @@
           <p:nvPr/>
         </p:nvPicPr>
         <p:blipFill>
-          <a:blip r:embed="rId3"/>
+          <a:blip r:embed="rId2"/>
           <a:srcRect/>
           <a:stretch>
             <a:fillRect/>
@@ -5266,18 +5161,183 @@
           <a:effectLst/>
         </p:spPr>
       </p:pic>
+      <mc:AlternateContent xmlns:mc="http://schemas.openxmlformats.org/markup-compatibility/2006">
+        <mc:Choice xmlns:p14="http://schemas.microsoft.com/office/powerpoint/2010/main" Requires="p14">
+          <p:contentPart p14:bwMode="auto" r:id="rId3">
+            <p14:nvContentPartPr>
+              <p14:cNvPr id="4099" name="Ink 3"/>
+              <p14:cNvContentPartPr>
+                <a14:cpLocks xmlns:a14="http://schemas.microsoft.com/office/drawing/2010/main" noRot="1" noChangeAspect="1" noEditPoints="1" noChangeArrowheads="1" noChangeShapeType="1"/>
+              </p14:cNvContentPartPr>
+              <p14:nvPr/>
+            </p14:nvContentPartPr>
+            <p14:xfrm>
+              <a:off x="177800" y="669925"/>
+              <a:ext cx="465138" cy="473075"/>
+            </p14:xfrm>
+          </p:contentPart>
+        </mc:Choice>
+        <mc:Fallback>
+          <p:pic>
+            <p:nvPicPr>
+              <p:cNvPr id="4099" name="Ink 3"/>
+              <p:cNvPicPr>
+                <a:picLocks noRot="1" noChangeAspect="1" noEditPoints="1" noChangeArrowheads="1" noChangeShapeType="1"/>
+              </p:cNvPicPr>
+              <p:nvPr/>
+            </p:nvPicPr>
+            <p:blipFill>
+              <a:blip r:embed="rId4"/>
+              <a:stretch>
+                <a:fillRect/>
+              </a:stretch>
+            </p:blipFill>
+            <p:spPr>
+              <a:xfrm>
+                <a:off x="168432" y="660586"/>
+                <a:ext cx="483873" cy="491754"/>
+              </a:xfrm>
+              <a:prstGeom prst="rect">
+                <a:avLst/>
+              </a:prstGeom>
+            </p:spPr>
+          </p:pic>
+        </mc:Fallback>
+      </mc:AlternateContent>
+      <mc:AlternateContent xmlns:mc="http://schemas.openxmlformats.org/markup-compatibility/2006">
+        <mc:Choice xmlns:p14="http://schemas.microsoft.com/office/powerpoint/2010/main" Requires="p14">
+          <p:contentPart p14:bwMode="auto" r:id="rId5">
+            <p14:nvContentPartPr>
+              <p14:cNvPr id="4100" name="Ink 4"/>
+              <p14:cNvContentPartPr>
+                <a14:cpLocks xmlns:a14="http://schemas.microsoft.com/office/drawing/2010/main" noRot="1" noChangeAspect="1" noEditPoints="1" noChangeArrowheads="1" noChangeShapeType="1"/>
+              </p14:cNvContentPartPr>
+              <p14:nvPr/>
+            </p14:nvContentPartPr>
+            <p14:xfrm>
+              <a:off x="1670050" y="1250950"/>
+              <a:ext cx="822325" cy="419100"/>
+            </p14:xfrm>
+          </p:contentPart>
+        </mc:Choice>
+        <mc:Fallback>
+          <p:pic>
+            <p:nvPicPr>
+              <p:cNvPr id="4100" name="Ink 4"/>
+              <p:cNvPicPr>
+                <a:picLocks noRot="1" noChangeAspect="1" noEditPoints="1" noChangeArrowheads="1" noChangeShapeType="1"/>
+              </p:cNvPicPr>
+              <p:nvPr/>
+            </p:nvPicPr>
+            <p:blipFill>
+              <a:blip r:embed="rId6"/>
+              <a:stretch>
+                <a:fillRect/>
+              </a:stretch>
+            </p:blipFill>
+            <p:spPr>
+              <a:xfrm>
+                <a:off x="1660689" y="1241645"/>
+                <a:ext cx="841047" cy="437711"/>
+              </a:xfrm>
+              <a:prstGeom prst="rect">
+                <a:avLst/>
+              </a:prstGeom>
+            </p:spPr>
+          </p:pic>
+        </mc:Fallback>
+      </mc:AlternateContent>
+      <mc:AlternateContent xmlns:mc="http://schemas.openxmlformats.org/markup-compatibility/2006">
+        <mc:Choice xmlns:p14="http://schemas.microsoft.com/office/powerpoint/2010/main" Requires="p14">
+          <p:contentPart p14:bwMode="auto" r:id="rId7">
+            <p14:nvContentPartPr>
+              <p14:cNvPr id="4101" name="Ink 5"/>
+              <p14:cNvContentPartPr>
+                <a14:cpLocks xmlns:a14="http://schemas.microsoft.com/office/drawing/2010/main" noRot="1" noChangeAspect="1" noEditPoints="1" noChangeArrowheads="1" noChangeShapeType="1"/>
+              </p14:cNvContentPartPr>
+              <p14:nvPr/>
+            </p14:nvContentPartPr>
+            <p14:xfrm>
+              <a:off x="7099300" y="1830388"/>
+              <a:ext cx="1071563" cy="687387"/>
+            </p14:xfrm>
+          </p:contentPart>
+        </mc:Choice>
+        <mc:Fallback>
+          <p:pic>
+            <p:nvPicPr>
+              <p:cNvPr id="4101" name="Ink 5"/>
+              <p:cNvPicPr>
+                <a:picLocks noRot="1" noChangeAspect="1" noEditPoints="1" noChangeArrowheads="1" noChangeShapeType="1"/>
+              </p:cNvPicPr>
+              <p:nvPr/>
+            </p:nvPicPr>
+            <p:blipFill>
+              <a:blip r:embed="rId8"/>
+              <a:stretch>
+                <a:fillRect/>
+              </a:stretch>
+            </p:blipFill>
+            <p:spPr>
+              <a:xfrm>
+                <a:off x="7089941" y="1821070"/>
+                <a:ext cx="1090280" cy="706023"/>
+              </a:xfrm>
+              <a:prstGeom prst="rect">
+                <a:avLst/>
+              </a:prstGeom>
+            </p:spPr>
+          </p:pic>
+        </mc:Fallback>
+      </mc:AlternateContent>
+      <mc:AlternateContent xmlns:mc="http://schemas.openxmlformats.org/markup-compatibility/2006">
+        <mc:Choice xmlns:p14="http://schemas.microsoft.com/office/powerpoint/2010/main" Requires="p14">
+          <p:contentPart p14:bwMode="auto" r:id="rId9">
+            <p14:nvContentPartPr>
+              <p14:cNvPr id="4102" name="Ink 6"/>
+              <p14:cNvContentPartPr>
+                <a14:cpLocks xmlns:a14="http://schemas.microsoft.com/office/drawing/2010/main" noRot="1" noChangeAspect="1" noEditPoints="1" noChangeArrowheads="1" noChangeShapeType="1"/>
+              </p14:cNvContentPartPr>
+              <p14:nvPr/>
+            </p14:nvContentPartPr>
+            <p14:xfrm>
+              <a:off x="1625600" y="1169988"/>
+              <a:ext cx="955675" cy="492125"/>
+            </p14:xfrm>
+          </p:contentPart>
+        </mc:Choice>
+        <mc:Fallback>
+          <p:pic>
+            <p:nvPicPr>
+              <p:cNvPr id="4102" name="Ink 6"/>
+              <p:cNvPicPr>
+                <a:picLocks noRot="1" noChangeAspect="1" noEditPoints="1" noChangeArrowheads="1" noChangeShapeType="1"/>
+              </p:cNvPicPr>
+              <p:nvPr/>
+            </p:nvPicPr>
+            <p:blipFill>
+              <a:blip r:embed="rId10"/>
+              <a:stretch>
+                <a:fillRect/>
+              </a:stretch>
+            </p:blipFill>
+            <p:spPr>
+              <a:xfrm>
+                <a:off x="1616245" y="1160628"/>
+                <a:ext cx="974386" cy="510845"/>
+              </a:xfrm>
+              <a:prstGeom prst="rect">
+                <a:avLst/>
+              </a:prstGeom>
+            </p:spPr>
+          </p:pic>
+        </mc:Fallback>
+      </mc:AlternateContent>
     </p:spTree>
   </p:cSld>
   <p:clrMapOvr>
     <a:masterClrMapping/>
   </p:clrMapOvr>
-  <p:timing>
-    <p:tnLst>
-      <p:par>
-        <p:cTn id="1" dur="indefinite" restart="never" nodeType="tmRoot"/>
-      </p:par>
-    </p:tnLst>
-  </p:timing>
 </p:sld>
 </file>
 
@@ -5307,7 +5367,7 @@
           <p:nvPr/>
         </p:nvPicPr>
         <p:blipFill>
-          <a:blip r:embed="rId3"/>
+          <a:blip r:embed="rId2"/>
           <a:srcRect/>
           <a:stretch>
             <a:fillRect/>
@@ -5331,18 +5391,140 @@
           <a:effectLst/>
         </p:spPr>
       </p:pic>
+      <mc:AlternateContent xmlns:mc="http://schemas.openxmlformats.org/markup-compatibility/2006">
+        <mc:Choice xmlns:p14="http://schemas.microsoft.com/office/powerpoint/2010/main" Requires="p14">
+          <p:contentPart p14:bwMode="auto" r:id="rId3">
+            <p14:nvContentPartPr>
+              <p14:cNvPr id="5123" name="Ink 3"/>
+              <p14:cNvContentPartPr>
+                <a14:cpLocks xmlns:a14="http://schemas.microsoft.com/office/drawing/2010/main" noRot="1" noChangeAspect="1" noEditPoints="1" noChangeArrowheads="1" noChangeShapeType="1"/>
+              </p14:cNvContentPartPr>
+              <p14:nvPr/>
+            </p14:nvContentPartPr>
+            <p14:xfrm>
+              <a:off x="2946400" y="830263"/>
+              <a:ext cx="733425" cy="500062"/>
+            </p14:xfrm>
+          </p:contentPart>
+        </mc:Choice>
+        <mc:Fallback>
+          <p:pic>
+            <p:nvPicPr>
+              <p:cNvPr id="5123" name="Ink 3"/>
+              <p:cNvPicPr>
+                <a:picLocks noRot="1" noChangeAspect="1" noEditPoints="1" noChangeArrowheads="1" noChangeShapeType="1"/>
+              </p:cNvPicPr>
+              <p:nvPr/>
+            </p:nvPicPr>
+            <p:blipFill>
+              <a:blip r:embed="rId4"/>
+              <a:stretch>
+                <a:fillRect/>
+              </a:stretch>
+            </p:blipFill>
+            <p:spPr>
+              <a:xfrm>
+                <a:off x="2937029" y="820909"/>
+                <a:ext cx="752166" cy="518769"/>
+              </a:xfrm>
+              <a:prstGeom prst="rect">
+                <a:avLst/>
+              </a:prstGeom>
+            </p:spPr>
+          </p:pic>
+        </mc:Fallback>
+      </mc:AlternateContent>
+      <mc:AlternateContent xmlns:mc="http://schemas.openxmlformats.org/markup-compatibility/2006">
+        <mc:Choice xmlns:p14="http://schemas.microsoft.com/office/powerpoint/2010/main" Requires="p14">
+          <p:contentPart p14:bwMode="auto" r:id="rId5">
+            <p14:nvContentPartPr>
+              <p14:cNvPr id="5124" name="Ink 4"/>
+              <p14:cNvContentPartPr>
+                <a14:cpLocks xmlns:a14="http://schemas.microsoft.com/office/drawing/2010/main" noRot="1" noChangeAspect="1" noEditPoints="1" noChangeArrowheads="1" noChangeShapeType="1"/>
+              </p14:cNvContentPartPr>
+              <p14:nvPr/>
+            </p14:nvContentPartPr>
+            <p14:xfrm>
+              <a:off x="1330325" y="3197225"/>
+              <a:ext cx="982663" cy="509588"/>
+            </p14:xfrm>
+          </p:contentPart>
+        </mc:Choice>
+        <mc:Fallback>
+          <p:pic>
+            <p:nvPicPr>
+              <p:cNvPr id="5124" name="Ink 4"/>
+              <p:cNvPicPr>
+                <a:picLocks noRot="1" noChangeAspect="1" noEditPoints="1" noChangeArrowheads="1" noChangeShapeType="1"/>
+              </p:cNvPicPr>
+              <p:nvPr/>
+            </p:nvPicPr>
+            <p:blipFill>
+              <a:blip r:embed="rId6"/>
+              <a:stretch>
+                <a:fillRect/>
+              </a:stretch>
+            </p:blipFill>
+            <p:spPr>
+              <a:xfrm>
+                <a:off x="1320963" y="3187881"/>
+                <a:ext cx="1001387" cy="528275"/>
+              </a:xfrm>
+              <a:prstGeom prst="rect">
+                <a:avLst/>
+              </a:prstGeom>
+            </p:spPr>
+          </p:pic>
+        </mc:Fallback>
+      </mc:AlternateContent>
+      <mc:AlternateContent xmlns:mc="http://schemas.openxmlformats.org/markup-compatibility/2006">
+        <mc:Choice xmlns:p14="http://schemas.microsoft.com/office/powerpoint/2010/main" Requires="p14">
+          <p:contentPart p14:bwMode="auto" r:id="rId7">
+            <p14:nvContentPartPr>
+              <p14:cNvPr id="5125" name="Ink 5"/>
+              <p14:cNvContentPartPr>
+                <a14:cpLocks xmlns:a14="http://schemas.microsoft.com/office/drawing/2010/main" noRot="1" noChangeAspect="1" noEditPoints="1" noChangeArrowheads="1" noChangeShapeType="1"/>
+              </p14:cNvContentPartPr>
+              <p14:nvPr/>
+            </p14:nvContentPartPr>
+            <p14:xfrm>
+              <a:off x="5867400" y="6054725"/>
+              <a:ext cx="606425" cy="347663"/>
+            </p14:xfrm>
+          </p:contentPart>
+        </mc:Choice>
+        <mc:Fallback>
+          <p:pic>
+            <p:nvPicPr>
+              <p:cNvPr id="5125" name="Ink 5"/>
+              <p:cNvPicPr>
+                <a:picLocks noRot="1" noChangeAspect="1" noEditPoints="1" noChangeArrowheads="1" noChangeShapeType="1"/>
+              </p:cNvPicPr>
+              <p:nvPr/>
+            </p:nvPicPr>
+            <p:blipFill>
+              <a:blip r:embed="rId8"/>
+              <a:stretch>
+                <a:fillRect/>
+              </a:stretch>
+            </p:blipFill>
+            <p:spPr>
+              <a:xfrm>
+                <a:off x="5858054" y="6045397"/>
+                <a:ext cx="625117" cy="366320"/>
+              </a:xfrm>
+              <a:prstGeom prst="rect">
+                <a:avLst/>
+              </a:prstGeom>
+            </p:spPr>
+          </p:pic>
+        </mc:Fallback>
+      </mc:AlternateContent>
     </p:spTree>
   </p:cSld>
   <p:clrMapOvr>
     <a:masterClrMapping/>
   </p:clrMapOvr>
-  <p:timing>
-    <p:tnLst>
-      <p:par>
-        <p:cTn id="1" dur="indefinite" restart="never" nodeType="tmRoot"/>
-      </p:par>
-    </p:tnLst>
-  </p:timing>
 </p:sld>
 </file>
 
@@ -5385,18 +5567,18 @@
           <a:lstStyle/>
           <a:p>
             <a:r>
-              <a:rPr lang="en-IN" sz="3300" dirty="0" smtClean="0"/>
+              <a:rPr lang="en-IN" sz="3300" dirty="0"/>
               <a:t>If you select 3.0 or above version , servlet 3.0 version supports annotations .</a:t>
             </a:r>
           </a:p>
           <a:p>
             <a:r>
-              <a:rPr lang="en-IN" sz="3300" dirty="0" smtClean="0"/>
+              <a:rPr lang="en-IN" sz="3300" dirty="0"/>
               <a:t>It supports annotations means it doesn’t take web.xml file.</a:t>
             </a:r>
           </a:p>
           <a:p>
-            <a:endParaRPr lang="en-IN" sz="3300" dirty="0" smtClean="0"/>
+            <a:endParaRPr lang="en-IN" sz="3300" dirty="0"/>
           </a:p>
           <a:p>
             <a:endParaRPr lang="en-US" sz="3300" dirty="0"/>
@@ -5408,13 +5590,6 @@
   <p:clrMapOvr>
     <a:masterClrMapping/>
   </p:clrMapOvr>
-  <p:timing>
-    <p:tnLst>
-      <p:par>
-        <p:cTn id="1" dur="indefinite" restart="never" nodeType="tmRoot"/>
-      </p:par>
-    </p:tnLst>
-  </p:timing>
 </p:sld>
 </file>
 
@@ -5531,13 +5706,6 @@
   <p:clrMapOvr>
     <a:masterClrMapping/>
   </p:clrMapOvr>
-  <p:timing>
-    <p:tnLst>
-      <p:par>
-        <p:cTn id="1" dur="indefinite" restart="never" nodeType="tmRoot"/>
-      </p:par>
-    </p:tnLst>
-  </p:timing>
 </p:sld>
 </file>
 
@@ -5754,33 +5922,27 @@
           <a:lstStyle/>
           <a:p>
             <a:r>
-              <a:rPr lang="en-US" sz="3300" dirty="0" smtClean="0"/>
+              <a:rPr lang="en-US" sz="3300" dirty="0"/>
               <a:t>There are three ways to create a servlet,</a:t>
             </a:r>
           </a:p>
           <a:p>
             <a:r>
-              <a:rPr lang="en-US" sz="3300" dirty="0" smtClean="0"/>
-              <a:t> a. implements Servlet </a:t>
-            </a:r>
-            <a:r>
-              <a:rPr lang="en-US" sz="3300" dirty="0" smtClean="0"/>
-              <a:t> interface</a:t>
-            </a:r>
-            <a:endParaRPr lang="en-US" sz="3300" dirty="0" smtClean="0"/>
-          </a:p>
-          <a:p>
-            <a:r>
-              <a:rPr lang="en-US" sz="3300" dirty="0" smtClean="0"/>
+              <a:rPr lang="en-US" sz="3300" dirty="0"/>
+              <a:t> a. implements Servlet  interface</a:t>
+            </a:r>
+          </a:p>
+          <a:p>
+            <a:r>
+              <a:rPr lang="en-US" sz="3300" dirty="0"/>
               <a:t> b. extends GenericServlet </a:t>
             </a:r>
           </a:p>
           <a:p>
             <a:r>
-              <a:rPr lang="en-US" sz="3300" dirty="0" smtClean="0"/>
+              <a:rPr lang="en-US" sz="3300" dirty="0"/>
               <a:t> c. extends HttpServlet</a:t>
             </a:r>
-            <a:endParaRPr lang="en-US" sz="3300" dirty="0"/>
           </a:p>
         </p:txBody>
       </p:sp>
@@ -6122,7 +6284,7 @@
           <a:lstStyle/>
           <a:p>
             <a:r>
-              <a:rPr lang="en-IN" sz="4000" dirty="0" smtClean="0"/>
+              <a:rPr lang="en-IN" sz="4000" dirty="0"/>
               <a:t>Open Servlet.class file using online java decompiler</a:t>
             </a:r>
             <a:endParaRPr lang="en-US" sz="4000" dirty="0"/>
@@ -6192,13 +6354,6 @@
   <p:clrMapOvr>
     <a:masterClrMapping/>
   </p:clrMapOvr>
-  <p:timing>
-    <p:tnLst>
-      <p:par>
-        <p:cTn id="1" dur="indefinite" restart="never" nodeType="tmRoot"/>
-      </p:par>
-    </p:tnLst>
-  </p:timing>
 </p:sld>
 </file>
 
@@ -6474,20 +6629,20 @@
           <a:lstStyle/>
           <a:p>
             <a:r>
-              <a:rPr lang="en-IN" sz="2500" dirty="0" smtClean="0"/>
+              <a:rPr lang="en-IN" sz="2500" dirty="0"/>
               <a:t>At server side we create first servlet , after creating first servlet , we have to give some URL pattern to the client .</a:t>
             </a:r>
           </a:p>
           <a:p>
-            <a:endParaRPr lang="en-IN" sz="2500" dirty="0" smtClean="0"/>
-          </a:p>
-          <a:p>
-            <a:r>
-              <a:rPr lang="en-IN" sz="2500" dirty="0" smtClean="0"/>
+            <a:endParaRPr lang="en-IN" sz="2500" dirty="0"/>
+          </a:p>
+          <a:p>
+            <a:r>
+              <a:rPr lang="en-IN" sz="2500" dirty="0"/>
               <a:t>In first application we are just creating a servlet at server side , for that servlet I am creating one URL using </a:t>
             </a:r>
             <a:r>
-              <a:rPr lang="en-IN" sz="2500" b="1" dirty="0" smtClean="0">
+              <a:rPr lang="en-IN" sz="2500" b="1" dirty="0">
                 <a:solidFill>
                   <a:srgbClr val="FF0000"/>
                 </a:solidFill>
@@ -6495,22 +6650,22 @@
               <a:t>web.xml</a:t>
             </a:r>
             <a:r>
-              <a:rPr lang="en-IN" sz="2500" dirty="0" smtClean="0"/>
+              <a:rPr lang="en-IN" sz="2500" dirty="0"/>
               <a:t>  file , using the URL the client will access my servlet.</a:t>
             </a:r>
           </a:p>
           <a:p>
-            <a:endParaRPr lang="en-IN" sz="2500" dirty="0" smtClean="0"/>
-          </a:p>
-          <a:p>
-            <a:endParaRPr lang="en-IN" sz="2500" dirty="0" smtClean="0"/>
-          </a:p>
-          <a:p>
-            <a:endParaRPr lang="en-IN" sz="2500" dirty="0" smtClean="0"/>
-          </a:p>
-          <a:p>
-            <a:r>
-              <a:rPr lang="en-IN" sz="2500" dirty="0" smtClean="0"/>
+            <a:endParaRPr lang="en-IN" sz="2500" dirty="0"/>
+          </a:p>
+          <a:p>
+            <a:endParaRPr lang="en-IN" sz="2500" dirty="0"/>
+          </a:p>
+          <a:p>
+            <a:endParaRPr lang="en-IN" sz="2500" dirty="0"/>
+          </a:p>
+          <a:p>
+            <a:r>
+              <a:rPr lang="en-IN" sz="2500" dirty="0"/>
               <a:t>So first step is to create the servlet at server side.</a:t>
             </a:r>
             <a:endParaRPr lang="en-US" sz="2500" dirty="0"/>
@@ -6565,62 +6720,62 @@
           <a:lstStyle/>
           <a:p>
             <a:r>
-              <a:rPr lang="en-IN" sz="2500" dirty="0" smtClean="0"/>
+              <a:rPr lang="en-IN" sz="2500" dirty="0"/>
               <a:t>Servlet 3.0 will have new concept like annotations , I said just now at the server side you can create the servlet , for the servlet we have to create one URL pattern .</a:t>
             </a:r>
           </a:p>
           <a:p>
-            <a:endParaRPr lang="en-IN" sz="2500" dirty="0" smtClean="0"/>
-          </a:p>
-          <a:p>
-            <a:r>
-              <a:rPr lang="en-IN" sz="2500" dirty="0" smtClean="0"/>
+            <a:endParaRPr lang="en-IN" sz="2500" dirty="0"/>
+          </a:p>
+          <a:p>
+            <a:r>
+              <a:rPr lang="en-IN" sz="2500" dirty="0"/>
               <a:t>How we will create the URL pattern ?</a:t>
             </a:r>
           </a:p>
           <a:p>
             <a:r>
-              <a:rPr lang="en-IN" sz="2500" dirty="0" smtClean="0"/>
+              <a:rPr lang="en-IN" sz="2500" dirty="0"/>
               <a:t>Previously we will create URL pattern using XML file (web.xml file)</a:t>
             </a:r>
           </a:p>
           <a:p>
-            <a:endParaRPr lang="en-IN" sz="2500" dirty="0" smtClean="0"/>
-          </a:p>
-          <a:p>
-            <a:r>
-              <a:rPr lang="en-IN" sz="2500" dirty="0" smtClean="0"/>
+            <a:endParaRPr lang="en-IN" sz="2500" dirty="0"/>
+          </a:p>
+          <a:p>
+            <a:r>
+              <a:rPr lang="en-IN" sz="2500" dirty="0"/>
               <a:t>For the single servlet to create URL pattern we have to write almost  all 10 lines of code.</a:t>
             </a:r>
           </a:p>
           <a:p>
-            <a:endParaRPr lang="en-IN" sz="2500" dirty="0" smtClean="0"/>
-          </a:p>
-          <a:p>
-            <a:r>
-              <a:rPr lang="en-IN" sz="2500" dirty="0" smtClean="0"/>
+            <a:endParaRPr lang="en-IN" sz="2500" dirty="0"/>
+          </a:p>
+          <a:p>
+            <a:r>
+              <a:rPr lang="en-IN" sz="2500" dirty="0"/>
               <a:t>If </a:t>
             </a:r>
             <a:r>
-              <a:rPr lang="en-IN" sz="2500" dirty="0" err="1" smtClean="0"/>
+              <a:rPr lang="en-IN" sz="2500" dirty="0" err="1"/>
               <a:t>no.of</a:t>
             </a:r>
             <a:r>
-              <a:rPr lang="en-IN" sz="2500" dirty="0" smtClean="0"/>
+              <a:rPr lang="en-IN" sz="2500" dirty="0"/>
               <a:t> </a:t>
             </a:r>
             <a:r>
-              <a:rPr lang="en-IN" sz="2500" dirty="0" err="1" smtClean="0"/>
+              <a:rPr lang="en-IN" sz="2500" dirty="0" err="1"/>
               <a:t>servlets</a:t>
             </a:r>
             <a:r>
-              <a:rPr lang="en-IN" sz="2500" dirty="0" smtClean="0"/>
+              <a:rPr lang="en-IN" sz="2500" dirty="0"/>
               <a:t> are increased xml  configurations are increased .</a:t>
             </a:r>
           </a:p>
           <a:p>
             <a:r>
-              <a:rPr lang="en-IN" sz="2500" dirty="0" smtClean="0"/>
+              <a:rPr lang="en-IN" sz="2500" dirty="0"/>
               <a:t>To reduce that XML configurations instead of the XML , we are using annotations concept.</a:t>
             </a:r>
           </a:p>
@@ -6652,7 +6807,7 @@
           <a:lstStyle/>
           <a:p>
             <a:r>
-              <a:rPr lang="en-IN" sz="2500" dirty="0" smtClean="0"/>
+              <a:rPr lang="en-IN" sz="2500" dirty="0"/>
               <a:t>Basically annotations will reduce the configurations of XML files .</a:t>
             </a:r>
             <a:endParaRPr lang="en-US" sz="2500" dirty="0"/>
@@ -6751,7 +6906,7 @@
           <p:nvPr/>
         </p:nvPicPr>
         <p:blipFill>
-          <a:blip r:embed="rId3"/>
+          <a:blip r:embed="rId2"/>
           <a:srcRect/>
           <a:stretch>
             <a:fillRect/>
@@ -6775,18 +6930,140 @@
           <a:effectLst/>
         </p:spPr>
       </p:pic>
+      <mc:AlternateContent xmlns:mc="http://schemas.openxmlformats.org/markup-compatibility/2006">
+        <mc:Choice xmlns:p14="http://schemas.microsoft.com/office/powerpoint/2010/main" Requires="p14">
+          <p:contentPart p14:bwMode="auto" r:id="rId3">
+            <p14:nvContentPartPr>
+              <p14:cNvPr id="20482" name="Ink 2"/>
+              <p14:cNvContentPartPr>
+                <a14:cpLocks xmlns:a14="http://schemas.microsoft.com/office/drawing/2010/main" noRot="1" noChangeAspect="1" noEditPoints="1" noChangeArrowheads="1" noChangeShapeType="1"/>
+              </p14:cNvContentPartPr>
+              <p14:nvPr/>
+            </p14:nvContentPartPr>
+            <p14:xfrm>
+              <a:off x="3455988" y="3071813"/>
+              <a:ext cx="1179512" cy="839787"/>
+            </p14:xfrm>
+          </p:contentPart>
+        </mc:Choice>
+        <mc:Fallback>
+          <p:pic>
+            <p:nvPicPr>
+              <p:cNvPr id="20482" name="Ink 2"/>
+              <p:cNvPicPr>
+                <a:picLocks noRot="1" noChangeAspect="1" noEditPoints="1" noChangeArrowheads="1" noChangeShapeType="1"/>
+              </p:cNvPicPr>
+              <p:nvPr/>
+            </p:nvPicPr>
+            <p:blipFill>
+              <a:blip r:embed="rId4"/>
+              <a:stretch>
+                <a:fillRect/>
+              </a:stretch>
+            </p:blipFill>
+            <p:spPr>
+              <a:xfrm>
+                <a:off x="3446627" y="3062458"/>
+                <a:ext cx="1198234" cy="858497"/>
+              </a:xfrm>
+              <a:prstGeom prst="rect">
+                <a:avLst/>
+              </a:prstGeom>
+            </p:spPr>
+          </p:pic>
+        </mc:Fallback>
+      </mc:AlternateContent>
+      <mc:AlternateContent xmlns:mc="http://schemas.openxmlformats.org/markup-compatibility/2006">
+        <mc:Choice xmlns:p14="http://schemas.microsoft.com/office/powerpoint/2010/main" Requires="p14">
+          <p:contentPart p14:bwMode="auto" r:id="rId5">
+            <p14:nvContentPartPr>
+              <p14:cNvPr id="20483" name="Ink 3"/>
+              <p14:cNvContentPartPr>
+                <a14:cpLocks xmlns:a14="http://schemas.microsoft.com/office/drawing/2010/main" noRot="1" noChangeAspect="1" noEditPoints="1" noChangeArrowheads="1" noChangeShapeType="1"/>
+              </p14:cNvContentPartPr>
+              <p14:nvPr/>
+            </p14:nvContentPartPr>
+            <p14:xfrm>
+              <a:off x="4714875" y="3938588"/>
+              <a:ext cx="2438400" cy="392112"/>
+            </p14:xfrm>
+          </p:contentPart>
+        </mc:Choice>
+        <mc:Fallback>
+          <p:pic>
+            <p:nvPicPr>
+              <p:cNvPr id="20483" name="Ink 3"/>
+              <p:cNvPicPr>
+                <a:picLocks noRot="1" noChangeAspect="1" noEditPoints="1" noChangeArrowheads="1" noChangeShapeType="1"/>
+              </p:cNvPicPr>
+              <p:nvPr/>
+            </p:nvPicPr>
+            <p:blipFill>
+              <a:blip r:embed="rId6"/>
+              <a:stretch>
+                <a:fillRect/>
+              </a:stretch>
+            </p:blipFill>
+            <p:spPr>
+              <a:xfrm>
+                <a:off x="4705519" y="3929261"/>
+                <a:ext cx="2457113" cy="410767"/>
+              </a:xfrm>
+              <a:prstGeom prst="rect">
+                <a:avLst/>
+              </a:prstGeom>
+            </p:spPr>
+          </p:pic>
+        </mc:Fallback>
+      </mc:AlternateContent>
+      <mc:AlternateContent xmlns:mc="http://schemas.openxmlformats.org/markup-compatibility/2006">
+        <mc:Choice xmlns:p14="http://schemas.microsoft.com/office/powerpoint/2010/main" Requires="p14">
+          <p:contentPart p14:bwMode="auto" r:id="rId7">
+            <p14:nvContentPartPr>
+              <p14:cNvPr id="20484" name="Ink 4"/>
+              <p14:cNvContentPartPr>
+                <a14:cpLocks xmlns:a14="http://schemas.microsoft.com/office/drawing/2010/main" noRot="1" noChangeAspect="1" noEditPoints="1" noChangeArrowheads="1" noChangeShapeType="1"/>
+              </p14:cNvContentPartPr>
+              <p14:nvPr/>
+            </p14:nvContentPartPr>
+            <p14:xfrm>
+              <a:off x="4286250" y="5197475"/>
+              <a:ext cx="920750" cy="473075"/>
+            </p14:xfrm>
+          </p:contentPart>
+        </mc:Choice>
+        <mc:Fallback>
+          <p:pic>
+            <p:nvPicPr>
+              <p:cNvPr id="20484" name="Ink 4"/>
+              <p:cNvPicPr>
+                <a:picLocks noRot="1" noChangeAspect="1" noEditPoints="1" noChangeArrowheads="1" noChangeShapeType="1"/>
+              </p:cNvPicPr>
+              <p:nvPr/>
+            </p:nvPicPr>
+            <p:blipFill>
+              <a:blip r:embed="rId8"/>
+              <a:stretch>
+                <a:fillRect/>
+              </a:stretch>
+            </p:blipFill>
+            <p:spPr>
+              <a:xfrm>
+                <a:off x="4276884" y="5188129"/>
+                <a:ext cx="939482" cy="491768"/>
+              </a:xfrm>
+              <a:prstGeom prst="rect">
+                <a:avLst/>
+              </a:prstGeom>
+            </p:spPr>
+          </p:pic>
+        </mc:Fallback>
+      </mc:AlternateContent>
     </p:spTree>
   </p:cSld>
   <p:clrMapOvr>
     <a:masterClrMapping/>
   </p:clrMapOvr>
-  <p:timing>
-    <p:tnLst>
-      <p:par>
-        <p:cTn id="1" dur="indefinite" restart="never" nodeType="tmRoot"/>
-      </p:par>
-    </p:tnLst>
-  </p:timing>
 </p:sld>
 </file>
 
@@ -6816,7 +7093,7 @@
           <p:nvPr/>
         </p:nvPicPr>
         <p:blipFill>
-          <a:blip r:embed="rId3"/>
+          <a:blip r:embed="rId2"/>
           <a:srcRect/>
           <a:stretch>
             <a:fillRect/>
@@ -6863,31 +7140,67 @@
           <a:lstStyle/>
           <a:p>
             <a:r>
-              <a:rPr lang="en-IN" sz="2500" dirty="0" smtClean="0"/>
+              <a:rPr lang="en-IN" sz="2500" dirty="0"/>
               <a:t>Eclipse IDE  automatically generates  web.xml file,</a:t>
             </a:r>
           </a:p>
           <a:p>
             <a:r>
-              <a:rPr lang="en-IN" sz="2500" dirty="0" smtClean="0"/>
+              <a:rPr lang="en-IN" sz="2500" dirty="0"/>
               <a:t>By default class name is taken as URL pattern .  </a:t>
             </a:r>
             <a:endParaRPr lang="en-US" sz="2500" dirty="0"/>
           </a:p>
         </p:txBody>
       </p:sp>
+      <mc:AlternateContent xmlns:mc="http://schemas.openxmlformats.org/markup-compatibility/2006">
+        <mc:Choice xmlns:p14="http://schemas.microsoft.com/office/powerpoint/2010/main" Requires="p14">
+          <p:contentPart p14:bwMode="auto" r:id="rId3">
+            <p14:nvContentPartPr>
+              <p14:cNvPr id="21507" name="Ink 3"/>
+              <p14:cNvContentPartPr>
+                <a14:cpLocks xmlns:a14="http://schemas.microsoft.com/office/drawing/2010/main" noRot="1" noChangeAspect="1" noEditPoints="1" noChangeArrowheads="1" noChangeShapeType="1"/>
+              </p14:cNvContentPartPr>
+              <p14:nvPr/>
+            </p14:nvContentPartPr>
+            <p14:xfrm>
+              <a:off x="3759200" y="5081588"/>
+              <a:ext cx="696913" cy="446087"/>
+            </p14:xfrm>
+          </p:contentPart>
+        </mc:Choice>
+        <mc:Fallback>
+          <p:pic>
+            <p:nvPicPr>
+              <p:cNvPr id="21507" name="Ink 3"/>
+              <p:cNvPicPr>
+                <a:picLocks noRot="1" noChangeAspect="1" noEditPoints="1" noChangeArrowheads="1" noChangeShapeType="1"/>
+              </p:cNvPicPr>
+              <p:nvPr/>
+            </p:nvPicPr>
+            <p:blipFill>
+              <a:blip r:embed="rId4"/>
+              <a:stretch>
+                <a:fillRect/>
+              </a:stretch>
+            </p:blipFill>
+            <p:spPr>
+              <a:xfrm>
+                <a:off x="3749855" y="5072250"/>
+                <a:ext cx="715603" cy="464764"/>
+              </a:xfrm>
+              <a:prstGeom prst="rect">
+                <a:avLst/>
+              </a:prstGeom>
+            </p:spPr>
+          </p:pic>
+        </mc:Fallback>
+      </mc:AlternateContent>
     </p:spTree>
   </p:cSld>
   <p:clrMapOvr>
     <a:masterClrMapping/>
   </p:clrMapOvr>
-  <p:timing>
-    <p:tnLst>
-      <p:par>
-        <p:cTn id="1" dur="indefinite" restart="never" nodeType="tmRoot"/>
-      </p:par>
-    </p:tnLst>
-  </p:timing>
 </p:sld>
 </file>
 
@@ -6917,7 +7230,7 @@
           <p:nvPr/>
         </p:nvPicPr>
         <p:blipFill>
-          <a:blip r:embed="rId3"/>
+          <a:blip r:embed="rId2"/>
           <a:srcRect/>
           <a:stretch>
             <a:fillRect/>
@@ -6941,18 +7254,140 @@
           <a:effectLst/>
         </p:spPr>
       </p:pic>
+      <mc:AlternateContent xmlns:mc="http://schemas.openxmlformats.org/markup-compatibility/2006">
+        <mc:Choice xmlns:p14="http://schemas.microsoft.com/office/powerpoint/2010/main" Requires="p14">
+          <p:contentPart p14:bwMode="auto" r:id="rId3">
+            <p14:nvContentPartPr>
+              <p14:cNvPr id="22531" name="Ink 3"/>
+              <p14:cNvContentPartPr>
+                <a14:cpLocks xmlns:a14="http://schemas.microsoft.com/office/drawing/2010/main" noRot="1" noChangeAspect="1" noEditPoints="1" noChangeArrowheads="1" noChangeShapeType="1"/>
+              </p14:cNvContentPartPr>
+              <p14:nvPr/>
+            </p14:nvContentPartPr>
+            <p14:xfrm>
+              <a:off x="5232400" y="5340350"/>
+              <a:ext cx="714375" cy="411163"/>
+            </p14:xfrm>
+          </p:contentPart>
+        </mc:Choice>
+        <mc:Fallback>
+          <p:pic>
+            <p:nvPicPr>
+              <p:cNvPr id="22531" name="Ink 3"/>
+              <p:cNvPicPr>
+                <a:picLocks noRot="1" noChangeAspect="1" noEditPoints="1" noChangeArrowheads="1" noChangeShapeType="1"/>
+              </p:cNvPicPr>
+              <p:nvPr/>
+            </p:nvPicPr>
+            <p:blipFill>
+              <a:blip r:embed="rId4"/>
+              <a:stretch>
+                <a:fillRect/>
+              </a:stretch>
+            </p:blipFill>
+            <p:spPr>
+              <a:xfrm>
+                <a:off x="5223043" y="5330940"/>
+                <a:ext cx="733089" cy="429984"/>
+              </a:xfrm>
+              <a:prstGeom prst="rect">
+                <a:avLst/>
+              </a:prstGeom>
+            </p:spPr>
+          </p:pic>
+        </mc:Fallback>
+      </mc:AlternateContent>
+      <mc:AlternateContent xmlns:mc="http://schemas.openxmlformats.org/markup-compatibility/2006">
+        <mc:Choice xmlns:p14="http://schemas.microsoft.com/office/powerpoint/2010/main" Requires="p14">
+          <p:contentPart p14:bwMode="auto" r:id="rId5">
+            <p14:nvContentPartPr>
+              <p14:cNvPr id="22532" name="Ink 4"/>
+              <p14:cNvContentPartPr>
+                <a14:cpLocks xmlns:a14="http://schemas.microsoft.com/office/drawing/2010/main" noRot="1" noChangeAspect="1" noEditPoints="1" noChangeArrowheads="1" noChangeShapeType="1"/>
+              </p14:cNvContentPartPr>
+              <p14:nvPr/>
+            </p14:nvContentPartPr>
+            <p14:xfrm>
+              <a:off x="3884613" y="2160588"/>
+              <a:ext cx="731837" cy="63500"/>
+            </p14:xfrm>
+          </p:contentPart>
+        </mc:Choice>
+        <mc:Fallback>
+          <p:pic>
+            <p:nvPicPr>
+              <p:cNvPr id="22532" name="Ink 4"/>
+              <p:cNvPicPr>
+                <a:picLocks noRot="1" noChangeAspect="1" noEditPoints="1" noChangeArrowheads="1" noChangeShapeType="1"/>
+              </p:cNvPicPr>
+              <p:nvPr/>
+            </p:nvPicPr>
+            <p:blipFill>
+              <a:blip r:embed="rId6"/>
+              <a:stretch>
+                <a:fillRect/>
+              </a:stretch>
+            </p:blipFill>
+            <p:spPr>
+              <a:xfrm>
+                <a:off x="3875263" y="2151154"/>
+                <a:ext cx="750538" cy="82369"/>
+              </a:xfrm>
+              <a:prstGeom prst="rect">
+                <a:avLst/>
+              </a:prstGeom>
+            </p:spPr>
+          </p:pic>
+        </mc:Fallback>
+      </mc:AlternateContent>
+      <mc:AlternateContent xmlns:mc="http://schemas.openxmlformats.org/markup-compatibility/2006">
+        <mc:Choice xmlns:p14="http://schemas.microsoft.com/office/powerpoint/2010/main" Requires="p14">
+          <p:contentPart p14:bwMode="auto" r:id="rId7">
+            <p14:nvContentPartPr>
+              <p14:cNvPr id="22533" name="Ink 5"/>
+              <p14:cNvContentPartPr>
+                <a14:cpLocks xmlns:a14="http://schemas.microsoft.com/office/drawing/2010/main" noRot="1" noChangeAspect="1" noEditPoints="1" noChangeArrowheads="1" noChangeShapeType="1"/>
+              </p14:cNvContentPartPr>
+              <p14:nvPr/>
+            </p14:nvContentPartPr>
+            <p14:xfrm>
+              <a:off x="3821113" y="2108200"/>
+              <a:ext cx="349250" cy="222250"/>
+            </p14:xfrm>
+          </p:contentPart>
+        </mc:Choice>
+        <mc:Fallback>
+          <p:pic>
+            <p:nvPicPr>
+              <p:cNvPr id="22533" name="Ink 5"/>
+              <p:cNvPicPr>
+                <a:picLocks noRot="1" noChangeAspect="1" noEditPoints="1" noChangeArrowheads="1" noChangeShapeType="1"/>
+              </p:cNvPicPr>
+              <p:nvPr/>
+            </p:nvPicPr>
+            <p:blipFill>
+              <a:blip r:embed="rId8"/>
+              <a:stretch>
+                <a:fillRect/>
+              </a:stretch>
+            </p:blipFill>
+            <p:spPr>
+              <a:xfrm>
+                <a:off x="3811742" y="2098895"/>
+                <a:ext cx="367992" cy="240860"/>
+              </a:xfrm>
+              <a:prstGeom prst="rect">
+                <a:avLst/>
+              </a:prstGeom>
+            </p:spPr>
+          </p:pic>
+        </mc:Fallback>
+      </mc:AlternateContent>
     </p:spTree>
   </p:cSld>
   <p:clrMapOvr>
     <a:masterClrMapping/>
   </p:clrMapOvr>
-  <p:timing>
-    <p:tnLst>
-      <p:par>
-        <p:cTn id="1" dur="indefinite" restart="never" nodeType="tmRoot"/>
-      </p:par>
-    </p:tnLst>
-  </p:timing>
 </p:sld>
 </file>
 
@@ -7011,13 +7446,6 @@
   <p:clrMapOvr>
     <a:masterClrMapping/>
   </p:clrMapOvr>
-  <p:timing>
-    <p:tnLst>
-      <p:par>
-        <p:cTn id="1" dur="indefinite" restart="never" nodeType="tmRoot"/>
-      </p:par>
-    </p:tnLst>
-  </p:timing>
 </p:sld>
 </file>
 
@@ -7134,13 +7562,6 @@
   <p:clrMapOvr>
     <a:masterClrMapping/>
   </p:clrMapOvr>
-  <p:timing>
-    <p:tnLst>
-      <p:par>
-        <p:cTn id="1" dur="indefinite" restart="never" nodeType="tmRoot"/>
-      </p:par>
-    </p:tnLst>
-  </p:timing>
 </p:sld>
 </file>
 
@@ -7300,46 +7721,46 @@
           <a:lstStyle/>
           <a:p>
             <a:r>
-              <a:rPr lang="en-IN" sz="2500" b="1" dirty="0" smtClean="0"/>
+              <a:rPr lang="en-IN" sz="2500" b="1" dirty="0"/>
               <a:t>Request</a:t>
             </a:r>
             <a:r>
-              <a:rPr lang="en-IN" sz="2500" dirty="0" smtClean="0"/>
+              <a:rPr lang="en-IN" sz="2500" dirty="0"/>
               <a:t> object contains the data which is coming from the client side , because from the client you are getting some username , password etc .</a:t>
             </a:r>
           </a:p>
           <a:p>
-            <a:endParaRPr lang="en-IN" sz="2500" dirty="0" smtClean="0"/>
-          </a:p>
-          <a:p>
-            <a:r>
-              <a:rPr lang="en-IN" sz="2500" dirty="0" smtClean="0"/>
+            <a:endParaRPr lang="en-IN" sz="2500" dirty="0"/>
+          </a:p>
+          <a:p>
+            <a:r>
+              <a:rPr lang="en-IN" sz="2500" dirty="0"/>
               <a:t>The details which are coming from the client side , those details are stored in </a:t>
             </a:r>
             <a:r>
-              <a:rPr lang="en-IN" sz="2500" b="1" dirty="0" smtClean="0"/>
+              <a:rPr lang="en-IN" sz="2500" b="1" dirty="0"/>
               <a:t>request</a:t>
             </a:r>
             <a:r>
-              <a:rPr lang="en-IN" sz="2500" dirty="0" smtClean="0"/>
+              <a:rPr lang="en-IN" sz="2500" dirty="0"/>
               <a:t> object.</a:t>
             </a:r>
           </a:p>
           <a:p>
-            <a:endParaRPr lang="en-IN" sz="2500" dirty="0" smtClean="0"/>
-          </a:p>
-          <a:p>
-            <a:r>
-              <a:rPr lang="en-IN" sz="2500" dirty="0" smtClean="0"/>
+            <a:endParaRPr lang="en-IN" sz="2500" dirty="0"/>
+          </a:p>
+          <a:p>
+            <a:r>
+              <a:rPr lang="en-IN" sz="2500" dirty="0"/>
               <a:t>What ever response you are trying to give to the browser  , that response we are adding to response object.</a:t>
             </a:r>
           </a:p>
           <a:p>
-            <a:endParaRPr lang="en-IN" sz="2500" dirty="0" smtClean="0"/>
-          </a:p>
-          <a:p>
-            <a:r>
-              <a:rPr lang="en-IN" sz="2500" dirty="0" smtClean="0"/>
+            <a:endParaRPr lang="en-IN" sz="2500" dirty="0"/>
+          </a:p>
+          <a:p>
+            <a:r>
+              <a:rPr lang="en-IN" sz="2500" dirty="0"/>
               <a:t>Some general settings are there for every application . Before sending response from the servlet , we have to specify what type of response we are sending to the browser.</a:t>
             </a:r>
             <a:endParaRPr lang="en-US" sz="2500" dirty="0"/>
@@ -7380,7 +7801,7 @@
           <p:nvPr/>
         </p:nvPicPr>
         <p:blipFill>
-          <a:blip r:embed="rId3"/>
+          <a:blip r:embed="rId2"/>
           <a:srcRect/>
           <a:stretch>
             <a:fillRect/>
@@ -7404,18 +7825,54 @@
           <a:effectLst/>
         </p:spPr>
       </p:pic>
+      <mc:AlternateContent xmlns:mc="http://schemas.openxmlformats.org/markup-compatibility/2006">
+        <mc:Choice xmlns:p14="http://schemas.microsoft.com/office/powerpoint/2010/main" Requires="p14">
+          <p:contentPart p14:bwMode="auto" r:id="rId3">
+            <p14:nvContentPartPr>
+              <p14:cNvPr id="27651" name="Ink 3"/>
+              <p14:cNvContentPartPr>
+                <a14:cpLocks xmlns:a14="http://schemas.microsoft.com/office/drawing/2010/main" noRot="1" noChangeAspect="1" noEditPoints="1" noChangeArrowheads="1" noChangeShapeType="1"/>
+              </p14:cNvContentPartPr>
+              <p14:nvPr/>
+            </p14:nvContentPartPr>
+            <p14:xfrm>
+              <a:off x="3394075" y="2098675"/>
+              <a:ext cx="1017588" cy="357188"/>
+            </p14:xfrm>
+          </p:contentPart>
+        </mc:Choice>
+        <mc:Fallback>
+          <p:pic>
+            <p:nvPicPr>
+              <p:cNvPr id="27651" name="Ink 3"/>
+              <p:cNvPicPr>
+                <a:picLocks noRot="1" noChangeAspect="1" noEditPoints="1" noChangeArrowheads="1" noChangeShapeType="1"/>
+              </p:cNvPicPr>
+              <p:nvPr/>
+            </p:nvPicPr>
+            <p:blipFill>
+              <a:blip r:embed="rId4"/>
+              <a:stretch>
+                <a:fillRect/>
+              </a:stretch>
+            </p:blipFill>
+            <p:spPr>
+              <a:xfrm>
+                <a:off x="3384723" y="2089332"/>
+                <a:ext cx="1036292" cy="375874"/>
+              </a:xfrm>
+              <a:prstGeom prst="rect">
+                <a:avLst/>
+              </a:prstGeom>
+            </p:spPr>
+          </p:pic>
+        </mc:Fallback>
+      </mc:AlternateContent>
     </p:spTree>
   </p:cSld>
   <p:clrMapOvr>
     <a:masterClrMapping/>
   </p:clrMapOvr>
-  <p:timing>
-    <p:tnLst>
-      <p:par>
-        <p:cTn id="1" dur="indefinite" restart="never" nodeType="tmRoot"/>
-      </p:par>
-    </p:tnLst>
-  </p:timing>
 </p:sld>
 </file>
 
@@ -7474,13 +7931,6 @@
   <p:clrMapOvr>
     <a:masterClrMapping/>
   </p:clrMapOvr>
-  <p:timing>
-    <p:tnLst>
-      <p:par>
-        <p:cTn id="1" dur="indefinite" restart="never" nodeType="tmRoot"/>
-      </p:par>
-    </p:tnLst>
-  </p:timing>
 </p:sld>
 </file>
 
@@ -7510,7 +7960,7 @@
           <p:nvPr/>
         </p:nvPicPr>
         <p:blipFill>
-          <a:blip r:embed="rId3"/>
+          <a:blip r:embed="rId2"/>
           <a:srcRect/>
           <a:stretch>
             <a:fillRect/>
@@ -7534,18 +7984,54 @@
           <a:effectLst/>
         </p:spPr>
       </p:pic>
+      <mc:AlternateContent xmlns:mc="http://schemas.openxmlformats.org/markup-compatibility/2006">
+        <mc:Choice xmlns:p14="http://schemas.microsoft.com/office/powerpoint/2010/main" Requires="p14">
+          <p:contentPart p14:bwMode="auto" r:id="rId3">
+            <p14:nvContentPartPr>
+              <p14:cNvPr id="29700" name="Ink 4"/>
+              <p14:cNvContentPartPr>
+                <a14:cpLocks xmlns:a14="http://schemas.microsoft.com/office/drawing/2010/main" noRot="1" noChangeAspect="1" noEditPoints="1" noChangeArrowheads="1" noChangeShapeType="1"/>
+              </p14:cNvContentPartPr>
+              <p14:nvPr/>
+            </p14:nvContentPartPr>
+            <p14:xfrm>
+              <a:off x="7626350" y="4606925"/>
+              <a:ext cx="1116013" cy="787400"/>
+            </p14:xfrm>
+          </p:contentPart>
+        </mc:Choice>
+        <mc:Fallback>
+          <p:pic>
+            <p:nvPicPr>
+              <p:cNvPr id="29700" name="Ink 4"/>
+              <p:cNvPicPr>
+                <a:picLocks noRot="1" noChangeAspect="1" noEditPoints="1" noChangeArrowheads="1" noChangeShapeType="1"/>
+              </p:cNvPicPr>
+              <p:nvPr/>
+            </p:nvPicPr>
+            <p:blipFill>
+              <a:blip r:embed="rId4"/>
+              <a:stretch>
+                <a:fillRect/>
+              </a:stretch>
+            </p:blipFill>
+            <p:spPr>
+              <a:xfrm>
+                <a:off x="7616996" y="4597551"/>
+                <a:ext cx="1134721" cy="806148"/>
+              </a:xfrm>
+              <a:prstGeom prst="rect">
+                <a:avLst/>
+              </a:prstGeom>
+            </p:spPr>
+          </p:pic>
+        </mc:Fallback>
+      </mc:AlternateContent>
     </p:spTree>
   </p:cSld>
   <p:clrMapOvr>
     <a:masterClrMapping/>
   </p:clrMapOvr>
-  <p:timing>
-    <p:tnLst>
-      <p:par>
-        <p:cTn id="1" dur="indefinite" restart="never" nodeType="tmRoot"/>
-      </p:par>
-    </p:tnLst>
-  </p:timing>
 </p:sld>
 </file>
 
@@ -7575,7 +8061,7 @@
           <p:nvPr/>
         </p:nvPicPr>
         <p:blipFill>
-          <a:blip r:embed="rId3"/>
+          <a:blip r:embed="rId2"/>
           <a:srcRect/>
           <a:stretch>
             <a:fillRect/>
@@ -7599,18 +8085,54 @@
           <a:effectLst/>
         </p:spPr>
       </p:pic>
+      <mc:AlternateContent xmlns:mc="http://schemas.openxmlformats.org/markup-compatibility/2006">
+        <mc:Choice xmlns:p14="http://schemas.microsoft.com/office/powerpoint/2010/main" Requires="p14">
+          <p:contentPart p14:bwMode="auto" r:id="rId3">
+            <p14:nvContentPartPr>
+              <p14:cNvPr id="30723" name="Ink 3"/>
+              <p14:cNvContentPartPr>
+                <a14:cpLocks xmlns:a14="http://schemas.microsoft.com/office/drawing/2010/main" noRot="1" noChangeAspect="1" noEditPoints="1" noChangeArrowheads="1" noChangeShapeType="1"/>
+              </p14:cNvContentPartPr>
+              <p14:nvPr/>
+            </p14:nvContentPartPr>
+            <p14:xfrm>
+              <a:off x="6348413" y="741363"/>
+              <a:ext cx="866775" cy="777875"/>
+            </p14:xfrm>
+          </p:contentPart>
+        </mc:Choice>
+        <mc:Fallback>
+          <p:pic>
+            <p:nvPicPr>
+              <p:cNvPr id="30723" name="Ink 3"/>
+              <p:cNvPicPr>
+                <a:picLocks noRot="1" noChangeAspect="1" noEditPoints="1" noChangeArrowheads="1" noChangeShapeType="1"/>
+              </p:cNvPicPr>
+              <p:nvPr/>
+            </p:nvPicPr>
+            <p:blipFill>
+              <a:blip r:embed="rId4"/>
+              <a:stretch>
+                <a:fillRect/>
+              </a:stretch>
+            </p:blipFill>
+            <p:spPr>
+              <a:xfrm>
+                <a:off x="6339074" y="732030"/>
+                <a:ext cx="885454" cy="796541"/>
+              </a:xfrm>
+              <a:prstGeom prst="rect">
+                <a:avLst/>
+              </a:prstGeom>
+            </p:spPr>
+          </p:pic>
+        </mc:Fallback>
+      </mc:AlternateContent>
     </p:spTree>
   </p:cSld>
   <p:clrMapOvr>
     <a:masterClrMapping/>
   </p:clrMapOvr>
-  <p:timing>
-    <p:tnLst>
-      <p:par>
-        <p:cTn id="1" dur="indefinite" restart="never" nodeType="tmRoot"/>
-      </p:par>
-    </p:tnLst>
-  </p:timing>
 </p:sld>
 </file>
 
@@ -7640,7 +8162,7 @@
           <p:nvPr/>
         </p:nvPicPr>
         <p:blipFill>
-          <a:blip r:embed="rId3"/>
+          <a:blip r:embed="rId2"/>
           <a:srcRect/>
           <a:stretch>
             <a:fillRect/>
@@ -7664,18 +8186,54 @@
           <a:effectLst/>
         </p:spPr>
       </p:pic>
+      <mc:AlternateContent xmlns:mc="http://schemas.openxmlformats.org/markup-compatibility/2006">
+        <mc:Choice xmlns:p14="http://schemas.microsoft.com/office/powerpoint/2010/main" Requires="p14">
+          <p:contentPart p14:bwMode="auto" r:id="rId3">
+            <p14:nvContentPartPr>
+              <p14:cNvPr id="31747" name="Ink 3"/>
+              <p14:cNvContentPartPr>
+                <a14:cpLocks xmlns:a14="http://schemas.microsoft.com/office/drawing/2010/main" noRot="1" noChangeAspect="1" noEditPoints="1" noChangeArrowheads="1" noChangeShapeType="1"/>
+              </p14:cNvContentPartPr>
+              <p14:nvPr/>
+            </p14:nvContentPartPr>
+            <p14:xfrm>
+              <a:off x="1268413" y="1884363"/>
+              <a:ext cx="758825" cy="357187"/>
+            </p14:xfrm>
+          </p:contentPart>
+        </mc:Choice>
+        <mc:Fallback>
+          <p:pic>
+            <p:nvPicPr>
+              <p:cNvPr id="31747" name="Ink 3"/>
+              <p:cNvPicPr>
+                <a:picLocks noRot="1" noChangeAspect="1" noEditPoints="1" noChangeArrowheads="1" noChangeShapeType="1"/>
+              </p:cNvPicPr>
+              <p:nvPr/>
+            </p:nvPicPr>
+            <p:blipFill>
+              <a:blip r:embed="rId4"/>
+              <a:stretch>
+                <a:fillRect/>
+              </a:stretch>
+            </p:blipFill>
+            <p:spPr>
+              <a:xfrm>
+                <a:off x="1259063" y="1875011"/>
+                <a:ext cx="777526" cy="375892"/>
+              </a:xfrm>
+              <a:prstGeom prst="rect">
+                <a:avLst/>
+              </a:prstGeom>
+            </p:spPr>
+          </p:pic>
+        </mc:Fallback>
+      </mc:AlternateContent>
     </p:spTree>
   </p:cSld>
   <p:clrMapOvr>
     <a:masterClrMapping/>
   </p:clrMapOvr>
-  <p:timing>
-    <p:tnLst>
-      <p:par>
-        <p:cTn id="1" dur="indefinite" restart="never" nodeType="tmRoot"/>
-      </p:par>
-    </p:tnLst>
-  </p:timing>
 </p:sld>
 </file>
 
@@ -7734,13 +8292,6 @@
   <p:clrMapOvr>
     <a:masterClrMapping/>
   </p:clrMapOvr>
-  <p:timing>
-    <p:tnLst>
-      <p:par>
-        <p:cTn id="1" dur="indefinite" restart="never" nodeType="tmRoot"/>
-      </p:par>
-    </p:tnLst>
-  </p:timing>
 </p:sld>
 </file>
 
@@ -7770,7 +8321,7 @@
           <p:nvPr/>
         </p:nvPicPr>
         <p:blipFill>
-          <a:blip r:embed="rId3"/>
+          <a:blip r:embed="rId2"/>
           <a:srcRect/>
           <a:stretch>
             <a:fillRect/>
@@ -7794,18 +8345,54 @@
           <a:effectLst/>
         </p:spPr>
       </p:pic>
+      <mc:AlternateContent xmlns:mc="http://schemas.openxmlformats.org/markup-compatibility/2006">
+        <mc:Choice xmlns:p14="http://schemas.microsoft.com/office/powerpoint/2010/main" Requires="p14">
+          <p:contentPart p14:bwMode="auto" r:id="rId3">
+            <p14:nvContentPartPr>
+              <p14:cNvPr id="32771" name="Ink 3"/>
+              <p14:cNvContentPartPr>
+                <a14:cpLocks xmlns:a14="http://schemas.microsoft.com/office/drawing/2010/main" noRot="1" noChangeAspect="1" noEditPoints="1" noChangeArrowheads="1" noChangeShapeType="1"/>
+              </p14:cNvContentPartPr>
+              <p14:nvPr/>
+            </p14:nvContentPartPr>
+            <p14:xfrm>
+              <a:off x="2205038" y="5527675"/>
+              <a:ext cx="1206500" cy="285750"/>
+            </p14:xfrm>
+          </p:contentPart>
+        </mc:Choice>
+        <mc:Fallback>
+          <p:pic>
+            <p:nvPicPr>
+              <p:cNvPr id="32771" name="Ink 3"/>
+              <p:cNvPicPr>
+                <a:picLocks noRot="1" noChangeAspect="1" noEditPoints="1" noChangeArrowheads="1" noChangeShapeType="1"/>
+              </p:cNvPicPr>
+              <p:nvPr/>
+            </p:nvPicPr>
+            <p:blipFill>
+              <a:blip r:embed="rId4"/>
+              <a:stretch>
+                <a:fillRect/>
+              </a:stretch>
+            </p:blipFill>
+            <p:spPr>
+              <a:xfrm>
+                <a:off x="2195671" y="5518400"/>
+                <a:ext cx="1225233" cy="304301"/>
+              </a:xfrm>
+              <a:prstGeom prst="rect">
+                <a:avLst/>
+              </a:prstGeom>
+            </p:spPr>
+          </p:pic>
+        </mc:Fallback>
+      </mc:AlternateContent>
     </p:spTree>
   </p:cSld>
   <p:clrMapOvr>
     <a:masterClrMapping/>
   </p:clrMapOvr>
-  <p:timing>
-    <p:tnLst>
-      <p:par>
-        <p:cTn id="1" dur="indefinite" restart="never" nodeType="tmRoot"/>
-      </p:par>
-    </p:tnLst>
-  </p:timing>
 </p:sld>
 </file>
 
@@ -7835,7 +8422,7 @@
           <p:nvPr/>
         </p:nvPicPr>
         <p:blipFill>
-          <a:blip r:embed="rId3"/>
+          <a:blip r:embed="rId2"/>
           <a:srcRect/>
           <a:stretch>
             <a:fillRect/>
@@ -7859,18 +8446,54 @@
           <a:effectLst/>
         </p:spPr>
       </p:pic>
+      <mc:AlternateContent xmlns:mc="http://schemas.openxmlformats.org/markup-compatibility/2006">
+        <mc:Choice xmlns:p14="http://schemas.microsoft.com/office/powerpoint/2010/main" Requires="p14">
+          <p:contentPart p14:bwMode="auto" r:id="rId3">
+            <p14:nvContentPartPr>
+              <p14:cNvPr id="33795" name="Ink 3"/>
+              <p14:cNvContentPartPr>
+                <a14:cpLocks xmlns:a14="http://schemas.microsoft.com/office/drawing/2010/main" noRot="1" noChangeAspect="1" noEditPoints="1" noChangeArrowheads="1" noChangeShapeType="1"/>
+              </p14:cNvContentPartPr>
+              <p14:nvPr/>
+            </p14:nvContentPartPr>
+            <p14:xfrm>
+              <a:off x="6653213" y="3697288"/>
+              <a:ext cx="1116012" cy="608012"/>
+            </p14:xfrm>
+          </p:contentPart>
+        </mc:Choice>
+        <mc:Fallback>
+          <p:pic>
+            <p:nvPicPr>
+              <p:cNvPr id="33795" name="Ink 3"/>
+              <p:cNvPicPr>
+                <a:picLocks noRot="1" noChangeAspect="1" noEditPoints="1" noChangeArrowheads="1" noChangeShapeType="1"/>
+              </p:cNvPicPr>
+              <p:nvPr/>
+            </p:nvPicPr>
+            <p:blipFill>
+              <a:blip r:embed="rId4"/>
+              <a:stretch>
+                <a:fillRect/>
+              </a:stretch>
+            </p:blipFill>
+            <p:spPr>
+              <a:xfrm>
+                <a:off x="6643859" y="3687923"/>
+                <a:ext cx="1134720" cy="626742"/>
+              </a:xfrm>
+              <a:prstGeom prst="rect">
+                <a:avLst/>
+              </a:prstGeom>
+            </p:spPr>
+          </p:pic>
+        </mc:Fallback>
+      </mc:AlternateContent>
     </p:spTree>
   </p:cSld>
   <p:clrMapOvr>
     <a:masterClrMapping/>
   </p:clrMapOvr>
-  <p:timing>
-    <p:tnLst>
-      <p:par>
-        <p:cTn id="1" dur="indefinite" restart="never" nodeType="tmRoot"/>
-      </p:par>
-    </p:tnLst>
-  </p:timing>
 </p:sld>
 </file>
 
@@ -7972,7 +8595,7 @@
           <a:lstStyle/>
           <a:p>
             <a:r>
-              <a:rPr lang="en-IN" sz="2600" dirty="0" smtClean="0"/>
+              <a:rPr lang="en-IN" sz="2600" dirty="0"/>
               <a:t>Initially response object is empty , we have to add some response into response object.</a:t>
             </a:r>
             <a:endParaRPr lang="en-US" sz="2600" dirty="0"/>
@@ -8035,17 +8658,17 @@
           <a:lstStyle/>
           <a:p>
             <a:r>
-              <a:rPr lang="en-IN" sz="3000" dirty="0" err="1" smtClean="0"/>
+              <a:rPr lang="en-IN" sz="3000" dirty="0" err="1"/>
               <a:t>printWriter</a:t>
             </a:r>
             <a:r>
-              <a:rPr lang="en-IN" sz="3000" dirty="0" smtClean="0"/>
+              <a:rPr lang="en-IN" sz="3000" dirty="0"/>
               <a:t> is a class in java.</a:t>
             </a:r>
           </a:p>
           <a:p>
             <a:r>
-              <a:rPr lang="en-IN" sz="3000" smtClean="0"/>
+              <a:rPr lang="en-IN" sz="3000"/>
               <a:t>java.io package</a:t>
             </a:r>
             <a:endParaRPr lang="en-US" sz="3000" dirty="0"/>
@@ -8100,404 +8723,404 @@
           <a:lstStyle/>
           <a:p>
             <a:r>
-              <a:rPr lang="en-US" dirty="0" smtClean="0"/>
+              <a:rPr lang="en-US" dirty="0"/>
               <a:t>package </a:t>
             </a:r>
             <a:r>
-              <a:rPr lang="en-US" dirty="0" err="1" smtClean="0"/>
+              <a:rPr lang="en-US" dirty="0" err="1"/>
               <a:t>com.mycompany</a:t>
             </a:r>
             <a:r>
-              <a:rPr lang="en-US" dirty="0" smtClean="0"/>
+              <a:rPr lang="en-US" dirty="0"/>
               <a:t>;</a:t>
             </a:r>
           </a:p>
           <a:p>
             <a:r>
-              <a:rPr lang="en-US" dirty="0" smtClean="0"/>
+              <a:rPr lang="en-US" dirty="0"/>
               <a:t>import </a:t>
             </a:r>
             <a:r>
-              <a:rPr lang="en-US" dirty="0" err="1" smtClean="0"/>
+              <a:rPr lang="en-US" dirty="0" err="1"/>
               <a:t>java.io.IOException</a:t>
             </a:r>
             <a:r>
-              <a:rPr lang="en-US" dirty="0" smtClean="0"/>
+              <a:rPr lang="en-US" dirty="0"/>
               <a:t>;</a:t>
             </a:r>
           </a:p>
           <a:p>
             <a:r>
-              <a:rPr lang="en-US" dirty="0" smtClean="0"/>
+              <a:rPr lang="en-US" dirty="0"/>
               <a:t>import </a:t>
             </a:r>
             <a:r>
-              <a:rPr lang="en-US" dirty="0" err="1" smtClean="0"/>
+              <a:rPr lang="en-US" dirty="0" err="1"/>
               <a:t>java.io.PrintWriter</a:t>
             </a:r>
             <a:r>
-              <a:rPr lang="en-US" dirty="0" smtClean="0"/>
+              <a:rPr lang="en-US" dirty="0"/>
               <a:t>;</a:t>
             </a:r>
           </a:p>
           <a:p>
-            <a:endParaRPr lang="en-US" dirty="0" smtClean="0"/>
-          </a:p>
-          <a:p>
-            <a:r>
-              <a:rPr lang="en-US" dirty="0" smtClean="0"/>
+            <a:endParaRPr lang="en-US" dirty="0"/>
+          </a:p>
+          <a:p>
+            <a:r>
+              <a:rPr lang="en-US" dirty="0"/>
               <a:t>import </a:t>
             </a:r>
             <a:r>
-              <a:rPr lang="en-US" dirty="0" err="1" smtClean="0"/>
+              <a:rPr lang="en-US" dirty="0" err="1"/>
               <a:t>javax.servlet.Servlet</a:t>
             </a:r>
             <a:r>
-              <a:rPr lang="en-US" dirty="0" smtClean="0"/>
+              <a:rPr lang="en-US" dirty="0"/>
               <a:t>;</a:t>
             </a:r>
           </a:p>
           <a:p>
             <a:r>
-              <a:rPr lang="en-US" dirty="0" smtClean="0"/>
+              <a:rPr lang="en-US" dirty="0"/>
               <a:t>import </a:t>
             </a:r>
             <a:r>
-              <a:rPr lang="en-US" dirty="0" err="1" smtClean="0"/>
+              <a:rPr lang="en-US" dirty="0" err="1"/>
               <a:t>javax.servlet.ServletConfig</a:t>
             </a:r>
             <a:r>
-              <a:rPr lang="en-US" dirty="0" smtClean="0"/>
+              <a:rPr lang="en-US" dirty="0"/>
               <a:t>;</a:t>
             </a:r>
           </a:p>
           <a:p>
             <a:r>
-              <a:rPr lang="en-US" dirty="0" smtClean="0"/>
+              <a:rPr lang="en-US" dirty="0"/>
               <a:t>import </a:t>
             </a:r>
             <a:r>
-              <a:rPr lang="en-US" dirty="0" err="1" smtClean="0"/>
+              <a:rPr lang="en-US" dirty="0" err="1"/>
               <a:t>javax.servlet.ServletException</a:t>
             </a:r>
             <a:r>
-              <a:rPr lang="en-US" dirty="0" smtClean="0"/>
+              <a:rPr lang="en-US" dirty="0"/>
               <a:t>;</a:t>
             </a:r>
           </a:p>
           <a:p>
             <a:r>
-              <a:rPr lang="en-US" dirty="0" smtClean="0"/>
+              <a:rPr lang="en-US" dirty="0"/>
               <a:t>import </a:t>
             </a:r>
             <a:r>
-              <a:rPr lang="en-US" dirty="0" err="1" smtClean="0"/>
+              <a:rPr lang="en-US" dirty="0" err="1"/>
               <a:t>javax.servlet.ServletRequest</a:t>
             </a:r>
             <a:r>
-              <a:rPr lang="en-US" dirty="0" smtClean="0"/>
+              <a:rPr lang="en-US" dirty="0"/>
               <a:t>;</a:t>
             </a:r>
           </a:p>
           <a:p>
             <a:r>
-              <a:rPr lang="en-US" dirty="0" smtClean="0"/>
+              <a:rPr lang="en-US" dirty="0"/>
               <a:t>import </a:t>
             </a:r>
             <a:r>
-              <a:rPr lang="en-US" dirty="0" err="1" smtClean="0"/>
+              <a:rPr lang="en-US" dirty="0" err="1"/>
               <a:t>javax.servlet.ServletResponse</a:t>
             </a:r>
             <a:r>
-              <a:rPr lang="en-US" dirty="0" smtClean="0"/>
+              <a:rPr lang="en-US" dirty="0"/>
               <a:t>;</a:t>
             </a:r>
           </a:p>
           <a:p>
-            <a:endParaRPr lang="en-US" dirty="0" smtClean="0"/>
-          </a:p>
-          <a:p>
-            <a:r>
-              <a:rPr lang="en-US" dirty="0" smtClean="0"/>
+            <a:endParaRPr lang="en-US" dirty="0"/>
+          </a:p>
+          <a:p>
+            <a:r>
+              <a:rPr lang="en-US" dirty="0"/>
               <a:t>public class </a:t>
             </a:r>
             <a:r>
-              <a:rPr lang="en-US" dirty="0" err="1" smtClean="0"/>
+              <a:rPr lang="en-US" dirty="0" err="1"/>
               <a:t>FirstServlet</a:t>
             </a:r>
             <a:r>
-              <a:rPr lang="en-US" dirty="0" smtClean="0"/>
+              <a:rPr lang="en-US" dirty="0"/>
               <a:t> implements Servlet {  </a:t>
             </a:r>
           </a:p>
           <a:p>
             <a:r>
-              <a:rPr lang="en-US" dirty="0" smtClean="0"/>
+              <a:rPr lang="en-US" dirty="0"/>
               <a:t>    public </a:t>
             </a:r>
             <a:r>
-              <a:rPr lang="en-US" dirty="0" err="1" smtClean="0"/>
+              <a:rPr lang="en-US" dirty="0" err="1"/>
               <a:t>FirstServlet</a:t>
             </a:r>
             <a:r>
-              <a:rPr lang="en-US" dirty="0" smtClean="0"/>
+              <a:rPr lang="en-US" dirty="0"/>
               <a:t>() {</a:t>
             </a:r>
           </a:p>
           <a:p>
             <a:r>
-              <a:rPr lang="en-US" dirty="0" smtClean="0"/>
+              <a:rPr lang="en-US" dirty="0"/>
               <a:t>    }</a:t>
             </a:r>
           </a:p>
           <a:p>
-            <a:endParaRPr lang="en-US" dirty="0" smtClean="0"/>
-          </a:p>
-          <a:p>
-            <a:r>
-              <a:rPr lang="en-US" dirty="0" smtClean="0"/>
+            <a:endParaRPr lang="en-US" dirty="0"/>
+          </a:p>
+          <a:p>
+            <a:r>
+              <a:rPr lang="en-US" dirty="0"/>
               <a:t>	public void init(</a:t>
             </a:r>
             <a:r>
-              <a:rPr lang="en-US" dirty="0" err="1" smtClean="0"/>
+              <a:rPr lang="en-US" dirty="0" err="1"/>
               <a:t>ServletConfig</a:t>
             </a:r>
             <a:r>
-              <a:rPr lang="en-US" dirty="0" smtClean="0"/>
+              <a:rPr lang="en-US" dirty="0"/>
               <a:t> </a:t>
             </a:r>
             <a:r>
-              <a:rPr lang="en-US" dirty="0" err="1" smtClean="0"/>
+              <a:rPr lang="en-US" dirty="0" err="1"/>
               <a:t>config</a:t>
             </a:r>
             <a:r>
-              <a:rPr lang="en-US" dirty="0" smtClean="0"/>
+              <a:rPr lang="en-US" dirty="0"/>
               <a:t>) throws </a:t>
             </a:r>
             <a:r>
-              <a:rPr lang="en-US" dirty="0" err="1" smtClean="0"/>
+              <a:rPr lang="en-US" dirty="0" err="1"/>
               <a:t>ServletException</a:t>
             </a:r>
             <a:r>
-              <a:rPr lang="en-US" dirty="0" smtClean="0"/>
+              <a:rPr lang="en-US" dirty="0"/>
               <a:t> {</a:t>
             </a:r>
           </a:p>
           <a:p>
             <a:r>
-              <a:rPr lang="en-US" dirty="0" smtClean="0"/>
+              <a:rPr lang="en-US" dirty="0"/>
               <a:t>		</a:t>
             </a:r>
           </a:p>
           <a:p>
             <a:r>
-              <a:rPr lang="en-US" dirty="0" smtClean="0"/>
+              <a:rPr lang="en-US" dirty="0"/>
               <a:t>	}	</a:t>
             </a:r>
           </a:p>
           <a:p>
             <a:r>
-              <a:rPr lang="en-US" dirty="0" smtClean="0"/>
+              <a:rPr lang="en-US" dirty="0"/>
               <a:t>	public void destroy() {</a:t>
             </a:r>
           </a:p>
           <a:p>
             <a:r>
-              <a:rPr lang="en-US" dirty="0" smtClean="0"/>
+              <a:rPr lang="en-US" dirty="0"/>
               <a:t>		</a:t>
             </a:r>
           </a:p>
           <a:p>
             <a:r>
-              <a:rPr lang="en-US" dirty="0" smtClean="0"/>
+              <a:rPr lang="en-US" dirty="0"/>
               <a:t>	}	</a:t>
             </a:r>
           </a:p>
           <a:p>
             <a:r>
-              <a:rPr lang="en-US" dirty="0" smtClean="0"/>
+              <a:rPr lang="en-US" dirty="0"/>
               <a:t>	public </a:t>
             </a:r>
             <a:r>
-              <a:rPr lang="en-US" dirty="0" err="1" smtClean="0"/>
+              <a:rPr lang="en-US" dirty="0" err="1"/>
               <a:t>ServletConfig</a:t>
             </a:r>
             <a:r>
-              <a:rPr lang="en-US" dirty="0" smtClean="0"/>
+              <a:rPr lang="en-US" dirty="0"/>
               <a:t> </a:t>
             </a:r>
             <a:r>
-              <a:rPr lang="en-US" dirty="0" err="1" smtClean="0"/>
+              <a:rPr lang="en-US" dirty="0" err="1"/>
               <a:t>getServletConfig</a:t>
             </a:r>
             <a:r>
-              <a:rPr lang="en-US" dirty="0" smtClean="0"/>
+              <a:rPr lang="en-US" dirty="0"/>
               <a:t>() {</a:t>
             </a:r>
           </a:p>
           <a:p>
             <a:r>
-              <a:rPr lang="en-US" dirty="0" smtClean="0"/>
+              <a:rPr lang="en-US" dirty="0"/>
               <a:t>		return null;</a:t>
             </a:r>
           </a:p>
           <a:p>
             <a:r>
-              <a:rPr lang="en-US" dirty="0" smtClean="0"/>
+              <a:rPr lang="en-US" dirty="0"/>
               <a:t>	}	</a:t>
             </a:r>
           </a:p>
           <a:p>
             <a:r>
-              <a:rPr lang="en-US" dirty="0" smtClean="0"/>
+              <a:rPr lang="en-US" dirty="0"/>
               <a:t>	public String </a:t>
             </a:r>
             <a:r>
-              <a:rPr lang="en-US" dirty="0" err="1" smtClean="0"/>
+              <a:rPr lang="en-US" dirty="0" err="1"/>
               <a:t>getServletInfo</a:t>
             </a:r>
             <a:r>
-              <a:rPr lang="en-US" dirty="0" smtClean="0"/>
+              <a:rPr lang="en-US" dirty="0"/>
               <a:t>() {</a:t>
             </a:r>
           </a:p>
           <a:p>
             <a:r>
-              <a:rPr lang="en-US" dirty="0" smtClean="0"/>
+              <a:rPr lang="en-US" dirty="0"/>
               <a:t>		return null; </a:t>
             </a:r>
           </a:p>
           <a:p>
             <a:r>
-              <a:rPr lang="en-US" dirty="0" smtClean="0"/>
+              <a:rPr lang="en-US" dirty="0"/>
               <a:t>	}	</a:t>
             </a:r>
           </a:p>
           <a:p>
             <a:r>
-              <a:rPr lang="en-US" dirty="0" smtClean="0"/>
+              <a:rPr lang="en-US" dirty="0"/>
               <a:t>	public void service(</a:t>
             </a:r>
             <a:r>
-              <a:rPr lang="en-US" dirty="0" err="1" smtClean="0"/>
+              <a:rPr lang="en-US" dirty="0" err="1"/>
               <a:t>ServletRequest</a:t>
             </a:r>
             <a:r>
-              <a:rPr lang="en-US" dirty="0" smtClean="0"/>
+              <a:rPr lang="en-US" dirty="0"/>
               <a:t> request, </a:t>
             </a:r>
             <a:r>
-              <a:rPr lang="en-US" dirty="0" err="1" smtClean="0"/>
+              <a:rPr lang="en-US" dirty="0" err="1"/>
               <a:t>ServletResponse</a:t>
             </a:r>
             <a:r>
-              <a:rPr lang="en-US" dirty="0" smtClean="0"/>
+              <a:rPr lang="en-US" dirty="0"/>
               <a:t> response) throws </a:t>
             </a:r>
             <a:r>
-              <a:rPr lang="en-US" dirty="0" err="1" smtClean="0"/>
+              <a:rPr lang="en-US" dirty="0" err="1"/>
               <a:t>ServletException</a:t>
             </a:r>
             <a:r>
-              <a:rPr lang="en-US" dirty="0" smtClean="0"/>
+              <a:rPr lang="en-US" dirty="0"/>
               <a:t>, </a:t>
             </a:r>
             <a:r>
-              <a:rPr lang="en-US" dirty="0" err="1" smtClean="0"/>
+              <a:rPr lang="en-US" dirty="0" err="1"/>
               <a:t>IOException</a:t>
             </a:r>
             <a:r>
-              <a:rPr lang="en-US" dirty="0" smtClean="0"/>
+              <a:rPr lang="en-US" dirty="0"/>
               <a:t> {</a:t>
             </a:r>
           </a:p>
           <a:p>
             <a:r>
-              <a:rPr lang="en-US" dirty="0" smtClean="0"/>
+              <a:rPr lang="en-US" dirty="0"/>
               <a:t>	  </a:t>
             </a:r>
             <a:r>
-              <a:rPr lang="en-US" dirty="0" err="1" smtClean="0"/>
+              <a:rPr lang="en-US" dirty="0" err="1"/>
               <a:t>response.setContentType</a:t>
             </a:r>
             <a:r>
-              <a:rPr lang="en-US" dirty="0" smtClean="0"/>
+              <a:rPr lang="en-US" dirty="0"/>
               <a:t>("text/html");   //By default response type is “text/html” </a:t>
             </a:r>
           </a:p>
           <a:p>
-            <a:endParaRPr lang="en-US" dirty="0" smtClean="0"/>
-          </a:p>
-          <a:p>
-            <a:r>
-              <a:rPr lang="en-US" dirty="0" smtClean="0"/>
+            <a:endParaRPr lang="en-US" dirty="0"/>
+          </a:p>
+          <a:p>
+            <a:r>
+              <a:rPr lang="en-US" dirty="0"/>
               <a:t>	  //</a:t>
             </a:r>
             <a:r>
-              <a:rPr lang="en-US" dirty="0" err="1" smtClean="0"/>
+              <a:rPr lang="en-US" dirty="0" err="1"/>
               <a:t>response.setContentType</a:t>
             </a:r>
             <a:r>
-              <a:rPr lang="en-US" dirty="0" smtClean="0"/>
+              <a:rPr lang="en-US" dirty="0"/>
               <a:t>("application/</a:t>
             </a:r>
             <a:r>
-              <a:rPr lang="en-US" dirty="0" err="1" smtClean="0"/>
+              <a:rPr lang="en-US" dirty="0" err="1"/>
               <a:t>json</a:t>
             </a:r>
             <a:r>
-              <a:rPr lang="en-US" dirty="0" smtClean="0"/>
+              <a:rPr lang="en-US" dirty="0"/>
               <a:t>");</a:t>
             </a:r>
           </a:p>
           <a:p>
             <a:r>
-              <a:rPr lang="en-US" dirty="0" smtClean="0"/>
+              <a:rPr lang="en-US" dirty="0"/>
               <a:t>	  </a:t>
             </a:r>
             <a:r>
-              <a:rPr lang="en-US" dirty="0" err="1" smtClean="0"/>
+              <a:rPr lang="en-US" dirty="0" err="1"/>
               <a:t>PrintWriter</a:t>
             </a:r>
             <a:r>
-              <a:rPr lang="en-US" dirty="0" smtClean="0"/>
+              <a:rPr lang="en-US" dirty="0"/>
               <a:t> writer=</a:t>
             </a:r>
             <a:r>
-              <a:rPr lang="en-US" dirty="0" err="1" smtClean="0"/>
+              <a:rPr lang="en-US" dirty="0" err="1"/>
               <a:t>response.getWriter</a:t>
             </a:r>
             <a:r>
-              <a:rPr lang="en-US" dirty="0" smtClean="0"/>
+              <a:rPr lang="en-US" dirty="0"/>
               <a:t>();</a:t>
             </a:r>
           </a:p>
           <a:p>
             <a:r>
-              <a:rPr lang="en-US" dirty="0" smtClean="0"/>
+              <a:rPr lang="en-US" dirty="0"/>
               <a:t>	  </a:t>
             </a:r>
             <a:r>
-              <a:rPr lang="en-US" dirty="0" err="1" smtClean="0"/>
+              <a:rPr lang="en-US" dirty="0" err="1"/>
               <a:t>writer.println</a:t>
             </a:r>
             <a:r>
-              <a:rPr lang="en-US" dirty="0" smtClean="0"/>
+              <a:rPr lang="en-US" dirty="0"/>
               <a:t>("This is first Servlet Application....");</a:t>
             </a:r>
           </a:p>
           <a:p>
-            <a:endParaRPr lang="en-US" dirty="0" smtClean="0"/>
-          </a:p>
-          <a:p>
-            <a:r>
-              <a:rPr lang="en-US" dirty="0" smtClean="0"/>
+            <a:endParaRPr lang="en-US" dirty="0"/>
+          </a:p>
+          <a:p>
+            <a:r>
+              <a:rPr lang="en-US" dirty="0"/>
               <a:t>	}</a:t>
             </a:r>
           </a:p>
           <a:p>
             <a:r>
-              <a:rPr lang="en-US" dirty="0" smtClean="0"/>
+              <a:rPr lang="en-US" dirty="0"/>
               <a:t>}</a:t>
             </a:r>
           </a:p>
@@ -8529,7 +9152,7 @@
           <a:lstStyle/>
           <a:p>
             <a:r>
-              <a:rPr lang="en-IN" dirty="0" smtClean="0"/>
+              <a:rPr lang="en-IN" dirty="0"/>
               <a:t>FirstServlet.java</a:t>
             </a:r>
             <a:endParaRPr lang="en-US" dirty="0"/>
@@ -8642,122 +9265,121 @@
           <a:lstStyle/>
           <a:p>
             <a:r>
-              <a:rPr lang="en-US" sz="2700" dirty="0" smtClean="0"/>
+              <a:rPr lang="en-US" sz="2700" dirty="0"/>
               <a:t>&lt;?xml version=</a:t>
             </a:r>
             <a:r>
-              <a:rPr lang="en-US" sz="2700" i="1" dirty="0" smtClean="0"/>
+              <a:rPr lang="en-US" sz="2700" i="1" dirty="0"/>
               <a:t>"1.0" encoding="UTF-8"?&gt;</a:t>
             </a:r>
           </a:p>
           <a:p>
             <a:r>
-              <a:rPr lang="en-US" sz="2700" dirty="0" smtClean="0"/>
+              <a:rPr lang="en-US" sz="2700" dirty="0"/>
               <a:t> &lt;web-app&gt;</a:t>
             </a:r>
           </a:p>
           <a:p>
             <a:r>
-              <a:rPr lang="en-US" sz="2700" dirty="0" smtClean="0"/>
+              <a:rPr lang="en-US" sz="2700" dirty="0"/>
               <a:t>    &lt;servlet&gt;    </a:t>
             </a:r>
           </a:p>
           <a:p>
             <a:r>
-              <a:rPr lang="en-US" sz="2700" dirty="0" smtClean="0"/>
+              <a:rPr lang="en-US" sz="2700" dirty="0"/>
               <a:t>        &lt;servlet-name&gt;</a:t>
             </a:r>
             <a:r>
-              <a:rPr lang="en-US" sz="2700" dirty="0" err="1" smtClean="0"/>
+              <a:rPr lang="en-US" sz="2700" dirty="0" err="1"/>
               <a:t>FirstServlet</a:t>
             </a:r>
             <a:r>
-              <a:rPr lang="en-US" sz="2700" dirty="0" smtClean="0"/>
+              <a:rPr lang="en-US" sz="2700" dirty="0"/>
               <a:t>&lt;/servlet-name&gt;</a:t>
             </a:r>
           </a:p>
           <a:p>
             <a:r>
-              <a:rPr lang="en-US" sz="2700" dirty="0" smtClean="0"/>
+              <a:rPr lang="en-US" sz="2700" dirty="0"/>
               <a:t>        &lt;servlet-class&gt;</a:t>
             </a:r>
             <a:r>
-              <a:rPr lang="en-US" sz="2700" dirty="0" err="1" smtClean="0"/>
+              <a:rPr lang="en-US" sz="2700" dirty="0" err="1"/>
               <a:t>com.mycompany.FirstServlet</a:t>
             </a:r>
             <a:r>
-              <a:rPr lang="en-US" sz="2700" dirty="0" smtClean="0"/>
+              <a:rPr lang="en-US" sz="2700" dirty="0"/>
               <a:t>&lt;/servlet- 									class&gt;</a:t>
             </a:r>
           </a:p>
           <a:p>
             <a:r>
-              <a:rPr lang="en-US" sz="2700" dirty="0" smtClean="0"/>
+              <a:rPr lang="en-US" sz="2700" dirty="0"/>
               <a:t>   &lt;/servlet&gt;</a:t>
             </a:r>
           </a:p>
           <a:p>
             <a:r>
-              <a:rPr lang="en-US" sz="2700" dirty="0" smtClean="0"/>
+              <a:rPr lang="en-US" sz="2700" dirty="0"/>
               <a:t>   &lt;servlet-mapping&gt;</a:t>
             </a:r>
           </a:p>
           <a:p>
             <a:r>
-              <a:rPr lang="en-US" sz="2700" dirty="0" smtClean="0"/>
+              <a:rPr lang="en-US" sz="2700" dirty="0"/>
               <a:t>   	 &lt;servlet-name&gt;</a:t>
             </a:r>
             <a:r>
-              <a:rPr lang="en-US" sz="2700" dirty="0" err="1" smtClean="0"/>
+              <a:rPr lang="en-US" sz="2700" dirty="0" err="1"/>
               <a:t>FirstServlet</a:t>
             </a:r>
             <a:r>
-              <a:rPr lang="en-US" sz="2700" dirty="0" smtClean="0"/>
+              <a:rPr lang="en-US" sz="2700" dirty="0"/>
               <a:t>&lt;/servlet-name&gt;</a:t>
             </a:r>
           </a:p>
           <a:p>
             <a:r>
-              <a:rPr lang="en-US" sz="2700" dirty="0" smtClean="0"/>
+              <a:rPr lang="en-US" sz="2700" dirty="0"/>
               <a:t>            &lt;</a:t>
             </a:r>
             <a:r>
-              <a:rPr lang="en-US" sz="2700" dirty="0" err="1" smtClean="0"/>
+              <a:rPr lang="en-US" sz="2700" dirty="0" err="1"/>
               <a:t>url</a:t>
             </a:r>
             <a:r>
-              <a:rPr lang="en-US" sz="2700" dirty="0" smtClean="0"/>
+              <a:rPr lang="en-US" sz="2700" dirty="0"/>
               <a:t>-pattern&gt;/</a:t>
             </a:r>
             <a:r>
-              <a:rPr lang="en-US" sz="2700" dirty="0" err="1" smtClean="0"/>
+              <a:rPr lang="en-US" sz="2700" dirty="0" err="1"/>
               <a:t>FirstServlet</a:t>
             </a:r>
             <a:r>
-              <a:rPr lang="en-US" sz="2700" dirty="0" smtClean="0"/>
+              <a:rPr lang="en-US" sz="2700" dirty="0"/>
               <a:t>&lt;/</a:t>
             </a:r>
             <a:r>
-              <a:rPr lang="en-US" sz="2700" dirty="0" err="1" smtClean="0"/>
+              <a:rPr lang="en-US" sz="2700" dirty="0" err="1"/>
               <a:t>url</a:t>
             </a:r>
             <a:r>
-              <a:rPr lang="en-US" sz="2700" dirty="0" smtClean="0"/>
+              <a:rPr lang="en-US" sz="2700" dirty="0"/>
               <a:t>-pattern&gt;</a:t>
             </a:r>
           </a:p>
           <a:p>
             <a:r>
-              <a:rPr lang="en-US" sz="2700" dirty="0" smtClean="0"/>
+              <a:rPr lang="en-US" sz="2700" dirty="0"/>
               <a:t>   &lt;/servlet-mapping&gt;</a:t>
             </a:r>
           </a:p>
           <a:p>
             <a:r>
-              <a:rPr lang="en-US" sz="2700" dirty="0" smtClean="0"/>
+              <a:rPr lang="en-US" sz="2700" dirty="0"/>
               <a:t>&lt;/web-app&gt;</a:t>
             </a:r>
-            <a:endParaRPr lang="en-US" sz="2700" dirty="0"/>
           </a:p>
         </p:txBody>
       </p:sp>
@@ -8783,37 +9405,37 @@
           <a:lstStyle/>
           <a:p>
             <a:r>
-              <a:rPr lang="en-IN" dirty="0" smtClean="0"/>
+              <a:rPr lang="en-IN" dirty="0"/>
               <a:t>The logical name associated with </a:t>
             </a:r>
             <a:r>
-              <a:rPr lang="en-IN" dirty="0" err="1" smtClean="0"/>
+              <a:rPr lang="en-IN" dirty="0" err="1"/>
               <a:t>url</a:t>
             </a:r>
             <a:r>
-              <a:rPr lang="en-IN" dirty="0" smtClean="0"/>
+              <a:rPr lang="en-IN" dirty="0"/>
               <a:t> pattern is  </a:t>
             </a:r>
             <a:r>
-              <a:rPr lang="en-IN" dirty="0" err="1" smtClean="0"/>
+              <a:rPr lang="en-IN" dirty="0" err="1"/>
               <a:t>FirstServlet</a:t>
             </a:r>
             <a:r>
-              <a:rPr lang="en-IN" dirty="0" smtClean="0"/>
+              <a:rPr lang="en-IN" dirty="0"/>
               <a:t>  . </a:t>
             </a:r>
           </a:p>
           <a:p>
             <a:r>
-              <a:rPr lang="en-IN" dirty="0" smtClean="0"/>
+              <a:rPr lang="en-IN" dirty="0"/>
               <a:t>Logical name , this and that logical names are matched so </a:t>
             </a:r>
             <a:r>
-              <a:rPr lang="en-IN" dirty="0" err="1" smtClean="0"/>
+              <a:rPr lang="en-IN" dirty="0" err="1"/>
               <a:t>com.tcs.FirsrServlet</a:t>
             </a:r>
             <a:r>
-              <a:rPr lang="en-IN" dirty="0" smtClean="0"/>
+              <a:rPr lang="en-IN" dirty="0"/>
               <a:t> class will be executed.</a:t>
             </a:r>
             <a:endParaRPr lang="en-US" dirty="0"/>
@@ -8867,30 +9489,30 @@
           <a:lstStyle/>
           <a:p>
             <a:r>
-              <a:rPr lang="en-IN" sz="2800" dirty="0" smtClean="0"/>
+              <a:rPr lang="en-IN" sz="2800" dirty="0"/>
               <a:t>Root tag of web.xml file is &lt;web-app&gt;</a:t>
             </a:r>
           </a:p>
           <a:p>
             <a:r>
-              <a:rPr lang="en-IN" sz="2800" dirty="0" smtClean="0"/>
+              <a:rPr lang="en-IN" sz="2800" dirty="0"/>
               <a:t>And it has two child tags</a:t>
             </a:r>
           </a:p>
           <a:p>
             <a:r>
-              <a:rPr lang="en-IN" sz="2800" dirty="0" smtClean="0"/>
+              <a:rPr lang="en-IN" sz="2800" dirty="0"/>
               <a:t>&lt;servlet&gt;</a:t>
             </a:r>
           </a:p>
           <a:p>
             <a:r>
-              <a:rPr lang="en-IN" sz="2800" dirty="0" smtClean="0"/>
+              <a:rPr lang="en-IN" sz="2800" dirty="0"/>
               <a:t>&lt;servlet-mapping&gt;</a:t>
             </a:r>
           </a:p>
           <a:p>
-            <a:endParaRPr lang="en-IN" sz="2800" dirty="0" smtClean="0"/>
+            <a:endParaRPr lang="en-IN" sz="2800" dirty="0"/>
           </a:p>
           <a:p>
             <a:endParaRPr lang="en-US" sz="2800" dirty="0"/>
@@ -8945,7 +9567,7 @@
           <a:lstStyle/>
           <a:p>
             <a:r>
-              <a:rPr lang="en-IN" sz="3000" dirty="0" smtClean="0"/>
+              <a:rPr lang="en-IN" sz="3000" dirty="0"/>
               <a:t>By default class name is taken as URL pattern , in browser window when you type the URL pattern , that URL pattern comes to server side , in the server side it will check in web.xml file . In web.xml file the url is matched , for that URL pattern the logical name is “FirstServlet” , with that logical name which class is configured , that class will be taken .</a:t>
             </a:r>
             <a:endParaRPr lang="en-US" sz="3000" dirty="0"/>
@@ -9073,13 +9695,6 @@
   <p:clrMapOvr>
     <a:masterClrMapping/>
   </p:clrMapOvr>
-  <p:timing>
-    <p:tnLst>
-      <p:par>
-        <p:cTn id="1" dur="indefinite" restart="never" nodeType="tmRoot"/>
-      </p:par>
-    </p:tnLst>
-  </p:timing>
 </p:sld>
 </file>
 
@@ -9341,7 +9956,7 @@
           <p:nvPr/>
         </p:nvPicPr>
         <p:blipFill>
-          <a:blip r:embed="rId3"/>
+          <a:blip r:embed="rId2"/>
           <a:srcRect/>
           <a:stretch>
             <a:fillRect/>
@@ -9365,18 +9980,54 @@
           <a:effectLst/>
         </p:spPr>
       </p:pic>
+      <mc:AlternateContent xmlns:mc="http://schemas.openxmlformats.org/markup-compatibility/2006">
+        <mc:Choice xmlns:p14="http://schemas.microsoft.com/office/powerpoint/2010/main" Requires="p14">
+          <p:contentPart p14:bwMode="auto" r:id="rId3">
+            <p14:nvContentPartPr>
+              <p14:cNvPr id="60419" name="Ink 3"/>
+              <p14:cNvContentPartPr>
+                <a14:cpLocks xmlns:a14="http://schemas.microsoft.com/office/drawing/2010/main" noRot="1" noChangeAspect="1" noEditPoints="1" noChangeArrowheads="1" noChangeShapeType="1"/>
+              </p14:cNvContentPartPr>
+              <p14:nvPr/>
+            </p14:nvContentPartPr>
+            <p14:xfrm>
+              <a:off x="5429250" y="4803775"/>
+              <a:ext cx="492125" cy="277813"/>
+            </p14:xfrm>
+          </p:contentPart>
+        </mc:Choice>
+        <mc:Fallback>
+          <p:pic>
+            <p:nvPicPr>
+              <p:cNvPr id="60419" name="Ink 3"/>
+              <p:cNvPicPr>
+                <a:picLocks noRot="1" noChangeAspect="1" noEditPoints="1" noChangeArrowheads="1" noChangeShapeType="1"/>
+              </p:cNvPicPr>
+              <p:nvPr/>
+            </p:nvPicPr>
+            <p:blipFill>
+              <a:blip r:embed="rId4"/>
+              <a:stretch>
+                <a:fillRect/>
+              </a:stretch>
+            </p:blipFill>
+            <p:spPr>
+              <a:xfrm>
+                <a:off x="5419883" y="4794443"/>
+                <a:ext cx="510859" cy="296477"/>
+              </a:xfrm>
+              <a:prstGeom prst="rect">
+                <a:avLst/>
+              </a:prstGeom>
+            </p:spPr>
+          </p:pic>
+        </mc:Fallback>
+      </mc:AlternateContent>
     </p:spTree>
   </p:cSld>
   <p:clrMapOvr>
     <a:masterClrMapping/>
   </p:clrMapOvr>
-  <p:timing>
-    <p:tnLst>
-      <p:par>
-        <p:cTn id="1" dur="indefinite" restart="never" nodeType="tmRoot"/>
-      </p:par>
-    </p:tnLst>
-  </p:timing>
 </p:sld>
 </file>
 
@@ -9435,13 +10086,6 @@
   <p:clrMapOvr>
     <a:masterClrMapping/>
   </p:clrMapOvr>
-  <p:timing>
-    <p:tnLst>
-      <p:par>
-        <p:cTn id="1" dur="indefinite" restart="never" nodeType="tmRoot"/>
-      </p:par>
-    </p:tnLst>
-  </p:timing>
 </p:sld>
 </file>
 
@@ -9732,13 +10376,6 @@
   <p:clrMapOvr>
     <a:masterClrMapping/>
   </p:clrMapOvr>
-  <p:timing>
-    <p:tnLst>
-      <p:par>
-        <p:cTn id="1" dur="indefinite" restart="never" nodeType="tmRoot"/>
-      </p:par>
-    </p:tnLst>
-  </p:timing>
 </p:sld>
 </file>
 
@@ -9989,7 +10626,7 @@
           <a:lstStyle/>
           <a:p>
             <a:r>
-              <a:rPr lang="en-IN" sz="3000" b="1" dirty="0" smtClean="0">
+              <a:rPr lang="en-IN" sz="3000" b="1" dirty="0">
                 <a:solidFill>
                   <a:srgbClr val="FF0000"/>
                 </a:solidFill>
@@ -10415,13 +11052,6 @@
   <p:clrMapOvr>
     <a:masterClrMapping/>
   </p:clrMapOvr>
-  <p:timing>
-    <p:tnLst>
-      <p:par>
-        <p:cTn id="1" dur="indefinite" restart="never" nodeType="tmRoot"/>
-      </p:par>
-    </p:tnLst>
-  </p:timing>
 </p:sld>
 </file>
 
@@ -10683,7 +11313,7 @@
           <p:nvPr/>
         </p:nvPicPr>
         <p:blipFill>
-          <a:blip r:embed="rId3"/>
+          <a:blip r:embed="rId2"/>
           <a:srcRect/>
           <a:stretch>
             <a:fillRect/>
@@ -10707,18 +11337,54 @@
           <a:effectLst/>
         </p:spPr>
       </p:pic>
+      <mc:AlternateContent xmlns:mc="http://schemas.openxmlformats.org/markup-compatibility/2006">
+        <mc:Choice xmlns:p14="http://schemas.microsoft.com/office/powerpoint/2010/main" Requires="p14">
+          <p:contentPart p14:bwMode="auto" r:id="rId3">
+            <p14:nvContentPartPr>
+              <p14:cNvPr id="84995" name="Ink 3"/>
+              <p14:cNvContentPartPr>
+                <a14:cpLocks xmlns:a14="http://schemas.microsoft.com/office/drawing/2010/main" noRot="1" noChangeAspect="1" noEditPoints="1" noChangeArrowheads="1" noChangeShapeType="1"/>
+              </p14:cNvContentPartPr>
+              <p14:nvPr/>
+            </p14:nvContentPartPr>
+            <p14:xfrm>
+              <a:off x="7527925" y="4589463"/>
+              <a:ext cx="1571625" cy="1741487"/>
+            </p14:xfrm>
+          </p:contentPart>
+        </mc:Choice>
+        <mc:Fallback>
+          <p:pic>
+            <p:nvPicPr>
+              <p:cNvPr id="84995" name="Ink 3"/>
+              <p:cNvPicPr>
+                <a:picLocks noRot="1" noChangeAspect="1" noEditPoints="1" noChangeArrowheads="1" noChangeShapeType="1"/>
+              </p:cNvPicPr>
+              <p:nvPr/>
+            </p:nvPicPr>
+            <p:blipFill>
+              <a:blip r:embed="rId4"/>
+              <a:stretch>
+                <a:fillRect/>
+              </a:stretch>
+            </p:blipFill>
+            <p:spPr>
+              <a:xfrm>
+                <a:off x="7518568" y="4580131"/>
+                <a:ext cx="1590339" cy="1760151"/>
+              </a:xfrm>
+              <a:prstGeom prst="rect">
+                <a:avLst/>
+              </a:prstGeom>
+            </p:spPr>
+          </p:pic>
+        </mc:Fallback>
+      </mc:AlternateContent>
     </p:spTree>
   </p:cSld>
   <p:clrMapOvr>
     <a:masterClrMapping/>
   </p:clrMapOvr>
-  <p:timing>
-    <p:tnLst>
-      <p:par>
-        <p:cTn id="1" dur="indefinite" restart="never" nodeType="tmRoot"/>
-      </p:par>
-    </p:tnLst>
-  </p:timing>
 </p:sld>
 </file>
 
@@ -10777,13 +11443,6 @@
   <p:clrMapOvr>
     <a:masterClrMapping/>
   </p:clrMapOvr>
-  <p:timing>
-    <p:tnLst>
-      <p:par>
-        <p:cTn id="1" dur="indefinite" restart="never" nodeType="tmRoot"/>
-      </p:par>
-    </p:tnLst>
-  </p:timing>
 </p:sld>
 </file>
 
